--- a/docs/MoodMatch_중간발표.pptx
+++ b/docs/MoodMatch_중간발표.pptx
@@ -14,7 +14,6 @@
     <p:sldId id="262" r:id="rId13"/>
     <p:sldId id="263" r:id="rId14"/>
     <p:sldId id="264" r:id="rId15"/>
-    <p:sldId id="265" r:id="rId16"/>
   </p:sldIdLst>
   <p:sldSz cx="12191695" cy="6858000" type="screen4x3"/>
   <p:notesSz cx="6858000" cy="9144000"/>
@@ -3107,7 +3106,183 @@
       <p:grpSpPr/>
       <p:sp>
         <p:nvSpPr>
-          <p:cNvPr id="2" name="TextBox 1"/>
+          <p:cNvPr id="2" name="Oval 1"/>
+          <p:cNvSpPr/>
+          <p:nvPr/>
+        </p:nvSpPr>
+        <p:spPr>
+          <a:xfrm>
+            <a:off x="8778240" y="640080"/>
+            <a:ext cx="2926080" cy="2926080"/>
+          </a:xfrm>
+          <a:prstGeom prst="ellipse">
+            <a:avLst/>
+          </a:prstGeom>
+          <a:solidFill>
+            <a:srgbClr val="9FD8CB"/>
+          </a:solidFill>
+          <a:ln>
+            <a:noFill/>
+          </a:ln>
+          <a:effectLst/>
+        </p:spPr>
+        <p:style>
+          <a:lnRef idx="1">
+            <a:schemeClr val="accent1"/>
+          </a:lnRef>
+          <a:fillRef idx="3">
+            <a:schemeClr val="accent1"/>
+          </a:fillRef>
+          <a:effectRef idx="2">
+            <a:schemeClr val="accent1"/>
+          </a:effectRef>
+          <a:fontRef idx="minor">
+            <a:schemeClr val="lt1"/>
+          </a:fontRef>
+        </p:style>
+        <p:txBody>
+          <a:bodyPr rtlCol="0" anchor="ctr"/>
+          <a:lstStyle/>
+          <a:p>
+            <a:pPr algn="ctr"/>
+          </a:p>
+        </p:txBody>
+      </p:sp>
+      <p:sp>
+        <p:nvSpPr>
+          <p:cNvPr id="3" name="Oval 2"/>
+          <p:cNvSpPr/>
+          <p:nvPr/>
+        </p:nvSpPr>
+        <p:spPr>
+          <a:xfrm>
+            <a:off x="10241280" y="2743200"/>
+            <a:ext cx="2194560" cy="2194560"/>
+          </a:xfrm>
+          <a:prstGeom prst="ellipse">
+            <a:avLst/>
+          </a:prstGeom>
+          <a:solidFill>
+            <a:srgbClr val="F6C9B5"/>
+          </a:solidFill>
+          <a:ln>
+            <a:noFill/>
+          </a:ln>
+          <a:effectLst/>
+        </p:spPr>
+        <p:style>
+          <a:lnRef idx="1">
+            <a:schemeClr val="accent1"/>
+          </a:lnRef>
+          <a:fillRef idx="3">
+            <a:schemeClr val="accent1"/>
+          </a:fillRef>
+          <a:effectRef idx="2">
+            <a:schemeClr val="accent1"/>
+          </a:effectRef>
+          <a:fontRef idx="minor">
+            <a:schemeClr val="lt1"/>
+          </a:fontRef>
+        </p:style>
+        <p:txBody>
+          <a:bodyPr rtlCol="0" anchor="ctr"/>
+          <a:lstStyle/>
+          <a:p>
+            <a:pPr algn="ctr"/>
+          </a:p>
+        </p:txBody>
+      </p:sp>
+      <p:sp>
+        <p:nvSpPr>
+          <p:cNvPr id="4" name="Oval 3"/>
+          <p:cNvSpPr/>
+          <p:nvPr/>
+        </p:nvSpPr>
+        <p:spPr>
+          <a:xfrm>
+            <a:off x="8412480" y="4023360"/>
+            <a:ext cx="1463040" cy="1463040"/>
+          </a:xfrm>
+          <a:prstGeom prst="ellipse">
+            <a:avLst/>
+          </a:prstGeom>
+          <a:solidFill>
+            <a:srgbClr val="F5E3A3"/>
+          </a:solidFill>
+          <a:ln>
+            <a:noFill/>
+          </a:ln>
+          <a:effectLst/>
+        </p:spPr>
+        <p:style>
+          <a:lnRef idx="1">
+            <a:schemeClr val="accent1"/>
+          </a:lnRef>
+          <a:fillRef idx="3">
+            <a:schemeClr val="accent1"/>
+          </a:fillRef>
+          <a:effectRef idx="2">
+            <a:schemeClr val="accent1"/>
+          </a:effectRef>
+          <a:fontRef idx="minor">
+            <a:schemeClr val="lt1"/>
+          </a:fontRef>
+        </p:style>
+        <p:txBody>
+          <a:bodyPr rtlCol="0" anchor="ctr"/>
+          <a:lstStyle/>
+          <a:p>
+            <a:pPr algn="ctr"/>
+          </a:p>
+        </p:txBody>
+      </p:sp>
+      <p:sp>
+        <p:nvSpPr>
+          <p:cNvPr id="5" name="Oval 4"/>
+          <p:cNvSpPr/>
+          <p:nvPr/>
+        </p:nvSpPr>
+        <p:spPr>
+          <a:xfrm>
+            <a:off x="11155680" y="1097280"/>
+            <a:ext cx="640080" cy="640080"/>
+          </a:xfrm>
+          <a:prstGeom prst="ellipse">
+            <a:avLst/>
+          </a:prstGeom>
+          <a:solidFill>
+            <a:srgbClr val="F6C9B5"/>
+          </a:solidFill>
+          <a:ln>
+            <a:noFill/>
+          </a:ln>
+          <a:effectLst/>
+        </p:spPr>
+        <p:style>
+          <a:lnRef idx="1">
+            <a:schemeClr val="accent1"/>
+          </a:lnRef>
+          <a:fillRef idx="3">
+            <a:schemeClr val="accent1"/>
+          </a:fillRef>
+          <a:effectRef idx="2">
+            <a:schemeClr val="accent1"/>
+          </a:effectRef>
+          <a:fontRef idx="minor">
+            <a:schemeClr val="lt1"/>
+          </a:fontRef>
+        </p:style>
+        <p:txBody>
+          <a:bodyPr rtlCol="0" anchor="ctr"/>
+          <a:lstStyle/>
+          <a:p>
+            <a:pPr algn="ctr"/>
+          </a:p>
+        </p:txBody>
+      </p:sp>
+      <p:sp>
+        <p:nvSpPr>
+          <p:cNvPr id="6" name="TextBox 5"/>
           <p:cNvSpPr txBox="1"/>
           <p:nvPr/>
         </p:nvSpPr>
@@ -3127,7 +3302,7 @@
           </a:bodyPr>
           <a:lstStyle/>
           <a:p>
-            <a:pPr algn="l" eaLnBrk="0">
+            <a:pPr algn="l">
               <a:lnSpc>
                 <a:spcPct val="120000"/>
               </a:lnSpc>
@@ -3150,7 +3325,7 @@
       </p:sp>
       <p:sp>
         <p:nvSpPr>
-          <p:cNvPr id="3" name="TextBox 2"/>
+          <p:cNvPr id="7" name="TextBox 6"/>
           <p:cNvSpPr txBox="1"/>
           <p:nvPr/>
         </p:nvSpPr>
@@ -3170,7 +3345,7 @@
           </a:bodyPr>
           <a:lstStyle/>
           <a:p>
-            <a:pPr algn="l" eaLnBrk="0">
+            <a:pPr algn="l">
               <a:lnSpc>
                 <a:spcPct val="120000"/>
               </a:lnSpc>
@@ -3193,14 +3368,14 @@
       </p:sp>
       <p:sp>
         <p:nvSpPr>
-          <p:cNvPr id="4" name="TextBox 3"/>
+          <p:cNvPr id="8" name="TextBox 7"/>
           <p:cNvSpPr txBox="1"/>
           <p:nvPr/>
         </p:nvSpPr>
         <p:spPr>
           <a:xfrm>
             <a:off x="822960" y="3291840"/>
-            <a:ext cx="10058400" cy="640080"/>
+            <a:ext cx="7772400" cy="1097280"/>
           </a:xfrm>
           <a:prstGeom prst="rect">
             <a:avLst/>
@@ -3213,7 +3388,95 @@
           </a:bodyPr>
           <a:lstStyle/>
           <a:p>
-            <a:pPr algn="l" eaLnBrk="0">
+            <a:pPr algn="l">
+              <a:lnSpc>
+                <a:spcPct val="130000"/>
+              </a:lnSpc>
+              <a:spcAft>
+                <a:spcPts val="600"/>
+              </a:spcAft>
+            </a:pPr>
+            <a:r>
+              <a:rPr sz="2400" b="0" lang="ko-KR" altLang="en-US">
+                <a:solidFill>
+                  <a:srgbClr val="FFFFFF"/>
+                </a:solidFill>
+                <a:latin typeface="맑은 고딕"/>
+                <a:ea typeface="맑은 고딕"/>
+              </a:rPr>
+              <a:t>오늘 기분 한 문장이면,
+딱 맞는 팝업·카페·전시까지</a:t>
+            </a:r>
+          </a:p>
+        </p:txBody>
+      </p:sp>
+      <p:sp>
+        <p:nvSpPr>
+          <p:cNvPr id="9" name="Rectangle 8"/>
+          <p:cNvSpPr/>
+          <p:nvPr/>
+        </p:nvSpPr>
+        <p:spPr>
+          <a:xfrm>
+            <a:off x="822960" y="4572000"/>
+            <a:ext cx="914400" cy="54864"/>
+          </a:xfrm>
+          <a:prstGeom prst="rect">
+            <a:avLst/>
+          </a:prstGeom>
+          <a:solidFill>
+            <a:srgbClr val="FFFFFF"/>
+          </a:solidFill>
+          <a:ln>
+            <a:noFill/>
+          </a:ln>
+          <a:effectLst/>
+        </p:spPr>
+        <p:style>
+          <a:lnRef idx="1">
+            <a:schemeClr val="accent1"/>
+          </a:lnRef>
+          <a:fillRef idx="3">
+            <a:schemeClr val="accent1"/>
+          </a:fillRef>
+          <a:effectRef idx="2">
+            <a:schemeClr val="accent1"/>
+          </a:effectRef>
+          <a:fontRef idx="minor">
+            <a:schemeClr val="lt1"/>
+          </a:fontRef>
+        </p:style>
+        <p:txBody>
+          <a:bodyPr rtlCol="0" anchor="ctr"/>
+          <a:lstStyle/>
+          <a:p>
+            <a:pPr algn="ctr"/>
+          </a:p>
+        </p:txBody>
+      </p:sp>
+      <p:sp>
+        <p:nvSpPr>
+          <p:cNvPr id="10" name="TextBox 9"/>
+          <p:cNvSpPr txBox="1"/>
+          <p:nvPr/>
+        </p:nvSpPr>
+        <p:spPr>
+          <a:xfrm>
+            <a:off x="822960" y="5120640"/>
+            <a:ext cx="10058400" cy="457200"/>
+          </a:xfrm>
+          <a:prstGeom prst="rect">
+            <a:avLst/>
+          </a:prstGeom>
+          <a:noFill/>
+        </p:spPr>
+        <p:txBody>
+          <a:bodyPr wrap="square" anchor="t" lIns="45720" rIns="45720">
+            <a:spAutoFit/>
+          </a:bodyPr>
+          <a:lstStyle/>
+          <a:p>
+            <a:pPr algn="l">
               <a:lnSpc>
                 <a:spcPct val="120000"/>
               </a:lnSpc>
@@ -3222,93 +3485,6 @@
               </a:spcAft>
             </a:pPr>
             <a:r>
-              <a:rPr sz="2600" b="0" lang="ko-KR" altLang="en-US">
-                <a:solidFill>
-                  <a:srgbClr val="FFFFFF"/>
-                </a:solidFill>
-                <a:latin typeface="맑은 고딕"/>
-                <a:ea typeface="맑은 고딕"/>
-              </a:rPr>
-              <a:t>AI 기반 개인 맞춤 팝업·카페·전시 추천 서비스</a:t>
-            </a:r>
-          </a:p>
-        </p:txBody>
-      </p:sp>
-      <p:sp>
-        <p:nvSpPr>
-          <p:cNvPr id="5" name="Rectangle 4"/>
-          <p:cNvSpPr/>
-          <p:nvPr/>
-        </p:nvSpPr>
-        <p:spPr>
-          <a:xfrm>
-            <a:off x="822960" y="4160520"/>
-            <a:ext cx="914400" cy="54864"/>
-          </a:xfrm>
-          <a:prstGeom prst="rect">
-            <a:avLst/>
-          </a:prstGeom>
-          <a:solidFill>
-            <a:srgbClr val="FFFFFF"/>
-          </a:solidFill>
-          <a:ln>
-            <a:noFill/>
-          </a:ln>
-          <a:effectLst/>
-        </p:spPr>
-        <p:style>
-          <a:lnRef idx="1">
-            <a:schemeClr val="accent1"/>
-          </a:lnRef>
-          <a:fillRef idx="3">
-            <a:schemeClr val="accent1"/>
-          </a:fillRef>
-          <a:effectRef idx="2">
-            <a:schemeClr val="accent1"/>
-          </a:effectRef>
-          <a:fontRef idx="minor">
-            <a:schemeClr val="lt1"/>
-          </a:fontRef>
-        </p:style>
-        <p:txBody>
-          <a:bodyPr rtlCol="0" anchor="ctr"/>
-          <a:lstStyle/>
-          <a:p>
-            <a:pPr algn="ctr"/>
-          </a:p>
-        </p:txBody>
-      </p:sp>
-      <p:sp>
-        <p:nvSpPr>
-          <p:cNvPr id="6" name="TextBox 5"/>
-          <p:cNvSpPr txBox="1"/>
-          <p:nvPr/>
-        </p:nvSpPr>
-        <p:spPr>
-          <a:xfrm>
-            <a:off x="822960" y="5120640"/>
-            <a:ext cx="10058400" cy="457200"/>
-          </a:xfrm>
-          <a:prstGeom prst="rect">
-            <a:avLst/>
-          </a:prstGeom>
-          <a:noFill/>
-        </p:spPr>
-        <p:txBody>
-          <a:bodyPr wrap="square" anchor="t" lIns="45720" rIns="45720">
-            <a:spAutoFit/>
-          </a:bodyPr>
-          <a:lstStyle/>
-          <a:p>
-            <a:pPr algn="l" eaLnBrk="0">
-              <a:lnSpc>
-                <a:spcPct val="120000"/>
-              </a:lnSpc>
-              <a:spcAft>
-                <a:spcPts val="600"/>
-              </a:spcAft>
-            </a:pPr>
-            <a:r>
               <a:rPr sz="1600" b="0" lang="ko-KR" altLang="en-US">
                 <a:solidFill>
                   <a:srgbClr val="DCEFEB"/>
@@ -3317,206 +3493,6 @@
                 <a:ea typeface="맑은 고딕"/>
               </a:rPr>
               <a:t>팀원: (이름 입력)</a:t>
-            </a:r>
-          </a:p>
-        </p:txBody>
-      </p:sp>
-    </p:spTree>
-  </p:cSld>
-  <p:clrMapOvr>
-    <a:masterClrMapping/>
-  </p:clrMapOvr>
-</p:sld>
-</file>
-
-<file path=ppt/slides/slide10.xml><?xml version="1.0" encoding="utf-8"?>
-<p:sld xmlns:a="http://schemas.openxmlformats.org/drawingml/2006/main" xmlns:p="http://schemas.openxmlformats.org/presentationml/2006/main" xmlns:r="http://schemas.openxmlformats.org/officeDocument/2006/relationships">
-  <p:cSld>
-    <p:bg>
-      <p:bgPr>
-        <a:solidFill>
-          <a:srgbClr val="0D6B5F"/>
-        </a:solidFill>
-        <a:effectLst/>
-      </p:bgPr>
-    </p:bg>
-    <p:spTree>
-      <p:nvGrpSpPr>
-        <p:cNvPr id="1" name=""/>
-        <p:cNvGrpSpPr/>
-        <p:nvPr/>
-      </p:nvGrpSpPr>
-      <p:grpSpPr/>
-      <p:sp>
-        <p:nvSpPr>
-          <p:cNvPr id="2" name="TextBox 1"/>
-          <p:cNvSpPr txBox="1"/>
-          <p:nvPr/>
-        </p:nvSpPr>
-        <p:spPr>
-          <a:xfrm>
-            <a:off x="822960" y="1280160"/>
-            <a:ext cx="7315200" cy="365760"/>
-          </a:xfrm>
-          <a:prstGeom prst="rect">
-            <a:avLst/>
-          </a:prstGeom>
-          <a:noFill/>
-        </p:spPr>
-        <p:txBody>
-          <a:bodyPr wrap="square" anchor="t" lIns="45720" rIns="45720">
-            <a:spAutoFit/>
-          </a:bodyPr>
-          <a:lstStyle/>
-          <a:p>
-            <a:pPr algn="l" eaLnBrk="0">
-              <a:lnSpc>
-                <a:spcPct val="120000"/>
-              </a:lnSpc>
-              <a:spcAft>
-                <a:spcPts val="600"/>
-              </a:spcAft>
-            </a:pPr>
-            <a:r>
-              <a:rPr sz="1600" b="1" lang="ko-KR" altLang="en-US">
-                <a:solidFill>
-                  <a:srgbClr val="DCEFEB"/>
-                </a:solidFill>
-                <a:latin typeface="맑은 고딕"/>
-                <a:ea typeface="맑은 고딕"/>
-              </a:rPr>
-              <a:t>최종 목표</a:t>
-            </a:r>
-          </a:p>
-        </p:txBody>
-      </p:sp>
-      <p:sp>
-        <p:nvSpPr>
-          <p:cNvPr id="3" name="TextBox 2"/>
-          <p:cNvSpPr txBox="1"/>
-          <p:nvPr/>
-        </p:nvSpPr>
-        <p:spPr>
-          <a:xfrm>
-            <a:off x="822960" y="1920240"/>
-            <a:ext cx="10515600" cy="2194560"/>
-          </a:xfrm>
-          <a:prstGeom prst="rect">
-            <a:avLst/>
-          </a:prstGeom>
-          <a:noFill/>
-        </p:spPr>
-        <p:txBody>
-          <a:bodyPr wrap="square" anchor="t" lIns="45720" rIns="45720">
-            <a:spAutoFit/>
-          </a:bodyPr>
-          <a:lstStyle/>
-          <a:p>
-            <a:pPr algn="l" eaLnBrk="0">
-              <a:lnSpc>
-                <a:spcPct val="130000"/>
-              </a:lnSpc>
-              <a:spcAft>
-                <a:spcPts val="600"/>
-              </a:spcAft>
-            </a:pPr>
-            <a:r>
-              <a:rPr sz="3000" b="1" lang="ko-KR" altLang="en-US">
-                <a:solidFill>
-                  <a:srgbClr val="FFFFFF"/>
-                </a:solidFill>
-                <a:latin typeface="맑은 고딕"/>
-                <a:ea typeface="맑은 고딕"/>
-              </a:rPr>
-              <a:t>실제 장소 데이터를 바탕으로 취향에 맞는 곳을 찾아주고,
-운영 상태까지 계속 확인하는 추천 시스템</a:t>
-            </a:r>
-          </a:p>
-        </p:txBody>
-      </p:sp>
-      <p:sp>
-        <p:nvSpPr>
-          <p:cNvPr id="4" name="Rectangle 3"/>
-          <p:cNvSpPr/>
-          <p:nvPr/>
-        </p:nvSpPr>
-        <p:spPr>
-          <a:xfrm>
-            <a:off x="822960" y="4297680"/>
-            <a:ext cx="914400" cy="54864"/>
-          </a:xfrm>
-          <a:prstGeom prst="rect">
-            <a:avLst/>
-          </a:prstGeom>
-          <a:solidFill>
-            <a:srgbClr val="FFFFFF"/>
-          </a:solidFill>
-          <a:ln>
-            <a:noFill/>
-          </a:ln>
-          <a:effectLst/>
-        </p:spPr>
-        <p:style>
-          <a:lnRef idx="1">
-            <a:schemeClr val="accent1"/>
-          </a:lnRef>
-          <a:fillRef idx="3">
-            <a:schemeClr val="accent1"/>
-          </a:fillRef>
-          <a:effectRef idx="2">
-            <a:schemeClr val="accent1"/>
-          </a:effectRef>
-          <a:fontRef idx="minor">
-            <a:schemeClr val="lt1"/>
-          </a:fontRef>
-        </p:style>
-        <p:txBody>
-          <a:bodyPr rtlCol="0" anchor="ctr"/>
-          <a:lstStyle/>
-          <a:p>
-            <a:pPr algn="ctr"/>
-          </a:p>
-        </p:txBody>
-      </p:sp>
-      <p:sp>
-        <p:nvSpPr>
-          <p:cNvPr id="5" name="TextBox 4"/>
-          <p:cNvSpPr txBox="1"/>
-          <p:nvPr/>
-        </p:nvSpPr>
-        <p:spPr>
-          <a:xfrm>
-            <a:off x="822960" y="4846320"/>
-            <a:ext cx="10058400" cy="548640"/>
-          </a:xfrm>
-          <a:prstGeom prst="rect">
-            <a:avLst/>
-          </a:prstGeom>
-          <a:noFill/>
-        </p:spPr>
-        <p:txBody>
-          <a:bodyPr wrap="square" anchor="t" lIns="45720" rIns="45720">
-            <a:spAutoFit/>
-          </a:bodyPr>
-          <a:lstStyle/>
-          <a:p>
-            <a:pPr algn="l" eaLnBrk="0">
-              <a:lnSpc>
-                <a:spcPct val="120000"/>
-              </a:lnSpc>
-              <a:spcAft>
-                <a:spcPts val="600"/>
-              </a:spcAft>
-            </a:pPr>
-            <a:r>
-              <a:rPr sz="2200" b="0" lang="ko-KR" altLang="en-US">
-                <a:solidFill>
-                  <a:srgbClr val="FFFFFF"/>
-                </a:solidFill>
-                <a:latin typeface="맑은 고딕"/>
-                <a:ea typeface="맑은 고딕"/>
-              </a:rPr>
-              <a:t>감사합니다  ·  질문 받겠습니다</a:t>
             </a:r>
           </a:p>
         </p:txBody>
@@ -3569,7 +3545,7 @@
           </a:bodyPr>
           <a:lstStyle/>
           <a:p>
-            <a:pPr algn="l" eaLnBrk="0">
+            <a:pPr algn="l">
               <a:lnSpc>
                 <a:spcPct val="120000"/>
               </a:lnSpc>
@@ -3612,7 +3588,7 @@
           </a:bodyPr>
           <a:lstStyle/>
           <a:p>
-            <a:pPr algn="l" eaLnBrk="0">
+            <a:pPr algn="l">
               <a:lnSpc>
                 <a:spcPct val="120000"/>
               </a:lnSpc>
@@ -3628,7 +3604,7 @@
                 <a:latin typeface="맑은 고딕"/>
                 <a:ea typeface="맑은 고딕"/>
               </a:rPr>
-              <a:t>내 취향에 맞고, 지금 운영 중인 곳을 찾아준다</a:t>
+              <a:t>기분 한 마디로 찾는 오늘의 갈 곳</a:t>
             </a:r>
           </a:p>
         </p:txBody>
@@ -3699,7 +3675,7 @@
           </a:bodyPr>
           <a:lstStyle/>
           <a:p>
-            <a:pPr algn="l" eaLnBrk="0">
+            <a:pPr algn="l">
               <a:lnSpc>
                 <a:spcPct val="120000"/>
               </a:lnSpc>
@@ -3742,7 +3718,7 @@
           </a:bodyPr>
           <a:lstStyle/>
           <a:p>
-            <a:pPr algn="r" eaLnBrk="0">
+            <a:pPr algn="r">
               <a:lnSpc>
                 <a:spcPct val="120000"/>
               </a:lnSpc>
@@ -3758,7 +3734,7 @@
                 <a:latin typeface="맑은 고딕"/>
                 <a:ea typeface="맑은 고딕"/>
               </a:rPr>
-              <a:t>2 / 10</a:t>
+              <a:t>2 / 9</a:t>
             </a:r>
           </a:p>
         </p:txBody>
@@ -3833,7 +3809,7 @@
           </a:bodyPr>
           <a:lstStyle/>
           <a:p>
-            <a:pPr algn="l" eaLnBrk="0">
+            <a:pPr algn="l">
               <a:lnSpc>
                 <a:spcPct val="120000"/>
               </a:lnSpc>
@@ -3876,7 +3852,7 @@
           </a:bodyPr>
           <a:lstStyle/>
           <a:p>
-            <a:pPr algn="l" eaLnBrk="0">
+            <a:pPr algn="l">
               <a:lnSpc>
                 <a:spcPct val="140000"/>
               </a:lnSpc>
@@ -3892,7 +3868,7 @@
                 <a:latin typeface="맑은 고딕"/>
                 <a:ea typeface="맑은 고딕"/>
               </a:rPr>
-              <a:t>팝업과 전시가 너무 많고 빨리 바뀌어서, 취향에 맞으면서 지금 운영 중인 곳을 찾기 어렵다.</a:t>
+              <a:t>너무 많고, 너무 빨리 바뀌는 팝업과 전시. 내 취향이면서 지금 열려 있는 곳 찾기는 늘 어려운 일</a:t>
             </a:r>
           </a:p>
         </p:txBody>
@@ -3967,7 +3943,7 @@
           </a:bodyPr>
           <a:lstStyle/>
           <a:p>
-            <a:pPr algn="l" eaLnBrk="0">
+            <a:pPr algn="l">
               <a:lnSpc>
                 <a:spcPct val="120000"/>
               </a:lnSpc>
@@ -4010,7 +3986,7 @@
           </a:bodyPr>
           <a:lstStyle/>
           <a:p>
-            <a:pPr algn="l" eaLnBrk="0">
+            <a:pPr algn="l">
               <a:lnSpc>
                 <a:spcPct val="140000"/>
               </a:lnSpc>
@@ -4026,7 +4002,7 @@
                 <a:latin typeface="맑은 고딕"/>
                 <a:ea typeface="맑은 고딕"/>
               </a:rPr>
-              <a:t>사용자 취향을 분석하고 실제 장소 데이터와 비교해 맞춤 추천한다. 운영 기간과 종료 여부도 확인한다.</a:t>
+              <a:t>“친구랑 귀여운 거 보면서 사진 찍고 싶어” 같은 한 문장으로 끝. 느낌이 비슷한 곳은 AI가 골라 주기</a:t>
             </a:r>
           </a:p>
         </p:txBody>
@@ -4101,7 +4077,7 @@
           </a:bodyPr>
           <a:lstStyle/>
           <a:p>
-            <a:pPr algn="l" eaLnBrk="0">
+            <a:pPr algn="l">
               <a:lnSpc>
                 <a:spcPct val="120000"/>
               </a:lnSpc>
@@ -4144,7 +4120,7 @@
           </a:bodyPr>
           <a:lstStyle/>
           <a:p>
-            <a:pPr algn="l" eaLnBrk="0">
+            <a:pPr algn="l">
               <a:lnSpc>
                 <a:spcPct val="140000"/>
               </a:lnSpc>
@@ -4160,7 +4136,7 @@
                 <a:latin typeface="맑은 고딕"/>
                 <a:ea typeface="맑은 고딕"/>
               </a:rPr>
-              <a:t>GPT에게 추천을 묻는 서비스가 아니다. 취향과 장소를 같은 기준의 태그로 구조화하고, 순위는 추천 알고리즘이 계산한다.</a:t>
+              <a:t>설문지 대신 한 문장! 날짜·예산·운영 여부는 코드가 꼼꼼히 걸러서, 지금 갈 수 있는 곳만 쏙</a:t>
             </a:r>
           </a:p>
         </p:txBody>
@@ -4213,7 +4189,7 @@
           </a:bodyPr>
           <a:lstStyle/>
           <a:p>
-            <a:pPr algn="l" eaLnBrk="0">
+            <a:pPr algn="l">
               <a:lnSpc>
                 <a:spcPct val="120000"/>
               </a:lnSpc>
@@ -4256,7 +4232,7 @@
           </a:bodyPr>
           <a:lstStyle/>
           <a:p>
-            <a:pPr algn="l" eaLnBrk="0">
+            <a:pPr algn="l">
               <a:lnSpc>
                 <a:spcPct val="120000"/>
               </a:lnSpc>
@@ -4272,7 +4248,7 @@
                 <a:latin typeface="맑은 고딕"/>
                 <a:ea typeface="맑은 고딕"/>
               </a:rPr>
-              <a:t>입력에서 출력까지</a:t>
+              <a:t>한 문장이 추천이 되기까지</a:t>
             </a:r>
           </a:p>
         </p:txBody>
@@ -4343,7 +4319,7 @@
           </a:bodyPr>
           <a:lstStyle/>
           <a:p>
-            <a:pPr algn="l" eaLnBrk="0">
+            <a:pPr algn="l">
               <a:lnSpc>
                 <a:spcPct val="120000"/>
               </a:lnSpc>
@@ -4386,7 +4362,7 @@
           </a:bodyPr>
           <a:lstStyle/>
           <a:p>
-            <a:pPr algn="r" eaLnBrk="0">
+            <a:pPr algn="r">
               <a:lnSpc>
                 <a:spcPct val="120000"/>
               </a:lnSpc>
@@ -4402,7 +4378,7 @@
                 <a:latin typeface="맑은 고딕"/>
                 <a:ea typeface="맑은 고딕"/>
               </a:rPr>
-              <a:t>3 / 10</a:t>
+              <a:t>3 / 9</a:t>
             </a:r>
           </a:p>
         </p:txBody>
@@ -4429,7 +4405,7 @@
           </a:bodyPr>
           <a:lstStyle/>
           <a:p>
-            <a:pPr algn="l" eaLnBrk="0">
+            <a:pPr algn="l">
               <a:lnSpc>
                 <a:spcPct val="120000"/>
               </a:lnSpc>
@@ -4520,7 +4496,7 @@
           </a:bodyPr>
           <a:lstStyle/>
           <a:p>
-            <a:pPr algn="l" eaLnBrk="0">
+            <a:pPr algn="l">
               <a:lnSpc>
                 <a:spcPct val="120000"/>
               </a:lnSpc>
@@ -4540,7 +4516,7 @@
             </a:r>
           </a:p>
           <a:p>
-            <a:pPr algn="l" eaLnBrk="0">
+            <a:pPr algn="l">
               <a:lnSpc>
                 <a:spcPct val="120000"/>
               </a:lnSpc>
@@ -4556,7 +4532,7 @@
                 <a:latin typeface="맑은 고딕"/>
                 <a:ea typeface="맑은 고딕"/>
               </a:rPr>
-              <a:t>취향 질문 답변(체험·분위기·굿즈·사진·가격), 방문 날짜, 희망 지역</a:t>
+              <a:t>기분·취향 문장 1개 + 방문 날짜, 지역, 예산 선택</a:t>
             </a:r>
           </a:p>
         </p:txBody>
@@ -4631,7 +4607,7 @@
           </a:bodyPr>
           <a:lstStyle/>
           <a:p>
-            <a:pPr algn="l" eaLnBrk="0">
+            <a:pPr algn="l">
               <a:lnSpc>
                 <a:spcPct val="120000"/>
               </a:lnSpc>
@@ -4651,7 +4627,7 @@
             </a:r>
           </a:p>
           <a:p>
-            <a:pPr algn="l" eaLnBrk="0">
+            <a:pPr algn="l">
               <a:lnSpc>
                 <a:spcPct val="120000"/>
               </a:lnSpc>
@@ -4667,7 +4643,7 @@
                 <a:latin typeface="맑은 고딕"/>
                 <a:ea typeface="맑은 고딕"/>
               </a:rPr>
-              <a:t>팝업·카페·전시의 이름, 지역, 운영 기간, 가격, 소개글, 출처</a:t>
+              <a:t>팝업·카페·전시의 이름, 지역, 운영 기간, 가격, 소개글</a:t>
             </a:r>
           </a:p>
         </p:txBody>
@@ -4694,7 +4670,7 @@
           </a:bodyPr>
           <a:lstStyle/>
           <a:p>
-            <a:pPr algn="l" eaLnBrk="0">
+            <a:pPr algn="l">
               <a:lnSpc>
                 <a:spcPct val="120000"/>
               </a:lnSpc>
@@ -4724,7 +4700,7 @@
         <p:spPr>
           <a:xfrm>
             <a:off x="3931920" y="2240280"/>
-            <a:ext cx="731520" cy="530352"/>
+            <a:ext cx="731520" cy="685800"/>
           </a:xfrm>
           <a:prstGeom prst="roundRect">
             <a:avLst>
@@ -4732,7 +4708,7 @@
             </a:avLst>
           </a:prstGeom>
           <a:solidFill>
-            <a:srgbClr val="0D6B5F"/>
+            <a:srgbClr val="1B2422"/>
           </a:solidFill>
           <a:ln>
             <a:noFill/>
@@ -4770,7 +4746,7 @@
         <p:spPr>
           <a:xfrm>
             <a:off x="3931920" y="2240280"/>
-            <a:ext cx="731520" cy="530352"/>
+            <a:ext cx="731520" cy="685800"/>
           </a:xfrm>
           <a:prstGeom prst="rect">
             <a:avLst/>
@@ -4783,7 +4759,7 @@
           </a:bodyPr>
           <a:lstStyle/>
           <a:p>
-            <a:pPr algn="ctr" eaLnBrk="0">
+            <a:pPr algn="ctr">
               <a:lnSpc>
                 <a:spcPct val="120000"/>
               </a:lnSpc>
@@ -4799,7 +4775,7 @@
                 <a:latin typeface="맑은 고딕"/>
                 <a:ea typeface="맑은 고딕"/>
               </a:rPr>
-              <a:t>AI</a:t>
+              <a:t>코드</a:t>
             </a:r>
           </a:p>
         </p:txBody>
@@ -4813,7 +4789,7 @@
         <p:spPr>
           <a:xfrm>
             <a:off x="4709160" y="2240280"/>
-            <a:ext cx="3520440" cy="530352"/>
+            <a:ext cx="3520440" cy="685800"/>
           </a:xfrm>
           <a:prstGeom prst="roundRect">
             <a:avLst>
@@ -4861,7 +4837,7 @@
         <p:spPr>
           <a:xfrm>
             <a:off x="4846320" y="2240280"/>
-            <a:ext cx="3291840" cy="530352"/>
+            <a:ext cx="3291840" cy="685800"/>
           </a:xfrm>
           <a:prstGeom prst="rect">
             <a:avLst/>
@@ -4874,7 +4850,7 @@
           </a:bodyPr>
           <a:lstStyle/>
           <a:p>
-            <a:pPr algn="l" eaLnBrk="0">
+            <a:pPr algn="l">
               <a:lnSpc>
                 <a:spcPct val="120000"/>
               </a:lnSpc>
@@ -4890,7 +4866,7 @@
                 <a:latin typeface="맑은 고딕"/>
                 <a:ea typeface="맑은 고딕"/>
               </a:rPr>
-              <a:t>취향 분석</a:t>
+              <a:t>조건 필터: 운영 기간·지역·예산</a:t>
             </a:r>
           </a:p>
         </p:txBody>
@@ -4903,8 +4879,8 @@
         </p:nvSpPr>
         <p:spPr>
           <a:xfrm>
-            <a:off x="3931920" y="2916936"/>
-            <a:ext cx="731520" cy="530352"/>
+            <a:off x="3931920" y="3081528"/>
+            <a:ext cx="731520" cy="685800"/>
           </a:xfrm>
           <a:prstGeom prst="roundRect">
             <a:avLst>
@@ -4949,8 +4925,8 @@
         </p:nvSpPr>
         <p:spPr>
           <a:xfrm>
-            <a:off x="3931920" y="2916936"/>
-            <a:ext cx="731520" cy="530352"/>
+            <a:off x="3931920" y="3081528"/>
+            <a:ext cx="731520" cy="685800"/>
           </a:xfrm>
           <a:prstGeom prst="rect">
             <a:avLst/>
@@ -4963,7 +4939,7 @@
           </a:bodyPr>
           <a:lstStyle/>
           <a:p>
-            <a:pPr algn="ctr" eaLnBrk="0">
+            <a:pPr algn="ctr">
               <a:lnSpc>
                 <a:spcPct val="120000"/>
               </a:lnSpc>
@@ -4992,8 +4968,8 @@
         </p:nvSpPr>
         <p:spPr>
           <a:xfrm>
-            <a:off x="4709160" y="2916936"/>
-            <a:ext cx="3520440" cy="530352"/>
+            <a:off x="4709160" y="3081528"/>
+            <a:ext cx="3520440" cy="685800"/>
           </a:xfrm>
           <a:prstGeom prst="roundRect">
             <a:avLst>
@@ -5040,8 +5016,8 @@
         </p:nvSpPr>
         <p:spPr>
           <a:xfrm>
-            <a:off x="4846320" y="2916936"/>
-            <a:ext cx="3291840" cy="530352"/>
+            <a:off x="4846320" y="3081528"/>
+            <a:ext cx="3291840" cy="685800"/>
           </a:xfrm>
           <a:prstGeom prst="rect">
             <a:avLst/>
@@ -5054,7 +5030,7 @@
           </a:bodyPr>
           <a:lstStyle/>
           <a:p>
-            <a:pPr algn="l" eaLnBrk="0">
+            <a:pPr algn="l">
               <a:lnSpc>
                 <a:spcPct val="120000"/>
               </a:lnSpc>
@@ -5070,7 +5046,7 @@
                 <a:latin typeface="맑은 고딕"/>
                 <a:ea typeface="맑은 고딕"/>
               </a:rPr>
-              <a:t>장소 특징 추출</a:t>
+              <a:t>문장을 의미 벡터로 변환 (사용자 문장, 장소 소개글)</a:t>
             </a:r>
           </a:p>
         </p:txBody>
@@ -5083,8 +5059,8 @@
         </p:nvSpPr>
         <p:spPr>
           <a:xfrm>
-            <a:off x="3931920" y="3593592"/>
-            <a:ext cx="731520" cy="530352"/>
+            <a:off x="3931920" y="3922776"/>
+            <a:ext cx="731520" cy="685800"/>
           </a:xfrm>
           <a:prstGeom prst="roundRect">
             <a:avLst>
@@ -5129,8 +5105,8 @@
         </p:nvSpPr>
         <p:spPr>
           <a:xfrm>
-            <a:off x="3931920" y="3593592"/>
-            <a:ext cx="731520" cy="530352"/>
+            <a:off x="3931920" y="3922776"/>
+            <a:ext cx="731520" cy="685800"/>
           </a:xfrm>
           <a:prstGeom prst="rect">
             <a:avLst/>
@@ -5143,7 +5119,7 @@
           </a:bodyPr>
           <a:lstStyle/>
           <a:p>
-            <a:pPr algn="ctr" eaLnBrk="0">
+            <a:pPr algn="ctr">
               <a:lnSpc>
                 <a:spcPct val="120000"/>
               </a:lnSpc>
@@ -5172,8 +5148,8 @@
         </p:nvSpPr>
         <p:spPr>
           <a:xfrm>
-            <a:off x="4709160" y="3593592"/>
-            <a:ext cx="3520440" cy="530352"/>
+            <a:off x="4709160" y="3922776"/>
+            <a:ext cx="3520440" cy="685800"/>
           </a:xfrm>
           <a:prstGeom prst="roundRect">
             <a:avLst>
@@ -5220,8 +5196,8 @@
         </p:nvSpPr>
         <p:spPr>
           <a:xfrm>
-            <a:off x="4846320" y="3593592"/>
-            <a:ext cx="3291840" cy="530352"/>
+            <a:off x="4846320" y="3922776"/>
+            <a:ext cx="3291840" cy="685800"/>
           </a:xfrm>
           <a:prstGeom prst="rect">
             <a:avLst/>
@@ -5234,7 +5210,7 @@
           </a:bodyPr>
           <a:lstStyle/>
           <a:p>
-            <a:pPr algn="l" eaLnBrk="0">
+            <a:pPr algn="l">
               <a:lnSpc>
                 <a:spcPct val="120000"/>
               </a:lnSpc>
@@ -5250,7 +5226,7 @@
                 <a:latin typeface="맑은 고딕"/>
                 <a:ea typeface="맑은 고딕"/>
               </a:rPr>
-              <a:t>조건 필터 (날짜·지역·가격·운영 상태)</a:t>
+              <a:t>의미 유사도 계산 → 순위 결정</a:t>
             </a:r>
           </a:p>
         </p:txBody>
@@ -5263,8 +5239,8 @@
         </p:nvSpPr>
         <p:spPr>
           <a:xfrm>
-            <a:off x="3931920" y="4270248"/>
-            <a:ext cx="731520" cy="530352"/>
+            <a:off x="3931920" y="4764024"/>
+            <a:ext cx="731520" cy="685800"/>
           </a:xfrm>
           <a:prstGeom prst="roundRect">
             <a:avLst>
@@ -5309,8 +5285,8 @@
         </p:nvSpPr>
         <p:spPr>
           <a:xfrm>
-            <a:off x="3931920" y="4270248"/>
-            <a:ext cx="731520" cy="530352"/>
+            <a:off x="3931920" y="4764024"/>
+            <a:ext cx="731520" cy="685800"/>
           </a:xfrm>
           <a:prstGeom prst="rect">
             <a:avLst/>
@@ -5323,7 +5299,7 @@
           </a:bodyPr>
           <a:lstStyle/>
           <a:p>
-            <a:pPr algn="ctr" eaLnBrk="0">
+            <a:pPr algn="ctr">
               <a:lnSpc>
                 <a:spcPct val="120000"/>
               </a:lnSpc>
@@ -5352,8 +5328,8 @@
         </p:nvSpPr>
         <p:spPr>
           <a:xfrm>
-            <a:off x="4709160" y="4270248"/>
-            <a:ext cx="3520440" cy="530352"/>
+            <a:off x="4709160" y="4764024"/>
+            <a:ext cx="3520440" cy="685800"/>
           </a:xfrm>
           <a:prstGeom prst="roundRect">
             <a:avLst>
@@ -5400,8 +5376,8 @@
         </p:nvSpPr>
         <p:spPr>
           <a:xfrm>
-            <a:off x="4846320" y="4270248"/>
-            <a:ext cx="3291840" cy="530352"/>
+            <a:off x="4846320" y="4764024"/>
+            <a:ext cx="3291840" cy="685800"/>
           </a:xfrm>
           <a:prstGeom prst="rect">
             <a:avLst/>
@@ -5414,7 +5390,7 @@
           </a:bodyPr>
           <a:lstStyle/>
           <a:p>
-            <a:pPr algn="l" eaLnBrk="0">
+            <a:pPr algn="l">
               <a:lnSpc>
                 <a:spcPct val="120000"/>
               </a:lnSpc>
@@ -5430,29 +5406,27 @@
                 <a:latin typeface="맑은 고딕"/>
                 <a:ea typeface="맑은 고딕"/>
               </a:rPr>
-              <a:t>취향 매칭 점수 계산</a:t>
-            </a:r>
-          </a:p>
-        </p:txBody>
-      </p:sp>
-      <p:sp>
-        <p:nvSpPr>
-          <p:cNvPr id="29" name="Rounded Rectangle 28"/>
+              <a:t>추천 이유 표시, 피드백 저장</a:t>
+            </a:r>
+          </a:p>
+        </p:txBody>
+      </p:sp>
+      <p:sp>
+        <p:nvSpPr>
+          <p:cNvPr id="29" name="Right Arrow 28"/>
           <p:cNvSpPr/>
           <p:nvPr/>
         </p:nvSpPr>
         <p:spPr>
           <a:xfrm>
-            <a:off x="3931920" y="4946904"/>
-            <a:ext cx="731520" cy="530352"/>
-          </a:xfrm>
-          <a:prstGeom prst="roundRect">
-            <a:avLst>
-              <a:gd name="adj" fmla="val 8000"/>
-            </a:avLst>
+            <a:off x="3611880" y="3611880"/>
+            <a:ext cx="274320" cy="365760"/>
+          </a:xfrm>
+          <a:prstGeom prst="rightArrow">
+            <a:avLst/>
           </a:prstGeom>
           <a:solidFill>
-            <a:srgbClr val="0D6B5F"/>
+            <a:srgbClr val="5C6865"/>
           </a:solidFill>
           <a:ln>
             <a:noFill/>
@@ -5483,14 +5457,58 @@
       </p:sp>
       <p:sp>
         <p:nvSpPr>
-          <p:cNvPr id="30" name="TextBox 29"/>
+          <p:cNvPr id="30" name="Right Arrow 29"/>
+          <p:cNvSpPr/>
+          <p:nvPr/>
+        </p:nvSpPr>
+        <p:spPr>
+          <a:xfrm>
+            <a:off x="8321040" y="3611880"/>
+            <a:ext cx="274320" cy="365760"/>
+          </a:xfrm>
+          <a:prstGeom prst="rightArrow">
+            <a:avLst/>
+          </a:prstGeom>
+          <a:solidFill>
+            <a:srgbClr val="5C6865"/>
+          </a:solidFill>
+          <a:ln>
+            <a:noFill/>
+          </a:ln>
+          <a:effectLst/>
+        </p:spPr>
+        <p:style>
+          <a:lnRef idx="1">
+            <a:schemeClr val="accent1"/>
+          </a:lnRef>
+          <a:fillRef idx="3">
+            <a:schemeClr val="accent1"/>
+          </a:fillRef>
+          <a:effectRef idx="2">
+            <a:schemeClr val="accent1"/>
+          </a:effectRef>
+          <a:fontRef idx="minor">
+            <a:schemeClr val="lt1"/>
+          </a:fontRef>
+        </p:style>
+        <p:txBody>
+          <a:bodyPr rtlCol="0" anchor="ctr"/>
+          <a:lstStyle/>
+          <a:p>
+            <a:pPr algn="ctr"/>
+          </a:p>
+        </p:txBody>
+      </p:sp>
+      <p:sp>
+        <p:nvSpPr>
+          <p:cNvPr id="31" name="TextBox 30"/>
           <p:cNvSpPr txBox="1"/>
           <p:nvPr/>
         </p:nvSpPr>
         <p:spPr>
           <a:xfrm>
-            <a:off x="3931920" y="4946904"/>
-            <a:ext cx="731520" cy="530352"/>
+            <a:off x="8641080" y="1828800"/>
+            <a:ext cx="2926080" cy="365760"/>
           </a:xfrm>
           <a:prstGeom prst="rect">
             <a:avLst/>
@@ -5498,12 +5516,12 @@
           <a:noFill/>
         </p:spPr>
         <p:txBody>
-          <a:bodyPr wrap="square" anchor="ctr" lIns="45720" rIns="45720">
+          <a:bodyPr wrap="square" anchor="t" lIns="45720" rIns="45720">
             <a:spAutoFit/>
           </a:bodyPr>
           <a:lstStyle/>
           <a:p>
-            <a:pPr algn="ctr" eaLnBrk="0">
+            <a:pPr algn="l">
               <a:lnSpc>
                 <a:spcPct val="120000"/>
               </a:lnSpc>
@@ -5512,228 +5530,6 @@
               </a:spcAft>
             </a:pPr>
             <a:r>
-              <a:rPr sz="1200" b="1" lang="ko-KR" altLang="en-US">
-                <a:solidFill>
-                  <a:srgbClr val="FFFFFF"/>
-                </a:solidFill>
-                <a:latin typeface="맑은 고딕"/>
-                <a:ea typeface="맑은 고딕"/>
-              </a:rPr>
-              <a:t>AI</a:t>
-            </a:r>
-          </a:p>
-        </p:txBody>
-      </p:sp>
-      <p:sp>
-        <p:nvSpPr>
-          <p:cNvPr id="31" name="Rounded Rectangle 30"/>
-          <p:cNvSpPr/>
-          <p:nvPr/>
-        </p:nvSpPr>
-        <p:spPr>
-          <a:xfrm>
-            <a:off x="4709160" y="4946904"/>
-            <a:ext cx="3520440" cy="530352"/>
-          </a:xfrm>
-          <a:prstGeom prst="roundRect">
-            <a:avLst>
-              <a:gd name="adj" fmla="val 8000"/>
-            </a:avLst>
-          </a:prstGeom>
-          <a:solidFill>
-            <a:srgbClr val="FFFFFF"/>
-          </a:solidFill>
-          <a:ln w="12700">
-            <a:solidFill>
-              <a:srgbClr val="D9DFDC"/>
-            </a:solidFill>
-          </a:ln>
-          <a:effectLst/>
-        </p:spPr>
-        <p:style>
-          <a:lnRef idx="1">
-            <a:schemeClr val="accent1"/>
-          </a:lnRef>
-          <a:fillRef idx="3">
-            <a:schemeClr val="accent1"/>
-          </a:fillRef>
-          <a:effectRef idx="2">
-            <a:schemeClr val="accent1"/>
-          </a:effectRef>
-          <a:fontRef idx="minor">
-            <a:schemeClr val="lt1"/>
-          </a:fontRef>
-        </p:style>
-        <p:txBody>
-          <a:bodyPr rtlCol="0" anchor="ctr"/>
-          <a:lstStyle/>
-          <a:p>
-            <a:pPr algn="ctr"/>
-          </a:p>
-        </p:txBody>
-      </p:sp>
-      <p:sp>
-        <p:nvSpPr>
-          <p:cNvPr id="32" name="TextBox 31"/>
-          <p:cNvSpPr txBox="1"/>
-          <p:nvPr/>
-        </p:nvSpPr>
-        <p:spPr>
-          <a:xfrm>
-            <a:off x="4846320" y="4946904"/>
-            <a:ext cx="3291840" cy="530352"/>
-          </a:xfrm>
-          <a:prstGeom prst="rect">
-            <a:avLst/>
-          </a:prstGeom>
-          <a:noFill/>
-        </p:spPr>
-        <p:txBody>
-          <a:bodyPr wrap="square" anchor="ctr" lIns="45720" rIns="45720">
-            <a:spAutoFit/>
-          </a:bodyPr>
-          <a:lstStyle/>
-          <a:p>
-            <a:pPr algn="l" eaLnBrk="0">
-              <a:lnSpc>
-                <a:spcPct val="120000"/>
-              </a:lnSpc>
-              <a:spcAft>
-                <a:spcPts val="600"/>
-              </a:spcAft>
-            </a:pPr>
-            <a:r>
-              <a:rPr sz="1400" b="0" lang="ko-KR" altLang="en-US">
-                <a:solidFill>
-                  <a:srgbClr val="1B2422"/>
-                </a:solidFill>
-                <a:latin typeface="맑은 고딕"/>
-                <a:ea typeface="맑은 고딕"/>
-              </a:rPr>
-              <a:t>추천 이유 생성</a:t>
-            </a:r>
-          </a:p>
-        </p:txBody>
-      </p:sp>
-      <p:sp>
-        <p:nvSpPr>
-          <p:cNvPr id="33" name="Right Arrow 32"/>
-          <p:cNvSpPr/>
-          <p:nvPr/>
-        </p:nvSpPr>
-        <p:spPr>
-          <a:xfrm>
-            <a:off x="3611880" y="3611880"/>
-            <a:ext cx="274320" cy="365760"/>
-          </a:xfrm>
-          <a:prstGeom prst="rightArrow">
-            <a:avLst/>
-          </a:prstGeom>
-          <a:solidFill>
-            <a:srgbClr val="5C6865"/>
-          </a:solidFill>
-          <a:ln>
-            <a:noFill/>
-          </a:ln>
-          <a:effectLst/>
-        </p:spPr>
-        <p:style>
-          <a:lnRef idx="1">
-            <a:schemeClr val="accent1"/>
-          </a:lnRef>
-          <a:fillRef idx="3">
-            <a:schemeClr val="accent1"/>
-          </a:fillRef>
-          <a:effectRef idx="2">
-            <a:schemeClr val="accent1"/>
-          </a:effectRef>
-          <a:fontRef idx="minor">
-            <a:schemeClr val="lt1"/>
-          </a:fontRef>
-        </p:style>
-        <p:txBody>
-          <a:bodyPr rtlCol="0" anchor="ctr"/>
-          <a:lstStyle/>
-          <a:p>
-            <a:pPr algn="ctr"/>
-          </a:p>
-        </p:txBody>
-      </p:sp>
-      <p:sp>
-        <p:nvSpPr>
-          <p:cNvPr id="34" name="Right Arrow 33"/>
-          <p:cNvSpPr/>
-          <p:nvPr/>
-        </p:nvSpPr>
-        <p:spPr>
-          <a:xfrm>
-            <a:off x="8321040" y="3611880"/>
-            <a:ext cx="274320" cy="365760"/>
-          </a:xfrm>
-          <a:prstGeom prst="rightArrow">
-            <a:avLst/>
-          </a:prstGeom>
-          <a:solidFill>
-            <a:srgbClr val="5C6865"/>
-          </a:solidFill>
-          <a:ln>
-            <a:noFill/>
-          </a:ln>
-          <a:effectLst/>
-        </p:spPr>
-        <p:style>
-          <a:lnRef idx="1">
-            <a:schemeClr val="accent1"/>
-          </a:lnRef>
-          <a:fillRef idx="3">
-            <a:schemeClr val="accent1"/>
-          </a:fillRef>
-          <a:effectRef idx="2">
-            <a:schemeClr val="accent1"/>
-          </a:effectRef>
-          <a:fontRef idx="minor">
-            <a:schemeClr val="lt1"/>
-          </a:fontRef>
-        </p:style>
-        <p:txBody>
-          <a:bodyPr rtlCol="0" anchor="ctr"/>
-          <a:lstStyle/>
-          <a:p>
-            <a:pPr algn="ctr"/>
-          </a:p>
-        </p:txBody>
-      </p:sp>
-      <p:sp>
-        <p:nvSpPr>
-          <p:cNvPr id="35" name="TextBox 34"/>
-          <p:cNvSpPr txBox="1"/>
-          <p:nvPr/>
-        </p:nvSpPr>
-        <p:spPr>
-          <a:xfrm>
-            <a:off x="8641080" y="1828800"/>
-            <a:ext cx="2926080" cy="365760"/>
-          </a:xfrm>
-          <a:prstGeom prst="rect">
-            <a:avLst/>
-          </a:prstGeom>
-          <a:noFill/>
-        </p:spPr>
-        <p:txBody>
-          <a:bodyPr wrap="square" anchor="t" lIns="45720" rIns="45720">
-            <a:spAutoFit/>
-          </a:bodyPr>
-          <a:lstStyle/>
-          <a:p>
-            <a:pPr algn="l" eaLnBrk="0">
-              <a:lnSpc>
-                <a:spcPct val="120000"/>
-              </a:lnSpc>
-              <a:spcAft>
-                <a:spcPts val="600"/>
-              </a:spcAft>
-            </a:pPr>
-            <a:r>
               <a:rPr sz="1400" b="1" lang="ko-KR" altLang="en-US">
                 <a:solidFill>
                   <a:srgbClr val="0D6B5F"/>
@@ -5748,7 +5544,7 @@
       </p:sp>
       <p:sp>
         <p:nvSpPr>
-          <p:cNvPr id="36" name="Rounded Rectangle 35"/>
+          <p:cNvPr id="32" name="Rounded Rectangle 31"/>
           <p:cNvSpPr/>
           <p:nvPr/>
         </p:nvSpPr>
@@ -5796,7 +5592,7 @@
       </p:sp>
       <p:sp>
         <p:nvSpPr>
-          <p:cNvPr id="37" name="TextBox 36"/>
+          <p:cNvPr id="33" name="TextBox 32"/>
           <p:cNvSpPr txBox="1"/>
           <p:nvPr/>
         </p:nvSpPr>
@@ -5816,7 +5612,7 @@
           </a:bodyPr>
           <a:lstStyle/>
           <a:p>
-            <a:pPr algn="l" eaLnBrk="0">
+            <a:pPr algn="l">
               <a:lnSpc>
                 <a:spcPct val="120000"/>
               </a:lnSpc>
@@ -5832,11 +5628,11 @@
                 <a:latin typeface="맑은 고딕"/>
                 <a:ea typeface="맑은 고딕"/>
               </a:rPr>
-              <a:t>맞춤 추천 장소 목록</a:t>
-            </a:r>
-          </a:p>
-          <a:p>
-            <a:pPr algn="l" eaLnBrk="0">
+              <a:t>추천 장소 Top 3</a:t>
+            </a:r>
+          </a:p>
+          <a:p>
+            <a:pPr algn="l">
               <a:lnSpc>
                 <a:spcPct val="120000"/>
               </a:lnSpc>
@@ -5852,11 +5648,11 @@
                 <a:latin typeface="맑은 고딕"/>
                 <a:ea typeface="맑은 고딕"/>
               </a:rPr>
-              <a:t>순위와 점수</a:t>
-            </a:r>
-          </a:p>
-          <a:p>
-            <a:pPr algn="l" eaLnBrk="0">
+              <a:t>이름, 지역, 가격, 얼마나 잘 맞는지</a:t>
+            </a:r>
+          </a:p>
+          <a:p>
+            <a:pPr algn="l">
               <a:lnSpc>
                 <a:spcPct val="120000"/>
               </a:lnSpc>
@@ -5872,11 +5668,11 @@
                 <a:latin typeface="맑은 고딕"/>
                 <a:ea typeface="맑은 고딕"/>
               </a:rPr>
-              <a:t>장소별 추천 이유</a:t>
-            </a:r>
-          </a:p>
-          <a:p>
-            <a:pPr algn="l" eaLnBrk="0">
+              <a:t>추천 이유</a:t>
+            </a:r>
+          </a:p>
+          <a:p>
+            <a:pPr algn="l">
               <a:lnSpc>
                 <a:spcPct val="120000"/>
               </a:lnSpc>
@@ -5892,11 +5688,11 @@
                 <a:latin typeface="맑은 고딕"/>
                 <a:ea typeface="맑은 고딕"/>
               </a:rPr>
-              <a:t>왜 나에게 맞는지 설명</a:t>
-            </a:r>
-          </a:p>
-          <a:p>
-            <a:pPr algn="l" eaLnBrk="0">
+              <a:t>내 기분과 왜 잘 맞는지</a:t>
+            </a:r>
+          </a:p>
+          <a:p>
+            <a:pPr algn="l">
               <a:lnSpc>
                 <a:spcPct val="120000"/>
               </a:lnSpc>
@@ -5916,7 +5712,7 @@
             </a:r>
           </a:p>
           <a:p>
-            <a:pPr algn="l" eaLnBrk="0">
+            <a:pPr algn="l">
               <a:lnSpc>
                 <a:spcPct val="120000"/>
               </a:lnSpc>
@@ -5932,7 +5728,7 @@
                 <a:latin typeface="맑은 고딕"/>
                 <a:ea typeface="맑은 고딕"/>
               </a:rPr>
-              <a:t>좋아요 / 별로예요 → 다음 추천에 반영</a:t>
+              <a:t>좋아요 / 별로예요</a:t>
             </a:r>
           </a:p>
         </p:txBody>
@@ -5985,7 +5781,7 @@
           </a:bodyPr>
           <a:lstStyle/>
           <a:p>
-            <a:pPr algn="l" eaLnBrk="0">
+            <a:pPr algn="l">
               <a:lnSpc>
                 <a:spcPct val="120000"/>
               </a:lnSpc>
@@ -6028,7 +5824,7 @@
           </a:bodyPr>
           <a:lstStyle/>
           <a:p>
-            <a:pPr algn="l" eaLnBrk="0">
+            <a:pPr algn="l">
               <a:lnSpc>
                 <a:spcPct val="120000"/>
               </a:lnSpc>
@@ -6044,7 +5840,7 @@
                 <a:latin typeface="맑은 고딕"/>
                 <a:ea typeface="맑은 고딕"/>
               </a:rPr>
-              <a:t>OpenAI GPT API가 맡는 세 가지 작업</a:t>
+              <a:t>비용 0원, AI 두 가지</a:t>
             </a:r>
           </a:p>
         </p:txBody>
@@ -6115,7 +5911,7 @@
           </a:bodyPr>
           <a:lstStyle/>
           <a:p>
-            <a:pPr algn="l" eaLnBrk="0">
+            <a:pPr algn="l">
               <a:lnSpc>
                 <a:spcPct val="120000"/>
               </a:lnSpc>
@@ -6158,7 +5954,7 @@
           </a:bodyPr>
           <a:lstStyle/>
           <a:p>
-            <a:pPr algn="r" eaLnBrk="0">
+            <a:pPr algn="r">
               <a:lnSpc>
                 <a:spcPct val="120000"/>
               </a:lnSpc>
@@ -6174,7 +5970,7 @@
                 <a:latin typeface="맑은 고딕"/>
                 <a:ea typeface="맑은 고딕"/>
               </a:rPr>
-              <a:t>4 / 10</a:t>
+              <a:t>4 / 9</a:t>
             </a:r>
           </a:p>
         </p:txBody>
@@ -6198,26 +5994,25 @@
                 <a:tableStyleId>{5C22544A-7EE6-4342-B048-85BDC9FD1C3A}</a:tableStyleId>
               </a:tblPr>
               <a:tblGrid>
-                <a:gridCol w="2194560"/>
-                <a:gridCol w="4846320"/>
-                <a:gridCol w="3840480"/>
+                <a:gridCol w="2926080"/>
+                <a:gridCol w="4480560"/>
+                <a:gridCol w="3474720"/>
               </a:tblGrid>
-              <a:tr h="685800">
+              <a:tr h="914400">
                 <a:tc>
                   <a:txBody>
                     <a:bodyPr wrap="square"/>
                     <a:lstStyle/>
                     <a:p>
-                      <a:pPr eaLnBrk="0"/>
                       <a:r>
-                        <a:rPr sz="1300" b="1" lang="ko-KR" altLang="en-US">
+                        <a:rPr sz="1200" b="1" lang="ko-KR" altLang="en-US">
                           <a:solidFill>
                             <a:srgbClr val="FFFFFF"/>
                           </a:solidFill>
                           <a:latin typeface="맑은 고딕"/>
                           <a:ea typeface="맑은 고딕"/>
                         </a:rPr>
-                        <a:t>AI 작업</a:t>
+                        <a:t>AI</a:t>
                       </a:r>
                     </a:p>
                   </a:txBody>
@@ -6232,9 +6027,8 @@
                     <a:bodyPr wrap="square"/>
                     <a:lstStyle/>
                     <a:p>
-                      <a:pPr eaLnBrk="0"/>
                       <a:r>
-                        <a:rPr sz="1300" b="1" lang="ko-KR" altLang="en-US">
+                        <a:rPr sz="1200" b="1" lang="ko-KR" altLang="en-US">
                           <a:solidFill>
                             <a:srgbClr val="FFFFFF"/>
                           </a:solidFill>
@@ -6256,9 +6050,8 @@
                     <a:bodyPr wrap="square"/>
                     <a:lstStyle/>
                     <a:p>
-                      <a:pPr eaLnBrk="0"/>
                       <a:r>
-                        <a:rPr sz="1300" b="1" lang="ko-KR" altLang="en-US">
+                        <a:rPr sz="1200" b="1" lang="ko-KR" altLang="en-US">
                           <a:solidFill>
                             <a:srgbClr val="FFFFFF"/>
                           </a:solidFill>
@@ -6276,22 +6069,23 @@
                   </a:tcPr>
                 </a:tc>
               </a:tr>
-              <a:tr h="685800">
+              <a:tr h="914400">
                 <a:tc>
                   <a:txBody>
                     <a:bodyPr wrap="square"/>
                     <a:lstStyle/>
                     <a:p>
-                      <a:pPr eaLnBrk="0"/>
                       <a:r>
-                        <a:rPr sz="1400" b="1" lang="ko-KR" altLang="en-US">
+                        <a:rPr sz="1300" b="1" lang="ko-KR" altLang="en-US">
                           <a:solidFill>
                             <a:srgbClr val="0D6B5F"/>
                           </a:solidFill>
                           <a:latin typeface="맑은 고딕"/>
                           <a:ea typeface="맑은 고딕"/>
                         </a:rPr>
-                        <a:t>① 취향 분석</a:t>
+                        <a:t>① 문장 임베딩 모델
+ko-sroberta-multitask
+(무료, 내 PC에서 실행)</a:t>
                       </a:r>
                     </a:p>
                   </a:txBody>
@@ -6306,17 +6100,18 @@
                     <a:bodyPr wrap="square"/>
                     <a:lstStyle/>
                     <a:p>
-                      <a:pPr eaLnBrk="0"/>
                       <a:r>
-                        <a:rPr sz="1400" b="0" lang="ko-KR" altLang="en-US">
+                        <a:rPr sz="1300" b="0" lang="ko-KR" altLang="en-US">
                           <a:solidFill>
                             <a:srgbClr val="1B2422"/>
                           </a:solidFill>
                           <a:latin typeface="맑은 고딕"/>
                           <a:ea typeface="맑은 고딕"/>
                         </a:rPr>
-                        <a:t>사용자 답변
-예: “체험형, 귀여운 분위기, 사진 촬영, 무료 입장 선호”</a:t>
+                        <a:t>사용자 문장
+예: “혼자 조용하게 작품 감상하고 싶어”
+장소 소개글
+예: “흑백 풍경 사진을 모은 차분한 사진전”</a:t>
                       </a:r>
                     </a:p>
                   </a:txBody>
@@ -6331,16 +6126,16 @@
                     <a:bodyPr wrap="square"/>
                     <a:lstStyle/>
                     <a:p>
-                      <a:pPr eaLnBrk="0"/>
                       <a:r>
-                        <a:rPr sz="1400" b="0" lang="ko-KR" altLang="en-US">
+                        <a:rPr sz="1300" b="0" lang="ko-KR" altLang="en-US">
                           <a:solidFill>
                             <a:srgbClr val="1B2422"/>
                           </a:solidFill>
                           <a:latin typeface="맑은 고딕"/>
                           <a:ea typeface="맑은 고딕"/>
                         </a:rPr>
-                        <a:t>태그별 선호도 프로필 (JSON)</a:t>
+                        <a:t>문장의 의미를 담은 숫자 768개(벡터)
+→ 가까울수록 비슷한 느낌</a:t>
                       </a:r>
                     </a:p>
                   </a:txBody>
@@ -6351,22 +6146,22 @@
                   </a:tcPr>
                 </a:tc>
               </a:tr>
-              <a:tr h="685800">
+              <a:tr h="914400">
                 <a:tc>
                   <a:txBody>
                     <a:bodyPr wrap="square"/>
                     <a:lstStyle/>
                     <a:p>
-                      <a:pPr eaLnBrk="0"/>
                       <a:r>
-                        <a:rPr sz="1400" b="1" lang="ko-KR" altLang="en-US">
+                        <a:rPr sz="1300" b="1" lang="ko-KR" altLang="en-US">
                           <a:solidFill>
                             <a:srgbClr val="0D6B5F"/>
                           </a:solidFill>
                           <a:latin typeface="맑은 고딕"/>
                           <a:ea typeface="맑은 고딕"/>
                         </a:rPr>
-                        <a:t>② 장소 특징 추출</a:t>
+                        <a:t>② ChatGPT
+(무료 버전, 데이터 정리용)</a:t>
                       </a:r>
                     </a:p>
                   </a:txBody>
@@ -6381,17 +6176,15 @@
                     <a:bodyPr wrap="square"/>
                     <a:lstStyle/>
                     <a:p>
-                      <a:pPr eaLnBrk="0"/>
                       <a:r>
-                        <a:rPr sz="1400" b="0" lang="ko-KR" altLang="en-US">
+                        <a:rPr sz="1300" b="0" lang="ko-KR" altLang="en-US">
                           <a:solidFill>
                             <a:srgbClr val="1B2422"/>
                           </a:solidFill>
                           <a:latin typeface="맑은 고딕"/>
                           <a:ea typeface="맑은 고딕"/>
                         </a:rPr>
-                        <a:t>팝업·전시 소개글
-예: “체험 이벤트, 포토존, 캐릭터 굿즈 판매”</a:t>
+                        <a:t>팝업 공식 안내 문구</a:t>
                       </a:r>
                     </a:p>
                   </a:txBody>
@@ -6406,17 +6199,16 @@
                     <a:bodyPr wrap="square"/>
                     <a:lstStyle/>
                     <a:p>
-                      <a:pPr eaLnBrk="0"/>
                       <a:r>
-                        <a:rPr sz="1400" b="0" lang="ko-KR" altLang="en-US">
+                        <a:rPr sz="1300" b="0" lang="ko-KR" altLang="en-US">
                           <a:solidFill>
                             <a:srgbClr val="1B2422"/>
                           </a:solidFill>
                           <a:latin typeface="맑은 고딕"/>
                           <a:ea typeface="맑은 고딕"/>
                         </a:rPr>
-                        <a:t>정해진 태그로 구조화한 데이터
-(체험, 포토존, 굿즈, 분위기, 가격대)</a:t>
+                        <a:t>이름·기간·지역·가격을 정리한 JSON
+→ 장소 데이터 파일에 등록</a:t>
                       </a:r>
                     </a:p>
                   </a:txBody>
@@ -6427,80 +6219,6 @@
                   </a:tcPr>
                 </a:tc>
               </a:tr>
-              <a:tr h="685800">
-                <a:tc>
-                  <a:txBody>
-                    <a:bodyPr wrap="square"/>
-                    <a:lstStyle/>
-                    <a:p>
-                      <a:pPr eaLnBrk="0"/>
-                      <a:r>
-                        <a:rPr sz="1400" b="1" lang="ko-KR" altLang="en-US">
-                          <a:solidFill>
-                            <a:srgbClr val="0D6B5F"/>
-                          </a:solidFill>
-                          <a:latin typeface="맑은 고딕"/>
-                          <a:ea typeface="맑은 고딕"/>
-                        </a:rPr>
-                        <a:t>③ 추천 이유 설명</a:t>
-                      </a:r>
-                    </a:p>
-                  </a:txBody>
-                  <a:tcPr marL="109728" marR="109728" anchor="ctr">
-                    <a:solidFill>
-                      <a:srgbClr val="FFFFFF"/>
-                    </a:solidFill>
-                  </a:tcPr>
-                </a:tc>
-                <a:tc>
-                  <a:txBody>
-                    <a:bodyPr wrap="square"/>
-                    <a:lstStyle/>
-                    <a:p>
-                      <a:pPr eaLnBrk="0"/>
-                      <a:r>
-                        <a:rPr sz="1400" b="0" lang="ko-KR" altLang="en-US">
-                          <a:solidFill>
-                            <a:srgbClr val="1B2422"/>
-                          </a:solidFill>
-                          <a:latin typeface="맑은 고딕"/>
-                          <a:ea typeface="맑은 고딕"/>
-                        </a:rPr>
-                        <a:t>사용자 취향 + 코드가 정한 추천 결과와 일치 태그</a:t>
-                      </a:r>
-                    </a:p>
-                  </a:txBody>
-                  <a:tcPr marL="109728" marR="109728" anchor="ctr">
-                    <a:solidFill>
-                      <a:srgbClr val="FFFFFF"/>
-                    </a:solidFill>
-                  </a:tcPr>
-                </a:tc>
-                <a:tc>
-                  <a:txBody>
-                    <a:bodyPr wrap="square"/>
-                    <a:lstStyle/>
-                    <a:p>
-                      <a:pPr eaLnBrk="0"/>
-                      <a:r>
-                        <a:rPr sz="1400" b="0" lang="ko-KR" altLang="en-US">
-                          <a:solidFill>
-                            <a:srgbClr val="1B2422"/>
-                          </a:solidFill>
-                          <a:latin typeface="맑은 고딕"/>
-                          <a:ea typeface="맑은 고딕"/>
-                        </a:rPr>
-                        <a:t>이해하기 쉬운 추천 이유 문장</a:t>
-                      </a:r>
-                    </a:p>
-                  </a:txBody>
-                  <a:tcPr marL="109728" marR="109728" anchor="ctr">
-                    <a:solidFill>
-                      <a:srgbClr val="FFFFFF"/>
-                    </a:solidFill>
-                  </a:tcPr>
-                </a:tc>
-              </a:tr>
             </a:tbl>
           </a:graphicData>
         </a:graphic>
@@ -6514,7 +6232,7 @@
         <p:spPr>
           <a:xfrm>
             <a:off x="640080" y="4892040"/>
-            <a:ext cx="10881360" cy="1188720"/>
+            <a:ext cx="10881360" cy="1097280"/>
           </a:xfrm>
           <a:prstGeom prst="roundRect">
             <a:avLst>
@@ -6560,7 +6278,7 @@
         <p:spPr>
           <a:xfrm>
             <a:off x="868680" y="4983480"/>
-            <a:ext cx="10424160" cy="1005840"/>
+            <a:ext cx="10424160" cy="914400"/>
           </a:xfrm>
           <a:prstGeom prst="rect">
             <a:avLst/>
@@ -6573,7 +6291,7 @@
           </a:bodyPr>
           <a:lstStyle/>
           <a:p>
-            <a:pPr algn="l" eaLnBrk="0">
+            <a:pPr algn="l">
               <a:lnSpc>
                 <a:spcPct val="120000"/>
               </a:lnSpc>
@@ -6589,11 +6307,11 @@
                 <a:latin typeface="맑은 고딕"/>
                 <a:ea typeface="맑은 고딕"/>
               </a:rPr>
-              <a:t>AI는 자연어를 구조화된 데이터로 바꾸고 결과를 설명한다.</a:t>
-            </a:r>
-          </a:p>
-          <a:p>
-            <a:pPr algn="l" eaLnBrk="0">
+              <a:t>AI의 몫은 문장의 ‘느낌’ 이해하기</a:t>
+            </a:r>
+          </a:p>
+          <a:p>
+            <a:pPr algn="l">
               <a:lnSpc>
                 <a:spcPct val="120000"/>
               </a:lnSpc>
@@ -6602,34 +6320,14 @@
               </a:spcAft>
             </a:pPr>
             <a:r>
-              <a:rPr sz="1500" b="0" lang="ko-KR" altLang="en-US">
+              <a:rPr sz="1400" b="0" lang="ko-KR" altLang="en-US">
                 <a:solidFill>
                   <a:srgbClr val="1B2422"/>
                 </a:solidFill>
                 <a:latin typeface="맑은 고딕"/>
                 <a:ea typeface="맑은 고딕"/>
               </a:rPr>
-              <a:t>코드는 필터링과 점수 계산을 맡는다. 그래서 같은 입력이면 항상 같은 결과가 나오고, 테스트할 수 있다.</a:t>
-            </a:r>
-          </a:p>
-          <a:p>
-            <a:pPr algn="l" eaLnBrk="0">
-              <a:lnSpc>
-                <a:spcPct val="120000"/>
-              </a:lnSpc>
-              <a:spcAft>
-                <a:spcPts val="600"/>
-              </a:spcAft>
-            </a:pPr>
-            <a:r>
-              <a:rPr sz="1200" b="0" lang="ko-KR" altLang="en-US">
-                <a:solidFill>
-                  <a:srgbClr val="5C6865"/>
-                </a:solidFill>
-                <a:latin typeface="맑은 고딕"/>
-                <a:ea typeface="맑은 고딕"/>
-              </a:rPr>
-              <a:t>공통 태그  활동: 체험·사진·굿즈·관람·음식  |  분위기: 귀여운·조용한·트렌디·예술적·레트로  |  가격: 무료~3만원 초과</a:t>
+              <a:t>날짜·예산 필터와 순위는 코드 담당. 그래서 결과는 늘 일정하고, 끝난 팝업은 절대 추천하지 않음. 비용은 0원</a:t>
             </a:r>
           </a:p>
         </p:txBody>
@@ -6682,7 +6380,7 @@
           </a:bodyPr>
           <a:lstStyle/>
           <a:p>
-            <a:pPr algn="l" eaLnBrk="0">
+            <a:pPr algn="l">
               <a:lnSpc>
                 <a:spcPct val="120000"/>
               </a:lnSpc>
@@ -6725,7 +6423,7 @@
           </a:bodyPr>
           <a:lstStyle/>
           <a:p>
-            <a:pPr algn="l" eaLnBrk="0">
+            <a:pPr algn="l">
               <a:lnSpc>
                 <a:spcPct val="120000"/>
               </a:lnSpc>
@@ -6741,7 +6439,7 @@
                 <a:latin typeface="맑은 고딕"/>
                 <a:ea typeface="맑은 고딕"/>
               </a:rPr>
-              <a:t>팝업 소개글에서 특징 추출하기 (AI ②)</a:t>
+              <a:t>말만 바꿨을 뿐인데, 달라진 추천</a:t>
             </a:r>
           </a:p>
         </p:txBody>
@@ -6812,7 +6510,7 @@
           </a:bodyPr>
           <a:lstStyle/>
           <a:p>
-            <a:pPr algn="l" eaLnBrk="0">
+            <a:pPr algn="l">
               <a:lnSpc>
                 <a:spcPct val="120000"/>
               </a:lnSpc>
@@ -6855,7 +6553,7 @@
           </a:bodyPr>
           <a:lstStyle/>
           <a:p>
-            <a:pPr algn="r" eaLnBrk="0">
+            <a:pPr algn="r">
               <a:lnSpc>
                 <a:spcPct val="120000"/>
               </a:lnSpc>
@@ -6871,7 +6569,7 @@
                 <a:latin typeface="맑은 고딕"/>
                 <a:ea typeface="맑은 고딕"/>
               </a:rPr>
-              <a:t>5 / 10</a:t>
+              <a:t>5 / 9</a:t>
             </a:r>
           </a:p>
         </p:txBody>
@@ -6884,8 +6582,8 @@
         </p:nvSpPr>
         <p:spPr>
           <a:xfrm>
-            <a:off x="640080" y="1783080"/>
-            <a:ext cx="5303520" cy="365760"/>
+            <a:off x="640080" y="1691640"/>
+            <a:ext cx="10881360" cy="320040"/>
           </a:xfrm>
           <a:prstGeom prst="rect">
             <a:avLst/>
@@ -6898,7 +6596,7 @@
           </a:bodyPr>
           <a:lstStyle/>
           <a:p>
-            <a:pPr algn="l" eaLnBrk="0">
+            <a:pPr algn="l">
               <a:lnSpc>
                 <a:spcPct val="120000"/>
               </a:lnSpc>
@@ -6907,31 +6605,96 @@
               </a:spcAft>
             </a:pPr>
             <a:r>
-              <a:rPr sz="1300" b="1" lang="ko-KR" altLang="en-US">
-                <a:solidFill>
-                  <a:srgbClr val="0D6B5F"/>
+              <a:rPr sz="1200" b="0" lang="ko-KR" altLang="en-US">
+                <a:solidFill>
+                  <a:srgbClr val="5C6865"/>
                 </a:solidFill>
                 <a:latin typeface="맑은 고딕"/>
                 <a:ea typeface="맑은 고딕"/>
               </a:rPr>
-              <a:t>ChatGPT에 입력한 프롬프트</a:t>
-            </a:r>
-          </a:p>
-        </p:txBody>
-      </p:sp>
-      <p:sp>
-        <p:nvSpPr>
-          <p:cNvPr id="8" name="Rectangle 7"/>
+              <a:t>demo/recommend.py 실제 실행 결과  ·  테스트 장소 8곳(가상 예시)  ·  방문일 2026-10-31</a:t>
+            </a:r>
+          </a:p>
+        </p:txBody>
+      </p:sp>
+      <p:sp>
+        <p:nvSpPr>
+          <p:cNvPr id="8" name="TextBox 7"/>
+          <p:cNvSpPr txBox="1"/>
+          <p:nvPr/>
+        </p:nvSpPr>
+        <p:spPr>
+          <a:xfrm>
+            <a:off x="640080" y="2057400"/>
+            <a:ext cx="5303520" cy="685800"/>
+          </a:xfrm>
+          <a:prstGeom prst="rect">
+            <a:avLst/>
+          </a:prstGeom>
+          <a:noFill/>
+        </p:spPr>
+        <p:txBody>
+          <a:bodyPr wrap="square" anchor="t" lIns="45720" rIns="45720">
+            <a:spAutoFit/>
+          </a:bodyPr>
+          <a:lstStyle/>
+          <a:p>
+            <a:pPr algn="l">
+              <a:lnSpc>
+                <a:spcPct val="110000"/>
+              </a:lnSpc>
+              <a:spcAft>
+                <a:spcPts val="200"/>
+              </a:spcAft>
+            </a:pPr>
+            <a:r>
+              <a:rPr sz="1500" b="1" lang="ko-KR" altLang="en-US">
+                <a:solidFill>
+                  <a:srgbClr val="1B2422"/>
+                </a:solidFill>
+                <a:latin typeface="맑은 고딕"/>
+                <a:ea typeface="맑은 고딕"/>
+              </a:rPr>
+              <a:t>사용자 A</a:t>
+            </a:r>
+          </a:p>
+          <a:p>
+            <a:pPr algn="l">
+              <a:lnSpc>
+                <a:spcPct val="110000"/>
+              </a:lnSpc>
+              <a:spcAft>
+                <a:spcPts val="600"/>
+              </a:spcAft>
+            </a:pPr>
+            <a:r>
+              <a:rPr sz="1200" b="0" lang="ko-KR" altLang="en-US">
+                <a:solidFill>
+                  <a:srgbClr val="5C6865"/>
+                </a:solidFill>
+                <a:latin typeface="맑은 고딕"/>
+                <a:ea typeface="맑은 고딕"/>
+              </a:rPr>
+              <a:t>“친구랑 귀여운 거 보면서 사진 많이 찍고 굿즈도 사고 싶어”  · 예산 1만원</a:t>
+            </a:r>
+          </a:p>
+        </p:txBody>
+      </p:sp>
+      <p:sp>
+        <p:nvSpPr>
+          <p:cNvPr id="9" name="Rounded Rectangle 8"/>
           <p:cNvSpPr/>
           <p:nvPr/>
         </p:nvSpPr>
         <p:spPr>
           <a:xfrm>
-            <a:off x="640080" y="2148840"/>
-            <a:ext cx="5303520" cy="3931920"/>
-          </a:xfrm>
-          <a:prstGeom prst="rect">
-            <a:avLst/>
+            <a:off x="640080" y="2834640"/>
+            <a:ext cx="5303520" cy="603504"/>
+          </a:xfrm>
+          <a:prstGeom prst="roundRect">
+            <a:avLst>
+              <a:gd name="adj" fmla="val 8000"/>
+            </a:avLst>
           </a:prstGeom>
           <a:solidFill>
             <a:srgbClr val="FFFFFF"/>
@@ -6967,14 +6730,14 @@
       </p:sp>
       <p:sp>
         <p:nvSpPr>
-          <p:cNvPr id="9" name="TextBox 8"/>
+          <p:cNvPr id="10" name="TextBox 9"/>
           <p:cNvSpPr txBox="1"/>
           <p:nvPr/>
         </p:nvSpPr>
         <p:spPr>
           <a:xfrm>
-            <a:off x="822960" y="2240280"/>
-            <a:ext cx="5029200" cy="3749039"/>
+            <a:off x="731519" y="2834640"/>
+            <a:ext cx="411480" cy="603504"/>
           </a:xfrm>
           <a:prstGeom prst="rect">
             <a:avLst/>
@@ -6982,67 +6745,12 @@
           <a:noFill/>
         </p:spPr>
         <p:txBody>
-          <a:bodyPr wrap="square" anchor="t" lIns="45720" rIns="45720">
+          <a:bodyPr wrap="square" anchor="ctr" lIns="45720" rIns="45720">
             <a:spAutoFit/>
           </a:bodyPr>
           <a:lstStyle/>
           <a:p>
-            <a:pPr algn="l" eaLnBrk="0">
-              <a:lnSpc>
-                <a:spcPct val="100000"/>
-              </a:lnSpc>
-              <a:spcAft>
-                <a:spcPts val="600"/>
-              </a:spcAft>
-            </a:pPr>
-            <a:r>
-              <a:rPr sz="1200" b="0" lang="ko-KR" altLang="en-US">
-                <a:solidFill>
-                  <a:srgbClr val="1B2422"/>
-                </a:solidFill>
-                <a:latin typeface="맑은 고딕"/>
-                <a:ea typeface="맑은 고딕"/>
-              </a:rPr>
-              <a:t>너는 팝업·전시 소개글에서 특징을 추출하는 분석기야.
-아래 소개글을 읽고 정해진 태그 안에서만 골라 JSON으로만 답해.
-허용 태그
-- activities: 체험, 사진, 굿즈, 관람, 음식
-- moods: 귀여운, 조용한, 트렌디, 예술적, 레트로
-- price: 무료, 1만원 이하, 1~3만원, 3만원 초과, 알수없음
-- reservation: 필요, 불필요, 알수없음
-규칙: 소개글에 근거가 없는 태그는 넣지 마.
-각 태그마다 근거 문장을 evidence에 짧게 적어.
-출력 형식
-{"activities": [], "moods": [], "price": "",
- "reservation": "", "evidence": {}}
-소개글: (실제 팝업 공식 안내 문구)</a:t>
-            </a:r>
-          </a:p>
-        </p:txBody>
-      </p:sp>
-      <p:sp>
-        <p:nvSpPr>
-          <p:cNvPr id="10" name="TextBox 9"/>
-          <p:cNvSpPr txBox="1"/>
-          <p:nvPr/>
-        </p:nvSpPr>
-        <p:spPr>
-          <a:xfrm>
-            <a:off x="6309360" y="1783080"/>
-            <a:ext cx="5212080" cy="365760"/>
-          </a:xfrm>
-          <a:prstGeom prst="rect">
-            <a:avLst/>
-          </a:prstGeom>
-          <a:noFill/>
-        </p:spPr>
-        <p:txBody>
-          <a:bodyPr wrap="square" anchor="t" lIns="45720" rIns="45720">
-            <a:spAutoFit/>
-          </a:bodyPr>
-          <a:lstStyle/>
-          <a:p>
-            <a:pPr algn="l" eaLnBrk="0">
+            <a:pPr algn="ctr">
               <a:lnSpc>
                 <a:spcPct val="120000"/>
               </a:lnSpc>
@@ -7051,86 +6759,41 @@
               </a:spcAft>
             </a:pPr>
             <a:r>
-              <a:rPr sz="1300" b="1" lang="ko-KR" altLang="en-US">
+              <a:rPr sz="1800" b="1" lang="ko-KR" altLang="en-US">
                 <a:solidFill>
                   <a:srgbClr val="0D6B5F"/>
                 </a:solidFill>
                 <a:latin typeface="맑은 고딕"/>
                 <a:ea typeface="맑은 고딕"/>
               </a:rPr>
-              <a:t>실행 결과</a:t>
-            </a:r>
-          </a:p>
-        </p:txBody>
-      </p:sp>
-      <p:sp>
-        <p:nvSpPr>
-          <p:cNvPr id="11" name="Rectangle 10"/>
-          <p:cNvSpPr/>
-          <p:nvPr/>
-        </p:nvSpPr>
-        <p:spPr>
-          <a:xfrm>
-            <a:off x="6309360" y="2148840"/>
-            <a:ext cx="5212080" cy="3291840"/>
+              <a:t>1</a:t>
+            </a:r>
+          </a:p>
+        </p:txBody>
+      </p:sp>
+      <p:sp>
+        <p:nvSpPr>
+          <p:cNvPr id="11" name="TextBox 10"/>
+          <p:cNvSpPr txBox="1"/>
+          <p:nvPr/>
+        </p:nvSpPr>
+        <p:spPr>
+          <a:xfrm>
+            <a:off x="1188719" y="2852928"/>
+            <a:ext cx="2743200" cy="320040"/>
           </a:xfrm>
           <a:prstGeom prst="rect">
             <a:avLst/>
           </a:prstGeom>
           <a:noFill/>
-          <a:ln w="12700">
-            <a:solidFill>
-              <a:srgbClr val="5C6865"/>
-            </a:solidFill>
-            <a:prstDash val="dash"/>
-          </a:ln>
-          <a:effectLst/>
-        </p:spPr>
-        <p:style>
-          <a:lnRef idx="1">
-            <a:schemeClr val="accent1"/>
-          </a:lnRef>
-          <a:fillRef idx="3">
-            <a:schemeClr val="accent1"/>
-          </a:fillRef>
-          <a:effectRef idx="2">
-            <a:schemeClr val="accent1"/>
-          </a:effectRef>
-          <a:fontRef idx="minor">
-            <a:schemeClr val="lt1"/>
-          </a:fontRef>
-        </p:style>
-        <p:txBody>
-          <a:bodyPr rtlCol="0" anchor="ctr"/>
-          <a:lstStyle/>
-          <a:p>
-            <a:pPr algn="ctr"/>
-          </a:p>
-        </p:txBody>
-      </p:sp>
-      <p:sp>
-        <p:nvSpPr>
-          <p:cNvPr id="12" name="TextBox 11"/>
-          <p:cNvSpPr txBox="1"/>
-          <p:nvPr/>
-        </p:nvSpPr>
-        <p:spPr>
-          <a:xfrm>
-            <a:off x="6309360" y="2148840"/>
-            <a:ext cx="5212080" cy="3291840"/>
-          </a:xfrm>
-          <a:prstGeom prst="rect">
-            <a:avLst/>
-          </a:prstGeom>
-          <a:noFill/>
-        </p:spPr>
-        <p:txBody>
-          <a:bodyPr wrap="square" anchor="ctr" lIns="45720" rIns="45720">
+        </p:spPr>
+        <p:txBody>
+          <a:bodyPr wrap="square" anchor="t" lIns="45720" rIns="45720">
             <a:spAutoFit/>
           </a:bodyPr>
           <a:lstStyle/>
           <a:p>
-            <a:pPr algn="ctr" eaLnBrk="0">
+            <a:pPr algn="l">
               <a:lnSpc>
                 <a:spcPct val="120000"/>
               </a:lnSpc>
@@ -7139,28 +6802,28 @@
               </a:spcAft>
             </a:pPr>
             <a:r>
-              <a:rPr sz="1400" b="0" lang="ko-KR" altLang="en-US">
-                <a:solidFill>
-                  <a:srgbClr val="5C6865"/>
+              <a:rPr sz="1400" b="1" lang="ko-KR" altLang="en-US">
+                <a:solidFill>
+                  <a:srgbClr val="1B2422"/>
                 </a:solidFill>
                 <a:latin typeface="맑은 고딕"/>
                 <a:ea typeface="맑은 고딕"/>
               </a:rPr>
-              <a:t>ChatGPT 실행 화면 캡처를 여기에 넣기</a:t>
-            </a:r>
-          </a:p>
-        </p:txBody>
-      </p:sp>
-      <p:sp>
-        <p:nvSpPr>
-          <p:cNvPr id="13" name="TextBox 12"/>
+              <a:t>캐릭터 팝업 A</a:t>
+            </a:r>
+          </a:p>
+        </p:txBody>
+      </p:sp>
+      <p:sp>
+        <p:nvSpPr>
+          <p:cNvPr id="12" name="TextBox 11"/>
           <p:cNvSpPr txBox="1"/>
           <p:nvPr/>
         </p:nvSpPr>
         <p:spPr>
           <a:xfrm>
-            <a:off x="6309360" y="5532120"/>
-            <a:ext cx="5212080" cy="548640"/>
+            <a:off x="1188719" y="3145536"/>
+            <a:ext cx="2743200" cy="274320"/>
           </a:xfrm>
           <a:prstGeom prst="rect">
             <a:avLst/>
@@ -7173,7 +6836,7 @@
           </a:bodyPr>
           <a:lstStyle/>
           <a:p>
-            <a:pPr algn="l" eaLnBrk="0">
+            <a:pPr algn="l">
               <a:lnSpc>
                 <a:spcPct val="120000"/>
               </a:lnSpc>
@@ -7182,14 +6845,1943 @@
               </a:spcAft>
             </a:pPr>
             <a:r>
-              <a:rPr sz="1300" b="0" lang="ko-KR" altLang="en-US">
-                <a:solidFill>
-                  <a:srgbClr val="1B2422"/>
+              <a:rPr sz="1100" b="0" lang="ko-KR" altLang="en-US">
+                <a:solidFill>
+                  <a:srgbClr val="5C6865"/>
                 </a:solidFill>
                 <a:latin typeface="맑은 고딕"/>
                 <a:ea typeface="맑은 고딕"/>
               </a:rPr>
-              <a:t>이 결과는 장소 DB에 저장되어 추천 점수 계산에 쓰인다.</a:t>
+              <a:t>성수 · 무료</a:t>
+            </a:r>
+          </a:p>
+        </p:txBody>
+      </p:sp>
+      <p:sp>
+        <p:nvSpPr>
+          <p:cNvPr id="13" name="Rectangle 12"/>
+          <p:cNvSpPr/>
+          <p:nvPr/>
+        </p:nvSpPr>
+        <p:spPr>
+          <a:xfrm>
+            <a:off x="3931920" y="3081528"/>
+            <a:ext cx="1371600" cy="109728"/>
+          </a:xfrm>
+          <a:prstGeom prst="rect">
+            <a:avLst/>
+          </a:prstGeom>
+          <a:solidFill>
+            <a:srgbClr val="D9DFDC"/>
+          </a:solidFill>
+          <a:ln>
+            <a:noFill/>
+          </a:ln>
+          <a:effectLst/>
+        </p:spPr>
+        <p:style>
+          <a:lnRef idx="1">
+            <a:schemeClr val="accent1"/>
+          </a:lnRef>
+          <a:fillRef idx="3">
+            <a:schemeClr val="accent1"/>
+          </a:fillRef>
+          <a:effectRef idx="2">
+            <a:schemeClr val="accent1"/>
+          </a:effectRef>
+          <a:fontRef idx="minor">
+            <a:schemeClr val="lt1"/>
+          </a:fontRef>
+        </p:style>
+        <p:txBody>
+          <a:bodyPr rtlCol="0" anchor="ctr"/>
+          <a:lstStyle/>
+          <a:p>
+            <a:pPr algn="ctr"/>
+          </a:p>
+        </p:txBody>
+      </p:sp>
+      <p:sp>
+        <p:nvSpPr>
+          <p:cNvPr id="14" name="Rectangle 13"/>
+          <p:cNvSpPr/>
+          <p:nvPr/>
+        </p:nvSpPr>
+        <p:spPr>
+          <a:xfrm>
+            <a:off x="3931920" y="3081528"/>
+            <a:ext cx="768096" cy="109728"/>
+          </a:xfrm>
+          <a:prstGeom prst="rect">
+            <a:avLst/>
+          </a:prstGeom>
+          <a:solidFill>
+            <a:srgbClr val="0D6B5F"/>
+          </a:solidFill>
+          <a:ln>
+            <a:noFill/>
+          </a:ln>
+          <a:effectLst/>
+        </p:spPr>
+        <p:style>
+          <a:lnRef idx="1">
+            <a:schemeClr val="accent1"/>
+          </a:lnRef>
+          <a:fillRef idx="3">
+            <a:schemeClr val="accent1"/>
+          </a:fillRef>
+          <a:effectRef idx="2">
+            <a:schemeClr val="accent1"/>
+          </a:effectRef>
+          <a:fontRef idx="minor">
+            <a:schemeClr val="lt1"/>
+          </a:fontRef>
+        </p:style>
+        <p:txBody>
+          <a:bodyPr rtlCol="0" anchor="ctr"/>
+          <a:lstStyle/>
+          <a:p>
+            <a:pPr algn="ctr"/>
+          </a:p>
+        </p:txBody>
+      </p:sp>
+      <p:sp>
+        <p:nvSpPr>
+          <p:cNvPr id="15" name="TextBox 14"/>
+          <p:cNvSpPr txBox="1"/>
+          <p:nvPr/>
+        </p:nvSpPr>
+        <p:spPr>
+          <a:xfrm>
+            <a:off x="5303520" y="2834640"/>
+            <a:ext cx="594360" cy="603504"/>
+          </a:xfrm>
+          <a:prstGeom prst="rect">
+            <a:avLst/>
+          </a:prstGeom>
+          <a:noFill/>
+        </p:spPr>
+        <p:txBody>
+          <a:bodyPr wrap="square" anchor="ctr" lIns="45720" rIns="45720">
+            <a:spAutoFit/>
+          </a:bodyPr>
+          <a:lstStyle/>
+          <a:p>
+            <a:pPr algn="r">
+              <a:lnSpc>
+                <a:spcPct val="120000"/>
+              </a:lnSpc>
+              <a:spcAft>
+                <a:spcPts val="600"/>
+              </a:spcAft>
+            </a:pPr>
+            <a:r>
+              <a:rPr sz="1300" b="0" lang="ko-KR" altLang="en-US">
+                <a:solidFill>
+                  <a:srgbClr val="1B2422"/>
+                </a:solidFill>
+                <a:latin typeface="맑은 고딕"/>
+                <a:ea typeface="맑은 고딕"/>
+              </a:rPr>
+              <a:t>0.56</a:t>
+            </a:r>
+          </a:p>
+        </p:txBody>
+      </p:sp>
+      <p:sp>
+        <p:nvSpPr>
+          <p:cNvPr id="16" name="Rounded Rectangle 15"/>
+          <p:cNvSpPr/>
+          <p:nvPr/>
+        </p:nvSpPr>
+        <p:spPr>
+          <a:xfrm>
+            <a:off x="640080" y="3547872"/>
+            <a:ext cx="5303520" cy="603504"/>
+          </a:xfrm>
+          <a:prstGeom prst="roundRect">
+            <a:avLst>
+              <a:gd name="adj" fmla="val 8000"/>
+            </a:avLst>
+          </a:prstGeom>
+          <a:solidFill>
+            <a:srgbClr val="FFFFFF"/>
+          </a:solidFill>
+          <a:ln w="12700">
+            <a:solidFill>
+              <a:srgbClr val="D9DFDC"/>
+            </a:solidFill>
+          </a:ln>
+          <a:effectLst/>
+        </p:spPr>
+        <p:style>
+          <a:lnRef idx="1">
+            <a:schemeClr val="accent1"/>
+          </a:lnRef>
+          <a:fillRef idx="3">
+            <a:schemeClr val="accent1"/>
+          </a:fillRef>
+          <a:effectRef idx="2">
+            <a:schemeClr val="accent1"/>
+          </a:effectRef>
+          <a:fontRef idx="minor">
+            <a:schemeClr val="lt1"/>
+          </a:fontRef>
+        </p:style>
+        <p:txBody>
+          <a:bodyPr rtlCol="0" anchor="ctr"/>
+          <a:lstStyle/>
+          <a:p>
+            <a:pPr algn="ctr"/>
+          </a:p>
+        </p:txBody>
+      </p:sp>
+      <p:sp>
+        <p:nvSpPr>
+          <p:cNvPr id="17" name="TextBox 16"/>
+          <p:cNvSpPr txBox="1"/>
+          <p:nvPr/>
+        </p:nvSpPr>
+        <p:spPr>
+          <a:xfrm>
+            <a:off x="731519" y="3547872"/>
+            <a:ext cx="411480" cy="603504"/>
+          </a:xfrm>
+          <a:prstGeom prst="rect">
+            <a:avLst/>
+          </a:prstGeom>
+          <a:noFill/>
+        </p:spPr>
+        <p:txBody>
+          <a:bodyPr wrap="square" anchor="ctr" lIns="45720" rIns="45720">
+            <a:spAutoFit/>
+          </a:bodyPr>
+          <a:lstStyle/>
+          <a:p>
+            <a:pPr algn="ctr">
+              <a:lnSpc>
+                <a:spcPct val="120000"/>
+              </a:lnSpc>
+              <a:spcAft>
+                <a:spcPts val="600"/>
+              </a:spcAft>
+            </a:pPr>
+            <a:r>
+              <a:rPr sz="1800" b="1" lang="ko-KR" altLang="en-US">
+                <a:solidFill>
+                  <a:srgbClr val="0D6B5F"/>
+                </a:solidFill>
+                <a:latin typeface="맑은 고딕"/>
+                <a:ea typeface="맑은 고딕"/>
+              </a:rPr>
+              <a:t>2</a:t>
+            </a:r>
+          </a:p>
+        </p:txBody>
+      </p:sp>
+      <p:sp>
+        <p:nvSpPr>
+          <p:cNvPr id="18" name="TextBox 17"/>
+          <p:cNvSpPr txBox="1"/>
+          <p:nvPr/>
+        </p:nvSpPr>
+        <p:spPr>
+          <a:xfrm>
+            <a:off x="1188719" y="3566160"/>
+            <a:ext cx="2743200" cy="320040"/>
+          </a:xfrm>
+          <a:prstGeom prst="rect">
+            <a:avLst/>
+          </a:prstGeom>
+          <a:noFill/>
+        </p:spPr>
+        <p:txBody>
+          <a:bodyPr wrap="square" anchor="t" lIns="45720" rIns="45720">
+            <a:spAutoFit/>
+          </a:bodyPr>
+          <a:lstStyle/>
+          <a:p>
+            <a:pPr algn="l">
+              <a:lnSpc>
+                <a:spcPct val="120000"/>
+              </a:lnSpc>
+              <a:spcAft>
+                <a:spcPts val="600"/>
+              </a:spcAft>
+            </a:pPr>
+            <a:r>
+              <a:rPr sz="1400" b="1" lang="ko-KR" altLang="en-US">
+                <a:solidFill>
+                  <a:srgbClr val="1B2422"/>
+                </a:solidFill>
+                <a:latin typeface="맑은 고딕"/>
+                <a:ea typeface="맑은 고딕"/>
+              </a:rPr>
+              <a:t>레트로 게임 팝업 C</a:t>
+            </a:r>
+          </a:p>
+        </p:txBody>
+      </p:sp>
+      <p:sp>
+        <p:nvSpPr>
+          <p:cNvPr id="19" name="TextBox 18"/>
+          <p:cNvSpPr txBox="1"/>
+          <p:nvPr/>
+        </p:nvSpPr>
+        <p:spPr>
+          <a:xfrm>
+            <a:off x="1188719" y="3858768"/>
+            <a:ext cx="2743200" cy="274320"/>
+          </a:xfrm>
+          <a:prstGeom prst="rect">
+            <a:avLst/>
+          </a:prstGeom>
+          <a:noFill/>
+        </p:spPr>
+        <p:txBody>
+          <a:bodyPr wrap="square" anchor="t" lIns="45720" rIns="45720">
+            <a:spAutoFit/>
+          </a:bodyPr>
+          <a:lstStyle/>
+          <a:p>
+            <a:pPr algn="l">
+              <a:lnSpc>
+                <a:spcPct val="120000"/>
+              </a:lnSpc>
+              <a:spcAft>
+                <a:spcPts val="600"/>
+              </a:spcAft>
+            </a:pPr>
+            <a:r>
+              <a:rPr sz="1100" b="0" lang="ko-KR" altLang="en-US">
+                <a:solidFill>
+                  <a:srgbClr val="5C6865"/>
+                </a:solidFill>
+                <a:latin typeface="맑은 고딕"/>
+                <a:ea typeface="맑은 고딕"/>
+              </a:rPr>
+              <a:t>홍대 · 무료</a:t>
+            </a:r>
+          </a:p>
+        </p:txBody>
+      </p:sp>
+      <p:sp>
+        <p:nvSpPr>
+          <p:cNvPr id="20" name="Rectangle 19"/>
+          <p:cNvSpPr/>
+          <p:nvPr/>
+        </p:nvSpPr>
+        <p:spPr>
+          <a:xfrm>
+            <a:off x="3931920" y="3794760"/>
+            <a:ext cx="1371600" cy="109728"/>
+          </a:xfrm>
+          <a:prstGeom prst="rect">
+            <a:avLst/>
+          </a:prstGeom>
+          <a:solidFill>
+            <a:srgbClr val="D9DFDC"/>
+          </a:solidFill>
+          <a:ln>
+            <a:noFill/>
+          </a:ln>
+          <a:effectLst/>
+        </p:spPr>
+        <p:style>
+          <a:lnRef idx="1">
+            <a:schemeClr val="accent1"/>
+          </a:lnRef>
+          <a:fillRef idx="3">
+            <a:schemeClr val="accent1"/>
+          </a:fillRef>
+          <a:effectRef idx="2">
+            <a:schemeClr val="accent1"/>
+          </a:effectRef>
+          <a:fontRef idx="minor">
+            <a:schemeClr val="lt1"/>
+          </a:fontRef>
+        </p:style>
+        <p:txBody>
+          <a:bodyPr rtlCol="0" anchor="ctr"/>
+          <a:lstStyle/>
+          <a:p>
+            <a:pPr algn="ctr"/>
+          </a:p>
+        </p:txBody>
+      </p:sp>
+      <p:sp>
+        <p:nvSpPr>
+          <p:cNvPr id="21" name="Rectangle 20"/>
+          <p:cNvSpPr/>
+          <p:nvPr/>
+        </p:nvSpPr>
+        <p:spPr>
+          <a:xfrm>
+            <a:off x="3931920" y="3794760"/>
+            <a:ext cx="562356" cy="109728"/>
+          </a:xfrm>
+          <a:prstGeom prst="rect">
+            <a:avLst/>
+          </a:prstGeom>
+          <a:solidFill>
+            <a:srgbClr val="0D6B5F"/>
+          </a:solidFill>
+          <a:ln>
+            <a:noFill/>
+          </a:ln>
+          <a:effectLst/>
+        </p:spPr>
+        <p:style>
+          <a:lnRef idx="1">
+            <a:schemeClr val="accent1"/>
+          </a:lnRef>
+          <a:fillRef idx="3">
+            <a:schemeClr val="accent1"/>
+          </a:fillRef>
+          <a:effectRef idx="2">
+            <a:schemeClr val="accent1"/>
+          </a:effectRef>
+          <a:fontRef idx="minor">
+            <a:schemeClr val="lt1"/>
+          </a:fontRef>
+        </p:style>
+        <p:txBody>
+          <a:bodyPr rtlCol="0" anchor="ctr"/>
+          <a:lstStyle/>
+          <a:p>
+            <a:pPr algn="ctr"/>
+          </a:p>
+        </p:txBody>
+      </p:sp>
+      <p:sp>
+        <p:nvSpPr>
+          <p:cNvPr id="22" name="TextBox 21"/>
+          <p:cNvSpPr txBox="1"/>
+          <p:nvPr/>
+        </p:nvSpPr>
+        <p:spPr>
+          <a:xfrm>
+            <a:off x="5303520" y="3547872"/>
+            <a:ext cx="594360" cy="603504"/>
+          </a:xfrm>
+          <a:prstGeom prst="rect">
+            <a:avLst/>
+          </a:prstGeom>
+          <a:noFill/>
+        </p:spPr>
+        <p:txBody>
+          <a:bodyPr wrap="square" anchor="ctr" lIns="45720" rIns="45720">
+            <a:spAutoFit/>
+          </a:bodyPr>
+          <a:lstStyle/>
+          <a:p>
+            <a:pPr algn="r">
+              <a:lnSpc>
+                <a:spcPct val="120000"/>
+              </a:lnSpc>
+              <a:spcAft>
+                <a:spcPts val="600"/>
+              </a:spcAft>
+            </a:pPr>
+            <a:r>
+              <a:rPr sz="1300" b="0" lang="ko-KR" altLang="en-US">
+                <a:solidFill>
+                  <a:srgbClr val="1B2422"/>
+                </a:solidFill>
+                <a:latin typeface="맑은 고딕"/>
+                <a:ea typeface="맑은 고딕"/>
+              </a:rPr>
+              <a:t>0.41</a:t>
+            </a:r>
+          </a:p>
+        </p:txBody>
+      </p:sp>
+      <p:sp>
+        <p:nvSpPr>
+          <p:cNvPr id="23" name="Rounded Rectangle 22"/>
+          <p:cNvSpPr/>
+          <p:nvPr/>
+        </p:nvSpPr>
+        <p:spPr>
+          <a:xfrm>
+            <a:off x="640080" y="4261104"/>
+            <a:ext cx="5303520" cy="603504"/>
+          </a:xfrm>
+          <a:prstGeom prst="roundRect">
+            <a:avLst>
+              <a:gd name="adj" fmla="val 8000"/>
+            </a:avLst>
+          </a:prstGeom>
+          <a:solidFill>
+            <a:srgbClr val="FFFFFF"/>
+          </a:solidFill>
+          <a:ln w="12700">
+            <a:solidFill>
+              <a:srgbClr val="D9DFDC"/>
+            </a:solidFill>
+          </a:ln>
+          <a:effectLst/>
+        </p:spPr>
+        <p:style>
+          <a:lnRef idx="1">
+            <a:schemeClr val="accent1"/>
+          </a:lnRef>
+          <a:fillRef idx="3">
+            <a:schemeClr val="accent1"/>
+          </a:fillRef>
+          <a:effectRef idx="2">
+            <a:schemeClr val="accent1"/>
+          </a:effectRef>
+          <a:fontRef idx="minor">
+            <a:schemeClr val="lt1"/>
+          </a:fontRef>
+        </p:style>
+        <p:txBody>
+          <a:bodyPr rtlCol="0" anchor="ctr"/>
+          <a:lstStyle/>
+          <a:p>
+            <a:pPr algn="ctr"/>
+          </a:p>
+        </p:txBody>
+      </p:sp>
+      <p:sp>
+        <p:nvSpPr>
+          <p:cNvPr id="24" name="TextBox 23"/>
+          <p:cNvSpPr txBox="1"/>
+          <p:nvPr/>
+        </p:nvSpPr>
+        <p:spPr>
+          <a:xfrm>
+            <a:off x="731519" y="4261104"/>
+            <a:ext cx="411480" cy="603504"/>
+          </a:xfrm>
+          <a:prstGeom prst="rect">
+            <a:avLst/>
+          </a:prstGeom>
+          <a:noFill/>
+        </p:spPr>
+        <p:txBody>
+          <a:bodyPr wrap="square" anchor="ctr" lIns="45720" rIns="45720">
+            <a:spAutoFit/>
+          </a:bodyPr>
+          <a:lstStyle/>
+          <a:p>
+            <a:pPr algn="ctr">
+              <a:lnSpc>
+                <a:spcPct val="120000"/>
+              </a:lnSpc>
+              <a:spcAft>
+                <a:spcPts val="600"/>
+              </a:spcAft>
+            </a:pPr>
+            <a:r>
+              <a:rPr sz="1800" b="1" lang="ko-KR" altLang="en-US">
+                <a:solidFill>
+                  <a:srgbClr val="0D6B5F"/>
+                </a:solidFill>
+                <a:latin typeface="맑은 고딕"/>
+                <a:ea typeface="맑은 고딕"/>
+              </a:rPr>
+              <a:t>3</a:t>
+            </a:r>
+          </a:p>
+        </p:txBody>
+      </p:sp>
+      <p:sp>
+        <p:nvSpPr>
+          <p:cNvPr id="25" name="TextBox 24"/>
+          <p:cNvSpPr txBox="1"/>
+          <p:nvPr/>
+        </p:nvSpPr>
+        <p:spPr>
+          <a:xfrm>
+            <a:off x="1188719" y="4279392"/>
+            <a:ext cx="2743200" cy="320040"/>
+          </a:xfrm>
+          <a:prstGeom prst="rect">
+            <a:avLst/>
+          </a:prstGeom>
+          <a:noFill/>
+        </p:spPr>
+        <p:txBody>
+          <a:bodyPr wrap="square" anchor="t" lIns="45720" rIns="45720">
+            <a:spAutoFit/>
+          </a:bodyPr>
+          <a:lstStyle/>
+          <a:p>
+            <a:pPr algn="l">
+              <a:lnSpc>
+                <a:spcPct val="120000"/>
+              </a:lnSpc>
+              <a:spcAft>
+                <a:spcPts val="600"/>
+              </a:spcAft>
+            </a:pPr>
+            <a:r>
+              <a:rPr sz="1400" b="1" lang="ko-KR" altLang="en-US">
+                <a:solidFill>
+                  <a:srgbClr val="1B2422"/>
+                </a:solidFill>
+                <a:latin typeface="맑은 고딕"/>
+                <a:ea typeface="맑은 고딕"/>
+              </a:rPr>
+              <a:t>디저트 팝업 E</a:t>
+            </a:r>
+          </a:p>
+        </p:txBody>
+      </p:sp>
+      <p:sp>
+        <p:nvSpPr>
+          <p:cNvPr id="26" name="TextBox 25"/>
+          <p:cNvSpPr txBox="1"/>
+          <p:nvPr/>
+        </p:nvSpPr>
+        <p:spPr>
+          <a:xfrm>
+            <a:off x="1188719" y="4572000"/>
+            <a:ext cx="2743200" cy="274320"/>
+          </a:xfrm>
+          <a:prstGeom prst="rect">
+            <a:avLst/>
+          </a:prstGeom>
+          <a:noFill/>
+        </p:spPr>
+        <p:txBody>
+          <a:bodyPr wrap="square" anchor="t" lIns="45720" rIns="45720">
+            <a:spAutoFit/>
+          </a:bodyPr>
+          <a:lstStyle/>
+          <a:p>
+            <a:pPr algn="l">
+              <a:lnSpc>
+                <a:spcPct val="120000"/>
+              </a:lnSpc>
+              <a:spcAft>
+                <a:spcPts val="600"/>
+              </a:spcAft>
+            </a:pPr>
+            <a:r>
+              <a:rPr sz="1100" b="0" lang="ko-KR" altLang="en-US">
+                <a:solidFill>
+                  <a:srgbClr val="5C6865"/>
+                </a:solidFill>
+                <a:latin typeface="맑은 고딕"/>
+                <a:ea typeface="맑은 고딕"/>
+              </a:rPr>
+              <a:t>성수 · 8,000원</a:t>
+            </a:r>
+          </a:p>
+        </p:txBody>
+      </p:sp>
+      <p:sp>
+        <p:nvSpPr>
+          <p:cNvPr id="27" name="Rectangle 26"/>
+          <p:cNvSpPr/>
+          <p:nvPr/>
+        </p:nvSpPr>
+        <p:spPr>
+          <a:xfrm>
+            <a:off x="3931920" y="4507992"/>
+            <a:ext cx="1371600" cy="109728"/>
+          </a:xfrm>
+          <a:prstGeom prst="rect">
+            <a:avLst/>
+          </a:prstGeom>
+          <a:solidFill>
+            <a:srgbClr val="D9DFDC"/>
+          </a:solidFill>
+          <a:ln>
+            <a:noFill/>
+          </a:ln>
+          <a:effectLst/>
+        </p:spPr>
+        <p:style>
+          <a:lnRef idx="1">
+            <a:schemeClr val="accent1"/>
+          </a:lnRef>
+          <a:fillRef idx="3">
+            <a:schemeClr val="accent1"/>
+          </a:fillRef>
+          <a:effectRef idx="2">
+            <a:schemeClr val="accent1"/>
+          </a:effectRef>
+          <a:fontRef idx="minor">
+            <a:schemeClr val="lt1"/>
+          </a:fontRef>
+        </p:style>
+        <p:txBody>
+          <a:bodyPr rtlCol="0" anchor="ctr"/>
+          <a:lstStyle/>
+          <a:p>
+            <a:pPr algn="ctr"/>
+          </a:p>
+        </p:txBody>
+      </p:sp>
+      <p:sp>
+        <p:nvSpPr>
+          <p:cNvPr id="28" name="Rectangle 27"/>
+          <p:cNvSpPr/>
+          <p:nvPr/>
+        </p:nvSpPr>
+        <p:spPr>
+          <a:xfrm>
+            <a:off x="3931920" y="4507992"/>
+            <a:ext cx="548640" cy="109728"/>
+          </a:xfrm>
+          <a:prstGeom prst="rect">
+            <a:avLst/>
+          </a:prstGeom>
+          <a:solidFill>
+            <a:srgbClr val="0D6B5F"/>
+          </a:solidFill>
+          <a:ln>
+            <a:noFill/>
+          </a:ln>
+          <a:effectLst/>
+        </p:spPr>
+        <p:style>
+          <a:lnRef idx="1">
+            <a:schemeClr val="accent1"/>
+          </a:lnRef>
+          <a:fillRef idx="3">
+            <a:schemeClr val="accent1"/>
+          </a:fillRef>
+          <a:effectRef idx="2">
+            <a:schemeClr val="accent1"/>
+          </a:effectRef>
+          <a:fontRef idx="minor">
+            <a:schemeClr val="lt1"/>
+          </a:fontRef>
+        </p:style>
+        <p:txBody>
+          <a:bodyPr rtlCol="0" anchor="ctr"/>
+          <a:lstStyle/>
+          <a:p>
+            <a:pPr algn="ctr"/>
+          </a:p>
+        </p:txBody>
+      </p:sp>
+      <p:sp>
+        <p:nvSpPr>
+          <p:cNvPr id="29" name="TextBox 28"/>
+          <p:cNvSpPr txBox="1"/>
+          <p:nvPr/>
+        </p:nvSpPr>
+        <p:spPr>
+          <a:xfrm>
+            <a:off x="5303520" y="4261104"/>
+            <a:ext cx="594360" cy="603504"/>
+          </a:xfrm>
+          <a:prstGeom prst="rect">
+            <a:avLst/>
+          </a:prstGeom>
+          <a:noFill/>
+        </p:spPr>
+        <p:txBody>
+          <a:bodyPr wrap="square" anchor="ctr" lIns="45720" rIns="45720">
+            <a:spAutoFit/>
+          </a:bodyPr>
+          <a:lstStyle/>
+          <a:p>
+            <a:pPr algn="r">
+              <a:lnSpc>
+                <a:spcPct val="120000"/>
+              </a:lnSpc>
+              <a:spcAft>
+                <a:spcPts val="600"/>
+              </a:spcAft>
+            </a:pPr>
+            <a:r>
+              <a:rPr sz="1300" b="0" lang="ko-KR" altLang="en-US">
+                <a:solidFill>
+                  <a:srgbClr val="1B2422"/>
+                </a:solidFill>
+                <a:latin typeface="맑은 고딕"/>
+                <a:ea typeface="맑은 고딕"/>
+              </a:rPr>
+              <a:t>0.40</a:t>
+            </a:r>
+          </a:p>
+        </p:txBody>
+      </p:sp>
+      <p:sp>
+        <p:nvSpPr>
+          <p:cNvPr id="30" name="TextBox 29"/>
+          <p:cNvSpPr txBox="1"/>
+          <p:nvPr/>
+        </p:nvSpPr>
+        <p:spPr>
+          <a:xfrm>
+            <a:off x="6217920" y="2057400"/>
+            <a:ext cx="5303520" cy="685800"/>
+          </a:xfrm>
+          <a:prstGeom prst="rect">
+            <a:avLst/>
+          </a:prstGeom>
+          <a:noFill/>
+        </p:spPr>
+        <p:txBody>
+          <a:bodyPr wrap="square" anchor="t" lIns="45720" rIns="45720">
+            <a:spAutoFit/>
+          </a:bodyPr>
+          <a:lstStyle/>
+          <a:p>
+            <a:pPr algn="l">
+              <a:lnSpc>
+                <a:spcPct val="110000"/>
+              </a:lnSpc>
+              <a:spcAft>
+                <a:spcPts val="200"/>
+              </a:spcAft>
+            </a:pPr>
+            <a:r>
+              <a:rPr sz="1500" b="1" lang="ko-KR" altLang="en-US">
+                <a:solidFill>
+                  <a:srgbClr val="1B2422"/>
+                </a:solidFill>
+                <a:latin typeface="맑은 고딕"/>
+                <a:ea typeface="맑은 고딕"/>
+              </a:rPr>
+              <a:t>사용자 B</a:t>
+            </a:r>
+          </a:p>
+          <a:p>
+            <a:pPr algn="l">
+              <a:lnSpc>
+                <a:spcPct val="110000"/>
+              </a:lnSpc>
+              <a:spcAft>
+                <a:spcPts val="600"/>
+              </a:spcAft>
+            </a:pPr>
+            <a:r>
+              <a:rPr sz="1200" b="0" lang="ko-KR" altLang="en-US">
+                <a:solidFill>
+                  <a:srgbClr val="5C6865"/>
+                </a:solidFill>
+                <a:latin typeface="맑은 고딕"/>
+                <a:ea typeface="맑은 고딕"/>
+              </a:rPr>
+              <a:t>“혼자 조용하게 작품 감상하면서 생각 정리하고 싶어”  · 예산 3만원</a:t>
+            </a:r>
+          </a:p>
+        </p:txBody>
+      </p:sp>
+      <p:sp>
+        <p:nvSpPr>
+          <p:cNvPr id="31" name="Rounded Rectangle 30"/>
+          <p:cNvSpPr/>
+          <p:nvPr/>
+        </p:nvSpPr>
+        <p:spPr>
+          <a:xfrm>
+            <a:off x="6217920" y="2834640"/>
+            <a:ext cx="5303520" cy="603504"/>
+          </a:xfrm>
+          <a:prstGeom prst="roundRect">
+            <a:avLst>
+              <a:gd name="adj" fmla="val 8000"/>
+            </a:avLst>
+          </a:prstGeom>
+          <a:solidFill>
+            <a:srgbClr val="FFFFFF"/>
+          </a:solidFill>
+          <a:ln w="12700">
+            <a:solidFill>
+              <a:srgbClr val="D9DFDC"/>
+            </a:solidFill>
+          </a:ln>
+          <a:effectLst/>
+        </p:spPr>
+        <p:style>
+          <a:lnRef idx="1">
+            <a:schemeClr val="accent1"/>
+          </a:lnRef>
+          <a:fillRef idx="3">
+            <a:schemeClr val="accent1"/>
+          </a:fillRef>
+          <a:effectRef idx="2">
+            <a:schemeClr val="accent1"/>
+          </a:effectRef>
+          <a:fontRef idx="minor">
+            <a:schemeClr val="lt1"/>
+          </a:fontRef>
+        </p:style>
+        <p:txBody>
+          <a:bodyPr rtlCol="0" anchor="ctr"/>
+          <a:lstStyle/>
+          <a:p>
+            <a:pPr algn="ctr"/>
+          </a:p>
+        </p:txBody>
+      </p:sp>
+      <p:sp>
+        <p:nvSpPr>
+          <p:cNvPr id="32" name="TextBox 31"/>
+          <p:cNvSpPr txBox="1"/>
+          <p:nvPr/>
+        </p:nvSpPr>
+        <p:spPr>
+          <a:xfrm>
+            <a:off x="6309359" y="2834640"/>
+            <a:ext cx="411480" cy="603504"/>
+          </a:xfrm>
+          <a:prstGeom prst="rect">
+            <a:avLst/>
+          </a:prstGeom>
+          <a:noFill/>
+        </p:spPr>
+        <p:txBody>
+          <a:bodyPr wrap="square" anchor="ctr" lIns="45720" rIns="45720">
+            <a:spAutoFit/>
+          </a:bodyPr>
+          <a:lstStyle/>
+          <a:p>
+            <a:pPr algn="ctr">
+              <a:lnSpc>
+                <a:spcPct val="120000"/>
+              </a:lnSpc>
+              <a:spcAft>
+                <a:spcPts val="600"/>
+              </a:spcAft>
+            </a:pPr>
+            <a:r>
+              <a:rPr sz="1800" b="1" lang="ko-KR" altLang="en-US">
+                <a:solidFill>
+                  <a:srgbClr val="0D6B5F"/>
+                </a:solidFill>
+                <a:latin typeface="맑은 고딕"/>
+                <a:ea typeface="맑은 고딕"/>
+              </a:rPr>
+              <a:t>1</a:t>
+            </a:r>
+          </a:p>
+        </p:txBody>
+      </p:sp>
+      <p:sp>
+        <p:nvSpPr>
+          <p:cNvPr id="33" name="TextBox 32"/>
+          <p:cNvSpPr txBox="1"/>
+          <p:nvPr/>
+        </p:nvSpPr>
+        <p:spPr>
+          <a:xfrm>
+            <a:off x="6766559" y="2852928"/>
+            <a:ext cx="2743200" cy="320040"/>
+          </a:xfrm>
+          <a:prstGeom prst="rect">
+            <a:avLst/>
+          </a:prstGeom>
+          <a:noFill/>
+        </p:spPr>
+        <p:txBody>
+          <a:bodyPr wrap="square" anchor="t" lIns="45720" rIns="45720">
+            <a:spAutoFit/>
+          </a:bodyPr>
+          <a:lstStyle/>
+          <a:p>
+            <a:pPr algn="l">
+              <a:lnSpc>
+                <a:spcPct val="120000"/>
+              </a:lnSpc>
+              <a:spcAft>
+                <a:spcPts val="600"/>
+              </a:spcAft>
+            </a:pPr>
+            <a:r>
+              <a:rPr sz="1400" b="1" lang="ko-KR" altLang="en-US">
+                <a:solidFill>
+                  <a:srgbClr val="1B2422"/>
+                </a:solidFill>
+                <a:latin typeface="맑은 고딕"/>
+                <a:ea typeface="맑은 고딕"/>
+              </a:rPr>
+              <a:t>북카페 D</a:t>
+            </a:r>
+          </a:p>
+        </p:txBody>
+      </p:sp>
+      <p:sp>
+        <p:nvSpPr>
+          <p:cNvPr id="34" name="TextBox 33"/>
+          <p:cNvSpPr txBox="1"/>
+          <p:nvPr/>
+        </p:nvSpPr>
+        <p:spPr>
+          <a:xfrm>
+            <a:off x="6766559" y="3145536"/>
+            <a:ext cx="2743200" cy="274320"/>
+          </a:xfrm>
+          <a:prstGeom prst="rect">
+            <a:avLst/>
+          </a:prstGeom>
+          <a:noFill/>
+        </p:spPr>
+        <p:txBody>
+          <a:bodyPr wrap="square" anchor="t" lIns="45720" rIns="45720">
+            <a:spAutoFit/>
+          </a:bodyPr>
+          <a:lstStyle/>
+          <a:p>
+            <a:pPr algn="l">
+              <a:lnSpc>
+                <a:spcPct val="120000"/>
+              </a:lnSpc>
+              <a:spcAft>
+                <a:spcPts val="600"/>
+              </a:spcAft>
+            </a:pPr>
+            <a:r>
+              <a:rPr sz="1100" b="0" lang="ko-KR" altLang="en-US">
+                <a:solidFill>
+                  <a:srgbClr val="5C6865"/>
+                </a:solidFill>
+                <a:latin typeface="맑은 고딕"/>
+                <a:ea typeface="맑은 고딕"/>
+              </a:rPr>
+              <a:t>종로 · 7,000원</a:t>
+            </a:r>
+          </a:p>
+        </p:txBody>
+      </p:sp>
+      <p:sp>
+        <p:nvSpPr>
+          <p:cNvPr id="35" name="Rectangle 34"/>
+          <p:cNvSpPr/>
+          <p:nvPr/>
+        </p:nvSpPr>
+        <p:spPr>
+          <a:xfrm>
+            <a:off x="9509760" y="3081528"/>
+            <a:ext cx="1371600" cy="109728"/>
+          </a:xfrm>
+          <a:prstGeom prst="rect">
+            <a:avLst/>
+          </a:prstGeom>
+          <a:solidFill>
+            <a:srgbClr val="D9DFDC"/>
+          </a:solidFill>
+          <a:ln>
+            <a:noFill/>
+          </a:ln>
+          <a:effectLst/>
+        </p:spPr>
+        <p:style>
+          <a:lnRef idx="1">
+            <a:schemeClr val="accent1"/>
+          </a:lnRef>
+          <a:fillRef idx="3">
+            <a:schemeClr val="accent1"/>
+          </a:fillRef>
+          <a:effectRef idx="2">
+            <a:schemeClr val="accent1"/>
+          </a:effectRef>
+          <a:fontRef idx="minor">
+            <a:schemeClr val="lt1"/>
+          </a:fontRef>
+        </p:style>
+        <p:txBody>
+          <a:bodyPr rtlCol="0" anchor="ctr"/>
+          <a:lstStyle/>
+          <a:p>
+            <a:pPr algn="ctr"/>
+          </a:p>
+        </p:txBody>
+      </p:sp>
+      <p:sp>
+        <p:nvSpPr>
+          <p:cNvPr id="36" name="Rectangle 35"/>
+          <p:cNvSpPr/>
+          <p:nvPr/>
+        </p:nvSpPr>
+        <p:spPr>
+          <a:xfrm>
+            <a:off x="9509760" y="3081528"/>
+            <a:ext cx="781812" cy="109728"/>
+          </a:xfrm>
+          <a:prstGeom prst="rect">
+            <a:avLst/>
+          </a:prstGeom>
+          <a:solidFill>
+            <a:srgbClr val="0D6B5F"/>
+          </a:solidFill>
+          <a:ln>
+            <a:noFill/>
+          </a:ln>
+          <a:effectLst/>
+        </p:spPr>
+        <p:style>
+          <a:lnRef idx="1">
+            <a:schemeClr val="accent1"/>
+          </a:lnRef>
+          <a:fillRef idx="3">
+            <a:schemeClr val="accent1"/>
+          </a:fillRef>
+          <a:effectRef idx="2">
+            <a:schemeClr val="accent1"/>
+          </a:effectRef>
+          <a:fontRef idx="minor">
+            <a:schemeClr val="lt1"/>
+          </a:fontRef>
+        </p:style>
+        <p:txBody>
+          <a:bodyPr rtlCol="0" anchor="ctr"/>
+          <a:lstStyle/>
+          <a:p>
+            <a:pPr algn="ctr"/>
+          </a:p>
+        </p:txBody>
+      </p:sp>
+      <p:sp>
+        <p:nvSpPr>
+          <p:cNvPr id="37" name="TextBox 36"/>
+          <p:cNvSpPr txBox="1"/>
+          <p:nvPr/>
+        </p:nvSpPr>
+        <p:spPr>
+          <a:xfrm>
+            <a:off x="10881359" y="2834640"/>
+            <a:ext cx="594360" cy="603504"/>
+          </a:xfrm>
+          <a:prstGeom prst="rect">
+            <a:avLst/>
+          </a:prstGeom>
+          <a:noFill/>
+        </p:spPr>
+        <p:txBody>
+          <a:bodyPr wrap="square" anchor="ctr" lIns="45720" rIns="45720">
+            <a:spAutoFit/>
+          </a:bodyPr>
+          <a:lstStyle/>
+          <a:p>
+            <a:pPr algn="r">
+              <a:lnSpc>
+                <a:spcPct val="120000"/>
+              </a:lnSpc>
+              <a:spcAft>
+                <a:spcPts val="600"/>
+              </a:spcAft>
+            </a:pPr>
+            <a:r>
+              <a:rPr sz="1300" b="0" lang="ko-KR" altLang="en-US">
+                <a:solidFill>
+                  <a:srgbClr val="1B2422"/>
+                </a:solidFill>
+                <a:latin typeface="맑은 고딕"/>
+                <a:ea typeface="맑은 고딕"/>
+              </a:rPr>
+              <a:t>0.57</a:t>
+            </a:r>
+          </a:p>
+        </p:txBody>
+      </p:sp>
+      <p:sp>
+        <p:nvSpPr>
+          <p:cNvPr id="38" name="Rounded Rectangle 37"/>
+          <p:cNvSpPr/>
+          <p:nvPr/>
+        </p:nvSpPr>
+        <p:spPr>
+          <a:xfrm>
+            <a:off x="6217920" y="3547872"/>
+            <a:ext cx="5303520" cy="603504"/>
+          </a:xfrm>
+          <a:prstGeom prst="roundRect">
+            <a:avLst>
+              <a:gd name="adj" fmla="val 8000"/>
+            </a:avLst>
+          </a:prstGeom>
+          <a:solidFill>
+            <a:srgbClr val="FFFFFF"/>
+          </a:solidFill>
+          <a:ln w="12700">
+            <a:solidFill>
+              <a:srgbClr val="D9DFDC"/>
+            </a:solidFill>
+          </a:ln>
+          <a:effectLst/>
+        </p:spPr>
+        <p:style>
+          <a:lnRef idx="1">
+            <a:schemeClr val="accent1"/>
+          </a:lnRef>
+          <a:fillRef idx="3">
+            <a:schemeClr val="accent1"/>
+          </a:fillRef>
+          <a:effectRef idx="2">
+            <a:schemeClr val="accent1"/>
+          </a:effectRef>
+          <a:fontRef idx="minor">
+            <a:schemeClr val="lt1"/>
+          </a:fontRef>
+        </p:style>
+        <p:txBody>
+          <a:bodyPr rtlCol="0" anchor="ctr"/>
+          <a:lstStyle/>
+          <a:p>
+            <a:pPr algn="ctr"/>
+          </a:p>
+        </p:txBody>
+      </p:sp>
+      <p:sp>
+        <p:nvSpPr>
+          <p:cNvPr id="39" name="TextBox 38"/>
+          <p:cNvSpPr txBox="1"/>
+          <p:nvPr/>
+        </p:nvSpPr>
+        <p:spPr>
+          <a:xfrm>
+            <a:off x="6309359" y="3547872"/>
+            <a:ext cx="411480" cy="603504"/>
+          </a:xfrm>
+          <a:prstGeom prst="rect">
+            <a:avLst/>
+          </a:prstGeom>
+          <a:noFill/>
+        </p:spPr>
+        <p:txBody>
+          <a:bodyPr wrap="square" anchor="ctr" lIns="45720" rIns="45720">
+            <a:spAutoFit/>
+          </a:bodyPr>
+          <a:lstStyle/>
+          <a:p>
+            <a:pPr algn="ctr">
+              <a:lnSpc>
+                <a:spcPct val="120000"/>
+              </a:lnSpc>
+              <a:spcAft>
+                <a:spcPts val="600"/>
+              </a:spcAft>
+            </a:pPr>
+            <a:r>
+              <a:rPr sz="1800" b="1" lang="ko-KR" altLang="en-US">
+                <a:solidFill>
+                  <a:srgbClr val="0D6B5F"/>
+                </a:solidFill>
+                <a:latin typeface="맑은 고딕"/>
+                <a:ea typeface="맑은 고딕"/>
+              </a:rPr>
+              <a:t>2</a:t>
+            </a:r>
+          </a:p>
+        </p:txBody>
+      </p:sp>
+      <p:sp>
+        <p:nvSpPr>
+          <p:cNvPr id="40" name="TextBox 39"/>
+          <p:cNvSpPr txBox="1"/>
+          <p:nvPr/>
+        </p:nvSpPr>
+        <p:spPr>
+          <a:xfrm>
+            <a:off x="6766559" y="3566160"/>
+            <a:ext cx="2743200" cy="320040"/>
+          </a:xfrm>
+          <a:prstGeom prst="rect">
+            <a:avLst/>
+          </a:prstGeom>
+          <a:noFill/>
+        </p:spPr>
+        <p:txBody>
+          <a:bodyPr wrap="square" anchor="t" lIns="45720" rIns="45720">
+            <a:spAutoFit/>
+          </a:bodyPr>
+          <a:lstStyle/>
+          <a:p>
+            <a:pPr algn="l">
+              <a:lnSpc>
+                <a:spcPct val="120000"/>
+              </a:lnSpc>
+              <a:spcAft>
+                <a:spcPts val="600"/>
+              </a:spcAft>
+            </a:pPr>
+            <a:r>
+              <a:rPr sz="1400" b="1" lang="ko-KR" altLang="en-US">
+                <a:solidFill>
+                  <a:srgbClr val="1B2422"/>
+                </a:solidFill>
+                <a:latin typeface="맑은 고딕"/>
+                <a:ea typeface="맑은 고딕"/>
+              </a:rPr>
+              <a:t>미디어아트 전시 B</a:t>
+            </a:r>
+          </a:p>
+        </p:txBody>
+      </p:sp>
+      <p:sp>
+        <p:nvSpPr>
+          <p:cNvPr id="41" name="TextBox 40"/>
+          <p:cNvSpPr txBox="1"/>
+          <p:nvPr/>
+        </p:nvSpPr>
+        <p:spPr>
+          <a:xfrm>
+            <a:off x="6766559" y="3858768"/>
+            <a:ext cx="2743200" cy="274320"/>
+          </a:xfrm>
+          <a:prstGeom prst="rect">
+            <a:avLst/>
+          </a:prstGeom>
+          <a:noFill/>
+        </p:spPr>
+        <p:txBody>
+          <a:bodyPr wrap="square" anchor="t" lIns="45720" rIns="45720">
+            <a:spAutoFit/>
+          </a:bodyPr>
+          <a:lstStyle/>
+          <a:p>
+            <a:pPr algn="l">
+              <a:lnSpc>
+                <a:spcPct val="120000"/>
+              </a:lnSpc>
+              <a:spcAft>
+                <a:spcPts val="600"/>
+              </a:spcAft>
+            </a:pPr>
+            <a:r>
+              <a:rPr sz="1100" b="0" lang="ko-KR" altLang="en-US">
+                <a:solidFill>
+                  <a:srgbClr val="5C6865"/>
+                </a:solidFill>
+                <a:latin typeface="맑은 고딕"/>
+                <a:ea typeface="맑은 고딕"/>
+              </a:rPr>
+              <a:t>종로 · 20,000원</a:t>
+            </a:r>
+          </a:p>
+        </p:txBody>
+      </p:sp>
+      <p:sp>
+        <p:nvSpPr>
+          <p:cNvPr id="42" name="Rectangle 41"/>
+          <p:cNvSpPr/>
+          <p:nvPr/>
+        </p:nvSpPr>
+        <p:spPr>
+          <a:xfrm>
+            <a:off x="9509760" y="3794760"/>
+            <a:ext cx="1371600" cy="109728"/>
+          </a:xfrm>
+          <a:prstGeom prst="rect">
+            <a:avLst/>
+          </a:prstGeom>
+          <a:solidFill>
+            <a:srgbClr val="D9DFDC"/>
+          </a:solidFill>
+          <a:ln>
+            <a:noFill/>
+          </a:ln>
+          <a:effectLst/>
+        </p:spPr>
+        <p:style>
+          <a:lnRef idx="1">
+            <a:schemeClr val="accent1"/>
+          </a:lnRef>
+          <a:fillRef idx="3">
+            <a:schemeClr val="accent1"/>
+          </a:fillRef>
+          <a:effectRef idx="2">
+            <a:schemeClr val="accent1"/>
+          </a:effectRef>
+          <a:fontRef idx="minor">
+            <a:schemeClr val="lt1"/>
+          </a:fontRef>
+        </p:style>
+        <p:txBody>
+          <a:bodyPr rtlCol="0" anchor="ctr"/>
+          <a:lstStyle/>
+          <a:p>
+            <a:pPr algn="ctr"/>
+          </a:p>
+        </p:txBody>
+      </p:sp>
+      <p:sp>
+        <p:nvSpPr>
+          <p:cNvPr id="43" name="Rectangle 42"/>
+          <p:cNvSpPr/>
+          <p:nvPr/>
+        </p:nvSpPr>
+        <p:spPr>
+          <a:xfrm>
+            <a:off x="9509760" y="3794760"/>
+            <a:ext cx="699516" cy="109728"/>
+          </a:xfrm>
+          <a:prstGeom prst="rect">
+            <a:avLst/>
+          </a:prstGeom>
+          <a:solidFill>
+            <a:srgbClr val="0D6B5F"/>
+          </a:solidFill>
+          <a:ln>
+            <a:noFill/>
+          </a:ln>
+          <a:effectLst/>
+        </p:spPr>
+        <p:style>
+          <a:lnRef idx="1">
+            <a:schemeClr val="accent1"/>
+          </a:lnRef>
+          <a:fillRef idx="3">
+            <a:schemeClr val="accent1"/>
+          </a:fillRef>
+          <a:effectRef idx="2">
+            <a:schemeClr val="accent1"/>
+          </a:effectRef>
+          <a:fontRef idx="minor">
+            <a:schemeClr val="lt1"/>
+          </a:fontRef>
+        </p:style>
+        <p:txBody>
+          <a:bodyPr rtlCol="0" anchor="ctr"/>
+          <a:lstStyle/>
+          <a:p>
+            <a:pPr algn="ctr"/>
+          </a:p>
+        </p:txBody>
+      </p:sp>
+      <p:sp>
+        <p:nvSpPr>
+          <p:cNvPr id="44" name="TextBox 43"/>
+          <p:cNvSpPr txBox="1"/>
+          <p:nvPr/>
+        </p:nvSpPr>
+        <p:spPr>
+          <a:xfrm>
+            <a:off x="10881359" y="3547872"/>
+            <a:ext cx="594360" cy="603504"/>
+          </a:xfrm>
+          <a:prstGeom prst="rect">
+            <a:avLst/>
+          </a:prstGeom>
+          <a:noFill/>
+        </p:spPr>
+        <p:txBody>
+          <a:bodyPr wrap="square" anchor="ctr" lIns="45720" rIns="45720">
+            <a:spAutoFit/>
+          </a:bodyPr>
+          <a:lstStyle/>
+          <a:p>
+            <a:pPr algn="r">
+              <a:lnSpc>
+                <a:spcPct val="120000"/>
+              </a:lnSpc>
+              <a:spcAft>
+                <a:spcPts val="600"/>
+              </a:spcAft>
+            </a:pPr>
+            <a:r>
+              <a:rPr sz="1300" b="0" lang="ko-KR" altLang="en-US">
+                <a:solidFill>
+                  <a:srgbClr val="1B2422"/>
+                </a:solidFill>
+                <a:latin typeface="맑은 고딕"/>
+                <a:ea typeface="맑은 고딕"/>
+              </a:rPr>
+              <a:t>0.51</a:t>
+            </a:r>
+          </a:p>
+        </p:txBody>
+      </p:sp>
+      <p:sp>
+        <p:nvSpPr>
+          <p:cNvPr id="45" name="Rounded Rectangle 44"/>
+          <p:cNvSpPr/>
+          <p:nvPr/>
+        </p:nvSpPr>
+        <p:spPr>
+          <a:xfrm>
+            <a:off x="6217920" y="4261104"/>
+            <a:ext cx="5303520" cy="603504"/>
+          </a:xfrm>
+          <a:prstGeom prst="roundRect">
+            <a:avLst>
+              <a:gd name="adj" fmla="val 8000"/>
+            </a:avLst>
+          </a:prstGeom>
+          <a:solidFill>
+            <a:srgbClr val="FFFFFF"/>
+          </a:solidFill>
+          <a:ln w="12700">
+            <a:solidFill>
+              <a:srgbClr val="D9DFDC"/>
+            </a:solidFill>
+          </a:ln>
+          <a:effectLst/>
+        </p:spPr>
+        <p:style>
+          <a:lnRef idx="1">
+            <a:schemeClr val="accent1"/>
+          </a:lnRef>
+          <a:fillRef idx="3">
+            <a:schemeClr val="accent1"/>
+          </a:fillRef>
+          <a:effectRef idx="2">
+            <a:schemeClr val="accent1"/>
+          </a:effectRef>
+          <a:fontRef idx="minor">
+            <a:schemeClr val="lt1"/>
+          </a:fontRef>
+        </p:style>
+        <p:txBody>
+          <a:bodyPr rtlCol="0" anchor="ctr"/>
+          <a:lstStyle/>
+          <a:p>
+            <a:pPr algn="ctr"/>
+          </a:p>
+        </p:txBody>
+      </p:sp>
+      <p:sp>
+        <p:nvSpPr>
+          <p:cNvPr id="46" name="TextBox 45"/>
+          <p:cNvSpPr txBox="1"/>
+          <p:nvPr/>
+        </p:nvSpPr>
+        <p:spPr>
+          <a:xfrm>
+            <a:off x="6309359" y="4261104"/>
+            <a:ext cx="411480" cy="603504"/>
+          </a:xfrm>
+          <a:prstGeom prst="rect">
+            <a:avLst/>
+          </a:prstGeom>
+          <a:noFill/>
+        </p:spPr>
+        <p:txBody>
+          <a:bodyPr wrap="square" anchor="ctr" lIns="45720" rIns="45720">
+            <a:spAutoFit/>
+          </a:bodyPr>
+          <a:lstStyle/>
+          <a:p>
+            <a:pPr algn="ctr">
+              <a:lnSpc>
+                <a:spcPct val="120000"/>
+              </a:lnSpc>
+              <a:spcAft>
+                <a:spcPts val="600"/>
+              </a:spcAft>
+            </a:pPr>
+            <a:r>
+              <a:rPr sz="1800" b="1" lang="ko-KR" altLang="en-US">
+                <a:solidFill>
+                  <a:srgbClr val="0D6B5F"/>
+                </a:solidFill>
+                <a:latin typeface="맑은 고딕"/>
+                <a:ea typeface="맑은 고딕"/>
+              </a:rPr>
+              <a:t>3</a:t>
+            </a:r>
+          </a:p>
+        </p:txBody>
+      </p:sp>
+      <p:sp>
+        <p:nvSpPr>
+          <p:cNvPr id="47" name="TextBox 46"/>
+          <p:cNvSpPr txBox="1"/>
+          <p:nvPr/>
+        </p:nvSpPr>
+        <p:spPr>
+          <a:xfrm>
+            <a:off x="6766559" y="4279392"/>
+            <a:ext cx="2743200" cy="320040"/>
+          </a:xfrm>
+          <a:prstGeom prst="rect">
+            <a:avLst/>
+          </a:prstGeom>
+          <a:noFill/>
+        </p:spPr>
+        <p:txBody>
+          <a:bodyPr wrap="square" anchor="t" lIns="45720" rIns="45720">
+            <a:spAutoFit/>
+          </a:bodyPr>
+          <a:lstStyle/>
+          <a:p>
+            <a:pPr algn="l">
+              <a:lnSpc>
+                <a:spcPct val="120000"/>
+              </a:lnSpc>
+              <a:spcAft>
+                <a:spcPts val="600"/>
+              </a:spcAft>
+            </a:pPr>
+            <a:r>
+              <a:rPr sz="1400" b="1" lang="ko-KR" altLang="en-US">
+                <a:solidFill>
+                  <a:srgbClr val="1B2422"/>
+                </a:solidFill>
+                <a:latin typeface="맑은 고딕"/>
+                <a:ea typeface="맑은 고딕"/>
+              </a:rPr>
+              <a:t>사진전 F</a:t>
+            </a:r>
+          </a:p>
+        </p:txBody>
+      </p:sp>
+      <p:sp>
+        <p:nvSpPr>
+          <p:cNvPr id="48" name="TextBox 47"/>
+          <p:cNvSpPr txBox="1"/>
+          <p:nvPr/>
+        </p:nvSpPr>
+        <p:spPr>
+          <a:xfrm>
+            <a:off x="6766559" y="4572000"/>
+            <a:ext cx="2743200" cy="274320"/>
+          </a:xfrm>
+          <a:prstGeom prst="rect">
+            <a:avLst/>
+          </a:prstGeom>
+          <a:noFill/>
+        </p:spPr>
+        <p:txBody>
+          <a:bodyPr wrap="square" anchor="t" lIns="45720" rIns="45720">
+            <a:spAutoFit/>
+          </a:bodyPr>
+          <a:lstStyle/>
+          <a:p>
+            <a:pPr algn="l">
+              <a:lnSpc>
+                <a:spcPct val="120000"/>
+              </a:lnSpc>
+              <a:spcAft>
+                <a:spcPts val="600"/>
+              </a:spcAft>
+            </a:pPr>
+            <a:r>
+              <a:rPr sz="1100" b="0" lang="ko-KR" altLang="en-US">
+                <a:solidFill>
+                  <a:srgbClr val="5C6865"/>
+                </a:solidFill>
+                <a:latin typeface="맑은 고딕"/>
+                <a:ea typeface="맑은 고딕"/>
+              </a:rPr>
+              <a:t>용산 · 10,000원</a:t>
+            </a:r>
+          </a:p>
+        </p:txBody>
+      </p:sp>
+      <p:sp>
+        <p:nvSpPr>
+          <p:cNvPr id="49" name="Rectangle 48"/>
+          <p:cNvSpPr/>
+          <p:nvPr/>
+        </p:nvSpPr>
+        <p:spPr>
+          <a:xfrm>
+            <a:off x="9509760" y="4507992"/>
+            <a:ext cx="1371600" cy="109728"/>
+          </a:xfrm>
+          <a:prstGeom prst="rect">
+            <a:avLst/>
+          </a:prstGeom>
+          <a:solidFill>
+            <a:srgbClr val="D9DFDC"/>
+          </a:solidFill>
+          <a:ln>
+            <a:noFill/>
+          </a:ln>
+          <a:effectLst/>
+        </p:spPr>
+        <p:style>
+          <a:lnRef idx="1">
+            <a:schemeClr val="accent1"/>
+          </a:lnRef>
+          <a:fillRef idx="3">
+            <a:schemeClr val="accent1"/>
+          </a:fillRef>
+          <a:effectRef idx="2">
+            <a:schemeClr val="accent1"/>
+          </a:effectRef>
+          <a:fontRef idx="minor">
+            <a:schemeClr val="lt1"/>
+          </a:fontRef>
+        </p:style>
+        <p:txBody>
+          <a:bodyPr rtlCol="0" anchor="ctr"/>
+          <a:lstStyle/>
+          <a:p>
+            <a:pPr algn="ctr"/>
+          </a:p>
+        </p:txBody>
+      </p:sp>
+      <p:sp>
+        <p:nvSpPr>
+          <p:cNvPr id="50" name="Rectangle 49"/>
+          <p:cNvSpPr/>
+          <p:nvPr/>
+        </p:nvSpPr>
+        <p:spPr>
+          <a:xfrm>
+            <a:off x="9509760" y="4507992"/>
+            <a:ext cx="699516" cy="109728"/>
+          </a:xfrm>
+          <a:prstGeom prst="rect">
+            <a:avLst/>
+          </a:prstGeom>
+          <a:solidFill>
+            <a:srgbClr val="0D6B5F"/>
+          </a:solidFill>
+          <a:ln>
+            <a:noFill/>
+          </a:ln>
+          <a:effectLst/>
+        </p:spPr>
+        <p:style>
+          <a:lnRef idx="1">
+            <a:schemeClr val="accent1"/>
+          </a:lnRef>
+          <a:fillRef idx="3">
+            <a:schemeClr val="accent1"/>
+          </a:fillRef>
+          <a:effectRef idx="2">
+            <a:schemeClr val="accent1"/>
+          </a:effectRef>
+          <a:fontRef idx="minor">
+            <a:schemeClr val="lt1"/>
+          </a:fontRef>
+        </p:style>
+        <p:txBody>
+          <a:bodyPr rtlCol="0" anchor="ctr"/>
+          <a:lstStyle/>
+          <a:p>
+            <a:pPr algn="ctr"/>
+          </a:p>
+        </p:txBody>
+      </p:sp>
+      <p:sp>
+        <p:nvSpPr>
+          <p:cNvPr id="51" name="TextBox 50"/>
+          <p:cNvSpPr txBox="1"/>
+          <p:nvPr/>
+        </p:nvSpPr>
+        <p:spPr>
+          <a:xfrm>
+            <a:off x="10881359" y="4261104"/>
+            <a:ext cx="594360" cy="603504"/>
+          </a:xfrm>
+          <a:prstGeom prst="rect">
+            <a:avLst/>
+          </a:prstGeom>
+          <a:noFill/>
+        </p:spPr>
+        <p:txBody>
+          <a:bodyPr wrap="square" anchor="ctr" lIns="45720" rIns="45720">
+            <a:spAutoFit/>
+          </a:bodyPr>
+          <a:lstStyle/>
+          <a:p>
+            <a:pPr algn="r">
+              <a:lnSpc>
+                <a:spcPct val="120000"/>
+              </a:lnSpc>
+              <a:spcAft>
+                <a:spcPts val="600"/>
+              </a:spcAft>
+            </a:pPr>
+            <a:r>
+              <a:rPr sz="1300" b="0" lang="ko-KR" altLang="en-US">
+                <a:solidFill>
+                  <a:srgbClr val="1B2422"/>
+                </a:solidFill>
+                <a:latin typeface="맑은 고딕"/>
+                <a:ea typeface="맑은 고딕"/>
+              </a:rPr>
+              <a:t>0.51</a:t>
+            </a:r>
+          </a:p>
+        </p:txBody>
+      </p:sp>
+      <p:sp>
+        <p:nvSpPr>
+          <p:cNvPr id="52" name="Rounded Rectangle 51"/>
+          <p:cNvSpPr/>
+          <p:nvPr/>
+        </p:nvSpPr>
+        <p:spPr>
+          <a:xfrm>
+            <a:off x="640080" y="5074920"/>
+            <a:ext cx="10881360" cy="1051560"/>
+          </a:xfrm>
+          <a:prstGeom prst="roundRect">
+            <a:avLst>
+              <a:gd name="adj" fmla="val 8000"/>
+            </a:avLst>
+          </a:prstGeom>
+          <a:solidFill>
+            <a:srgbClr val="FFFFFF"/>
+          </a:solidFill>
+          <a:ln w="12700">
+            <a:solidFill>
+              <a:srgbClr val="D9DFDC"/>
+            </a:solidFill>
+          </a:ln>
+          <a:effectLst/>
+        </p:spPr>
+        <p:style>
+          <a:lnRef idx="1">
+            <a:schemeClr val="accent1"/>
+          </a:lnRef>
+          <a:fillRef idx="3">
+            <a:schemeClr val="accent1"/>
+          </a:fillRef>
+          <a:effectRef idx="2">
+            <a:schemeClr val="accent1"/>
+          </a:effectRef>
+          <a:fontRef idx="minor">
+            <a:schemeClr val="lt1"/>
+          </a:fontRef>
+        </p:style>
+        <p:txBody>
+          <a:bodyPr rtlCol="0" anchor="ctr"/>
+          <a:lstStyle/>
+          <a:p>
+            <a:pPr algn="ctr"/>
+          </a:p>
+        </p:txBody>
+      </p:sp>
+      <p:sp>
+        <p:nvSpPr>
+          <p:cNvPr id="53" name="TextBox 52"/>
+          <p:cNvSpPr txBox="1"/>
+          <p:nvPr/>
+        </p:nvSpPr>
+        <p:spPr>
+          <a:xfrm>
+            <a:off x="868680" y="5138928"/>
+            <a:ext cx="5943600" cy="914400"/>
+          </a:xfrm>
+          <a:prstGeom prst="rect">
+            <a:avLst/>
+          </a:prstGeom>
+          <a:noFill/>
+        </p:spPr>
+        <p:txBody>
+          <a:bodyPr wrap="square" anchor="t" lIns="45720" rIns="45720">
+            <a:spAutoFit/>
+          </a:bodyPr>
+          <a:lstStyle/>
+          <a:p>
+            <a:pPr algn="l">
+              <a:lnSpc>
+                <a:spcPct val="105000"/>
+              </a:lnSpc>
+              <a:spcAft>
+                <a:spcPts val="600"/>
+              </a:spcAft>
+            </a:pPr>
+            <a:r>
+              <a:rPr sz="1300" b="1" lang="ko-KR" altLang="en-US">
+                <a:solidFill>
+                  <a:srgbClr val="B4462F"/>
+                </a:solidFill>
+                <a:latin typeface="맑은 고딕"/>
+                <a:ea typeface="맑은 고딕"/>
+              </a:rPr>
+              <a:t>미리 걸러 낸 곳</a:t>
+            </a:r>
+          </a:p>
+          <a:p>
+            <a:pPr algn="l">
+              <a:lnSpc>
+                <a:spcPct val="105000"/>
+              </a:lnSpc>
+              <a:spcAft>
+                <a:spcPts val="600"/>
+              </a:spcAft>
+            </a:pPr>
+            <a:r>
+              <a:rPr sz="1200" b="0" lang="ko-KR" altLang="en-US">
+                <a:solidFill>
+                  <a:srgbClr val="1B2422"/>
+                </a:solidFill>
+                <a:latin typeface="맑은 고딕"/>
+                <a:ea typeface="맑은 고딕"/>
+              </a:rPr>
+              <a:t>종료된 팝업 G → 운영 종료   ·   향수 팝업 H → 11/5 시작이라 아직 시작 전</a:t>
+            </a:r>
+          </a:p>
+          <a:p>
+            <a:pPr algn="l">
+              <a:lnSpc>
+                <a:spcPct val="105000"/>
+              </a:lnSpc>
+              <a:spcAft>
+                <a:spcPts val="600"/>
+              </a:spcAft>
+            </a:pPr>
+            <a:r>
+              <a:rPr sz="1200" b="0" lang="ko-KR" altLang="en-US">
+                <a:solidFill>
+                  <a:srgbClr val="1B2422"/>
+                </a:solidFill>
+                <a:latin typeface="맑은 고딕"/>
+                <a:ea typeface="맑은 고딕"/>
+              </a:rPr>
+              <a:t>미디어아트 전시 B → 사용자 A 예산 초과</a:t>
+            </a:r>
+          </a:p>
+        </p:txBody>
+      </p:sp>
+      <p:sp>
+        <p:nvSpPr>
+          <p:cNvPr id="54" name="TextBox 53"/>
+          <p:cNvSpPr txBox="1"/>
+          <p:nvPr/>
+        </p:nvSpPr>
+        <p:spPr>
+          <a:xfrm>
+            <a:off x="6949440" y="5138928"/>
+            <a:ext cx="4389120" cy="914400"/>
+          </a:xfrm>
+          <a:prstGeom prst="rect">
+            <a:avLst/>
+          </a:prstGeom>
+          <a:noFill/>
+        </p:spPr>
+        <p:txBody>
+          <a:bodyPr wrap="square" anchor="t" lIns="45720" rIns="45720">
+            <a:spAutoFit/>
+          </a:bodyPr>
+          <a:lstStyle/>
+          <a:p>
+            <a:pPr algn="l">
+              <a:lnSpc>
+                <a:spcPct val="105000"/>
+              </a:lnSpc>
+              <a:spcAft>
+                <a:spcPts val="600"/>
+              </a:spcAft>
+            </a:pPr>
+            <a:r>
+              <a:rPr sz="1300" b="1" lang="ko-KR" altLang="en-US">
+                <a:solidFill>
+                  <a:srgbClr val="0D6B5F"/>
+                </a:solidFill>
+                <a:latin typeface="맑은 고딕"/>
+                <a:ea typeface="맑은 고딕"/>
+              </a:rPr>
+              <a:t>잘 맞는 정도(유사도)</a:t>
+            </a:r>
+          </a:p>
+          <a:p>
+            <a:pPr algn="l">
+              <a:lnSpc>
+                <a:spcPct val="105000"/>
+              </a:lnSpc>
+              <a:spcAft>
+                <a:spcPts val="600"/>
+              </a:spcAft>
+            </a:pPr>
+            <a:r>
+              <a:rPr sz="1200" b="0" lang="ko-KR" altLang="en-US">
+                <a:solidFill>
+                  <a:srgbClr val="1B2422"/>
+                </a:solidFill>
+                <a:latin typeface="맑은 고딕"/>
+                <a:ea typeface="맑은 고딕"/>
+              </a:rPr>
+              <a:t>내 문장과 소개글이 얼마나 비슷한지.
+1에 가까울수록 찰떡</a:t>
             </a:r>
           </a:p>
         </p:txBody>
@@ -7242,7 +8834,7 @@
           </a:bodyPr>
           <a:lstStyle/>
           <a:p>
-            <a:pPr algn="l" eaLnBrk="0">
+            <a:pPr algn="l">
               <a:lnSpc>
                 <a:spcPct val="120000"/>
               </a:lnSpc>
@@ -7285,7 +8877,7 @@
           </a:bodyPr>
           <a:lstStyle/>
           <a:p>
-            <a:pPr algn="l" eaLnBrk="0">
+            <a:pPr algn="l">
               <a:lnSpc>
                 <a:spcPct val="120000"/>
               </a:lnSpc>
@@ -7301,7 +8893,7 @@
                 <a:latin typeface="맑은 고딕"/>
                 <a:ea typeface="맑은 고딕"/>
               </a:rPr>
-              <a:t>취향이 다르면 추천도 달라진다</a:t>
+              <a:t>복잡한 팝업 안내문, ChatGPT로 깔끔하게</a:t>
             </a:r>
           </a:p>
         </p:txBody>
@@ -7372,7 +8964,7 @@
           </a:bodyPr>
           <a:lstStyle/>
           <a:p>
-            <a:pPr algn="l" eaLnBrk="0">
+            <a:pPr algn="l">
               <a:lnSpc>
                 <a:spcPct val="120000"/>
               </a:lnSpc>
@@ -7415,7 +9007,7 @@
           </a:bodyPr>
           <a:lstStyle/>
           <a:p>
-            <a:pPr algn="r" eaLnBrk="0">
+            <a:pPr algn="r">
               <a:lnSpc>
                 <a:spcPct val="120000"/>
               </a:lnSpc>
@@ -7431,7 +9023,7 @@
                 <a:latin typeface="맑은 고딕"/>
                 <a:ea typeface="맑은 고딕"/>
               </a:rPr>
-              <a:t>6 / 10</a:t>
+              <a:t>6 / 9</a:t>
             </a:r>
           </a:p>
         </p:txBody>
@@ -7444,8 +9036,8 @@
         </p:nvSpPr>
         <p:spPr>
           <a:xfrm>
-            <a:off x="640080" y="1691640"/>
-            <a:ext cx="10881360" cy="320040"/>
+            <a:off x="640080" y="1783080"/>
+            <a:ext cx="5303520" cy="365760"/>
           </a:xfrm>
           <a:prstGeom prst="rect">
             <a:avLst/>
@@ -7458,7 +9050,7 @@
           </a:bodyPr>
           <a:lstStyle/>
           <a:p>
-            <a:pPr algn="l" eaLnBrk="0">
+            <a:pPr algn="l">
               <a:lnSpc>
                 <a:spcPct val="120000"/>
               </a:lnSpc>
@@ -7467,76 +9059,31 @@
               </a:spcAft>
             </a:pPr>
             <a:r>
-              <a:rPr sz="1200" b="0" lang="ko-KR" altLang="en-US">
-                <a:solidFill>
-                  <a:srgbClr val="5C6865"/>
+              <a:rPr sz="1300" b="1" lang="ko-KR" altLang="en-US">
+                <a:solidFill>
+                  <a:srgbClr val="0D6B5F"/>
                 </a:solidFill>
                 <a:latin typeface="맑은 고딕"/>
                 <a:ea typeface="맑은 고딕"/>
               </a:rPr>
-              <a:t>추천 알고리즘 시연 결과  ·  테스트 데이터 8곳(가상 예시)  ·  방문일 2026-10-31</a:t>
-            </a:r>
-          </a:p>
-        </p:txBody>
-      </p:sp>
-      <p:sp>
-        <p:nvSpPr>
-          <p:cNvPr id="8" name="TextBox 7"/>
-          <p:cNvSpPr txBox="1"/>
-          <p:nvPr/>
-        </p:nvSpPr>
-        <p:spPr>
-          <a:xfrm>
-            <a:off x="640080" y="2103120"/>
-            <a:ext cx="5303520" cy="365760"/>
-          </a:xfrm>
-          <a:prstGeom prst="rect">
-            <a:avLst/>
-          </a:prstGeom>
-          <a:noFill/>
-        </p:spPr>
-        <p:txBody>
-          <a:bodyPr wrap="square" anchor="t" lIns="45720" rIns="45720">
-            <a:spAutoFit/>
-          </a:bodyPr>
-          <a:lstStyle/>
-          <a:p>
-            <a:pPr algn="l" eaLnBrk="0">
-              <a:lnSpc>
-                <a:spcPct val="120000"/>
-              </a:lnSpc>
-              <a:spcAft>
-                <a:spcPts val="600"/>
-              </a:spcAft>
-            </a:pPr>
-            <a:r>
-              <a:rPr sz="1500" b="1" lang="ko-KR" altLang="en-US">
-                <a:solidFill>
-                  <a:srgbClr val="1B2422"/>
-                </a:solidFill>
-                <a:latin typeface="맑은 고딕"/>
-                <a:ea typeface="맑은 고딕"/>
-              </a:rPr>
-              <a:t>사용자 A  ·  체험·사진·귀여운·무료</a:t>
-            </a:r>
-          </a:p>
-        </p:txBody>
-      </p:sp>
-      <p:sp>
-        <p:nvSpPr>
-          <p:cNvPr id="9" name="Rounded Rectangle 8"/>
+              <a:t>ChatGPT에 입력한 프롬프트</a:t>
+            </a:r>
+          </a:p>
+        </p:txBody>
+      </p:sp>
+      <p:sp>
+        <p:nvSpPr>
+          <p:cNvPr id="8" name="Rectangle 7"/>
           <p:cNvSpPr/>
           <p:nvPr/>
         </p:nvSpPr>
         <p:spPr>
           <a:xfrm>
-            <a:off x="640080" y="2560320"/>
-            <a:ext cx="5303520" cy="658368"/>
-          </a:xfrm>
-          <a:prstGeom prst="roundRect">
-            <a:avLst>
-              <a:gd name="adj" fmla="val 8000"/>
-            </a:avLst>
+            <a:off x="640080" y="2148840"/>
+            <a:ext cx="5303520" cy="2743200"/>
+          </a:xfrm>
+          <a:prstGeom prst="rect">
+            <a:avLst/>
           </a:prstGeom>
           <a:solidFill>
             <a:srgbClr val="FFFFFF"/>
@@ -7572,14 +9119,62 @@
       </p:sp>
       <p:sp>
         <p:nvSpPr>
+          <p:cNvPr id="9" name="TextBox 8"/>
+          <p:cNvSpPr txBox="1"/>
+          <p:nvPr/>
+        </p:nvSpPr>
+        <p:spPr>
+          <a:xfrm>
+            <a:off x="822960" y="2286000"/>
+            <a:ext cx="5029200" cy="2560320"/>
+          </a:xfrm>
+          <a:prstGeom prst="rect">
+            <a:avLst/>
+          </a:prstGeom>
+          <a:noFill/>
+        </p:spPr>
+        <p:txBody>
+          <a:bodyPr wrap="square" anchor="t" lIns="45720" rIns="45720">
+            <a:spAutoFit/>
+          </a:bodyPr>
+          <a:lstStyle/>
+          <a:p>
+            <a:pPr algn="l">
+              <a:lnSpc>
+                <a:spcPct val="115000"/>
+              </a:lnSpc>
+              <a:spcAft>
+                <a:spcPts val="600"/>
+              </a:spcAft>
+            </a:pPr>
+            <a:r>
+              <a:rPr sz="1300" b="0" lang="ko-KR" altLang="en-US">
+                <a:solidFill>
+                  <a:srgbClr val="1B2422"/>
+                </a:solidFill>
+                <a:latin typeface="맑은 고딕"/>
+                <a:ea typeface="맑은 고딕"/>
+              </a:rPr>
+              <a:t>아래 팝업 안내 문구에서 정보를 뽑아 JSON으로만 답해.
+없는 정보는 null로 둬.
+{"name": "", "region": "", "start": "YYYY-MM-DD",
+ "end": "YYYY-MM-DD", "price": 0, "desc": "한두 문장 소개"}
+안내 문구:
+(실제 팝업 공식 안내 문구 붙여넣기)</a:t>
+            </a:r>
+          </a:p>
+        </p:txBody>
+      </p:sp>
+      <p:sp>
+        <p:nvSpPr>
           <p:cNvPr id="10" name="TextBox 9"/>
           <p:cNvSpPr txBox="1"/>
           <p:nvPr/>
         </p:nvSpPr>
         <p:spPr>
           <a:xfrm>
-            <a:off x="731519" y="2560320"/>
-            <a:ext cx="411480" cy="658368"/>
+            <a:off x="640080" y="5074920"/>
+            <a:ext cx="5303520" cy="1097280"/>
           </a:xfrm>
           <a:prstGeom prst="rect">
             <a:avLst/>
@@ -7587,12 +9182,55 @@
           <a:noFill/>
         </p:spPr>
         <p:txBody>
-          <a:bodyPr wrap="square" anchor="ctr" lIns="45720" rIns="45720">
+          <a:bodyPr wrap="square" anchor="t" lIns="45720" rIns="45720">
             <a:spAutoFit/>
           </a:bodyPr>
           <a:lstStyle/>
           <a:p>
-            <a:pPr algn="ctr" eaLnBrk="0">
+            <a:pPr algn="l">
+              <a:lnSpc>
+                <a:spcPct val="135000"/>
+              </a:lnSpc>
+              <a:spcAft>
+                <a:spcPts val="600"/>
+              </a:spcAft>
+            </a:pPr>
+            <a:r>
+              <a:rPr sz="1300" b="0" lang="ko-KR" altLang="en-US">
+                <a:solidFill>
+                  <a:srgbClr val="1B2422"/>
+                </a:solidFill>
+                <a:latin typeface="맑은 고딕"/>
+                <a:ea typeface="맑은 고딕"/>
+              </a:rPr>
+              <a:t>팝업 정보는 받아올 공식 API가 없음. 대신 공식 안내문을 붙여넣으면 ChatGPT가 정리하고, 그 결과를 장소 목록에 추가. 크롤링이 없으니 약관 걱정도 없음</a:t>
+            </a:r>
+          </a:p>
+        </p:txBody>
+      </p:sp>
+      <p:sp>
+        <p:nvSpPr>
+          <p:cNvPr id="11" name="TextBox 10"/>
+          <p:cNvSpPr txBox="1"/>
+          <p:nvPr/>
+        </p:nvSpPr>
+        <p:spPr>
+          <a:xfrm>
+            <a:off x="6309360" y="1783080"/>
+            <a:ext cx="5212080" cy="365760"/>
+          </a:xfrm>
+          <a:prstGeom prst="rect">
+            <a:avLst/>
+          </a:prstGeom>
+          <a:noFill/>
+        </p:spPr>
+        <p:txBody>
+          <a:bodyPr wrap="square" anchor="t" lIns="45720" rIns="45720">
+            <a:spAutoFit/>
+          </a:bodyPr>
+          <a:lstStyle/>
+          <a:p>
+            <a:pPr algn="l">
               <a:lnSpc>
                 <a:spcPct val="120000"/>
               </a:lnSpc>
@@ -7601,28 +9239,73 @@
               </a:spcAft>
             </a:pPr>
             <a:r>
-              <a:rPr sz="1800" b="1" lang="ko-KR" altLang="en-US">
+              <a:rPr sz="1300" b="1" lang="ko-KR" altLang="en-US">
                 <a:solidFill>
                   <a:srgbClr val="0D6B5F"/>
                 </a:solidFill>
                 <a:latin typeface="맑은 고딕"/>
                 <a:ea typeface="맑은 고딕"/>
               </a:rPr>
-              <a:t>1</a:t>
-            </a:r>
-          </a:p>
-        </p:txBody>
-      </p:sp>
-      <p:sp>
-        <p:nvSpPr>
-          <p:cNvPr id="11" name="TextBox 10"/>
+              <a:t>실행 결과</a:t>
+            </a:r>
+          </a:p>
+        </p:txBody>
+      </p:sp>
+      <p:sp>
+        <p:nvSpPr>
+          <p:cNvPr id="12" name="Rectangle 11"/>
+          <p:cNvSpPr/>
+          <p:nvPr/>
+        </p:nvSpPr>
+        <p:spPr>
+          <a:xfrm>
+            <a:off x="6309360" y="2148840"/>
+            <a:ext cx="5212080" cy="3931920"/>
+          </a:xfrm>
+          <a:prstGeom prst="rect">
+            <a:avLst/>
+          </a:prstGeom>
+          <a:noFill/>
+          <a:ln w="12700">
+            <a:solidFill>
+              <a:srgbClr val="5C6865"/>
+            </a:solidFill>
+            <a:prstDash val="dash"/>
+          </a:ln>
+          <a:effectLst/>
+        </p:spPr>
+        <p:style>
+          <a:lnRef idx="1">
+            <a:schemeClr val="accent1"/>
+          </a:lnRef>
+          <a:fillRef idx="3">
+            <a:schemeClr val="accent1"/>
+          </a:fillRef>
+          <a:effectRef idx="2">
+            <a:schemeClr val="accent1"/>
+          </a:effectRef>
+          <a:fontRef idx="minor">
+            <a:schemeClr val="lt1"/>
+          </a:fontRef>
+        </p:style>
+        <p:txBody>
+          <a:bodyPr rtlCol="0" anchor="ctr"/>
+          <a:lstStyle/>
+          <a:p>
+            <a:pPr algn="ctr"/>
+          </a:p>
+        </p:txBody>
+      </p:sp>
+      <p:sp>
+        <p:nvSpPr>
+          <p:cNvPr id="13" name="TextBox 12"/>
           <p:cNvSpPr txBox="1"/>
           <p:nvPr/>
         </p:nvSpPr>
         <p:spPr>
           <a:xfrm>
-            <a:off x="1188719" y="2596896"/>
-            <a:ext cx="3108960" cy="320040"/>
+            <a:off x="6309360" y="2148840"/>
+            <a:ext cx="5212080" cy="3931920"/>
           </a:xfrm>
           <a:prstGeom prst="rect">
             <a:avLst/>
@@ -7630,12 +9313,12 @@
           <a:noFill/>
         </p:spPr>
         <p:txBody>
-          <a:bodyPr wrap="square" anchor="t" lIns="45720" rIns="45720">
+          <a:bodyPr wrap="square" anchor="ctr" lIns="45720" rIns="45720">
             <a:spAutoFit/>
           </a:bodyPr>
           <a:lstStyle/>
           <a:p>
-            <a:pPr algn="l" eaLnBrk="0">
+            <a:pPr algn="ctr">
               <a:lnSpc>
                 <a:spcPct val="120000"/>
               </a:lnSpc>
@@ -7644,1966 +9327,14 @@
               </a:spcAft>
             </a:pPr>
             <a:r>
-              <a:rPr sz="1400" b="1" lang="ko-KR" altLang="en-US">
-                <a:solidFill>
-                  <a:srgbClr val="1B2422"/>
+              <a:rPr sz="1400" b="0" lang="ko-KR" altLang="en-US">
+                <a:solidFill>
+                  <a:srgbClr val="5C6865"/>
                 </a:solidFill>
                 <a:latin typeface="맑은 고딕"/>
                 <a:ea typeface="맑은 고딕"/>
               </a:rPr>
-              <a:t>캐릭터 팝업 A</a:t>
-            </a:r>
-          </a:p>
-        </p:txBody>
-      </p:sp>
-      <p:sp>
-        <p:nvSpPr>
-          <p:cNvPr id="12" name="TextBox 11"/>
-          <p:cNvSpPr txBox="1"/>
-          <p:nvPr/>
-        </p:nvSpPr>
-        <p:spPr>
-          <a:xfrm>
-            <a:off x="1188719" y="2898648"/>
-            <a:ext cx="3108960" cy="274320"/>
-          </a:xfrm>
-          <a:prstGeom prst="rect">
-            <a:avLst/>
-          </a:prstGeom>
-          <a:noFill/>
-        </p:spPr>
-        <p:txBody>
-          <a:bodyPr wrap="square" anchor="t" lIns="45720" rIns="45720">
-            <a:spAutoFit/>
-          </a:bodyPr>
-          <a:lstStyle/>
-          <a:p>
-            <a:pPr algn="l" eaLnBrk="0">
-              <a:lnSpc>
-                <a:spcPct val="120000"/>
-              </a:lnSpc>
-              <a:spcAft>
-                <a:spcPts val="600"/>
-              </a:spcAft>
-            </a:pPr>
-            <a:r>
-              <a:rPr sz="1100" b="0" lang="ko-KR" altLang="en-US">
-                <a:solidFill>
-                  <a:srgbClr val="5C6865"/>
-                </a:solidFill>
-                <a:latin typeface="맑은 고딕"/>
-                <a:ea typeface="맑은 고딕"/>
-              </a:rPr>
-              <a:t>성수 · 무료</a:t>
-            </a:r>
-          </a:p>
-        </p:txBody>
-      </p:sp>
-      <p:sp>
-        <p:nvSpPr>
-          <p:cNvPr id="13" name="Rectangle 12"/>
-          <p:cNvSpPr/>
-          <p:nvPr/>
-        </p:nvSpPr>
-        <p:spPr>
-          <a:xfrm>
-            <a:off x="3931920" y="2834639"/>
-            <a:ext cx="1371600" cy="109728"/>
-          </a:xfrm>
-          <a:prstGeom prst="rect">
-            <a:avLst/>
-          </a:prstGeom>
-          <a:solidFill>
-            <a:srgbClr val="D9DFDC"/>
-          </a:solidFill>
-          <a:ln>
-            <a:noFill/>
-          </a:ln>
-          <a:effectLst/>
-        </p:spPr>
-        <p:style>
-          <a:lnRef idx="1">
-            <a:schemeClr val="accent1"/>
-          </a:lnRef>
-          <a:fillRef idx="3">
-            <a:schemeClr val="accent1"/>
-          </a:fillRef>
-          <a:effectRef idx="2">
-            <a:schemeClr val="accent1"/>
-          </a:effectRef>
-          <a:fontRef idx="minor">
-            <a:schemeClr val="lt1"/>
-          </a:fontRef>
-        </p:style>
-        <p:txBody>
-          <a:bodyPr rtlCol="0" anchor="ctr"/>
-          <a:lstStyle/>
-          <a:p>
-            <a:pPr algn="ctr"/>
-          </a:p>
-        </p:txBody>
-      </p:sp>
-      <p:sp>
-        <p:nvSpPr>
-          <p:cNvPr id="14" name="Rectangle 13"/>
-          <p:cNvSpPr/>
-          <p:nvPr/>
-        </p:nvSpPr>
-        <p:spPr>
-          <a:xfrm>
-            <a:off x="3931920" y="2834639"/>
-            <a:ext cx="1371600" cy="109728"/>
-          </a:xfrm>
-          <a:prstGeom prst="rect">
-            <a:avLst/>
-          </a:prstGeom>
-          <a:solidFill>
-            <a:srgbClr val="0D6B5F"/>
-          </a:solidFill>
-          <a:ln>
-            <a:noFill/>
-          </a:ln>
-          <a:effectLst/>
-        </p:spPr>
-        <p:style>
-          <a:lnRef idx="1">
-            <a:schemeClr val="accent1"/>
-          </a:lnRef>
-          <a:fillRef idx="3">
-            <a:schemeClr val="accent1"/>
-          </a:fillRef>
-          <a:effectRef idx="2">
-            <a:schemeClr val="accent1"/>
-          </a:effectRef>
-          <a:fontRef idx="minor">
-            <a:schemeClr val="lt1"/>
-          </a:fontRef>
-        </p:style>
-        <p:txBody>
-          <a:bodyPr rtlCol="0" anchor="ctr"/>
-          <a:lstStyle/>
-          <a:p>
-            <a:pPr algn="ctr"/>
-          </a:p>
-        </p:txBody>
-      </p:sp>
-      <p:sp>
-        <p:nvSpPr>
-          <p:cNvPr id="15" name="TextBox 14"/>
-          <p:cNvSpPr txBox="1"/>
-          <p:nvPr/>
-        </p:nvSpPr>
-        <p:spPr>
-          <a:xfrm>
-            <a:off x="5303520" y="2560320"/>
-            <a:ext cx="594360" cy="658368"/>
-          </a:xfrm>
-          <a:prstGeom prst="rect">
-            <a:avLst/>
-          </a:prstGeom>
-          <a:noFill/>
-        </p:spPr>
-        <p:txBody>
-          <a:bodyPr wrap="square" anchor="ctr" lIns="45720" rIns="45720">
-            <a:spAutoFit/>
-          </a:bodyPr>
-          <a:lstStyle/>
-          <a:p>
-            <a:pPr algn="r" eaLnBrk="0">
-              <a:lnSpc>
-                <a:spcPct val="120000"/>
-              </a:lnSpc>
-              <a:spcAft>
-                <a:spcPts val="600"/>
-              </a:spcAft>
-            </a:pPr>
-            <a:r>
-              <a:rPr sz="1300" b="0" lang="ko-KR" altLang="en-US">
-                <a:solidFill>
-                  <a:srgbClr val="1B2422"/>
-                </a:solidFill>
-                <a:latin typeface="Consolas"/>
-                <a:ea typeface="맑은 고딕"/>
-              </a:rPr>
-              <a:t>1.00</a:t>
-            </a:r>
-          </a:p>
-        </p:txBody>
-      </p:sp>
-      <p:sp>
-        <p:nvSpPr>
-          <p:cNvPr id="16" name="Rounded Rectangle 15"/>
-          <p:cNvSpPr/>
-          <p:nvPr/>
-        </p:nvSpPr>
-        <p:spPr>
-          <a:xfrm>
-            <a:off x="640080" y="3337560"/>
-            <a:ext cx="5303520" cy="658368"/>
-          </a:xfrm>
-          <a:prstGeom prst="roundRect">
-            <a:avLst>
-              <a:gd name="adj" fmla="val 8000"/>
-            </a:avLst>
-          </a:prstGeom>
-          <a:solidFill>
-            <a:srgbClr val="FFFFFF"/>
-          </a:solidFill>
-          <a:ln w="12700">
-            <a:solidFill>
-              <a:srgbClr val="D9DFDC"/>
-            </a:solidFill>
-          </a:ln>
-          <a:effectLst/>
-        </p:spPr>
-        <p:style>
-          <a:lnRef idx="1">
-            <a:schemeClr val="accent1"/>
-          </a:lnRef>
-          <a:fillRef idx="3">
-            <a:schemeClr val="accent1"/>
-          </a:fillRef>
-          <a:effectRef idx="2">
-            <a:schemeClr val="accent1"/>
-          </a:effectRef>
-          <a:fontRef idx="minor">
-            <a:schemeClr val="lt1"/>
-          </a:fontRef>
-        </p:style>
-        <p:txBody>
-          <a:bodyPr rtlCol="0" anchor="ctr"/>
-          <a:lstStyle/>
-          <a:p>
-            <a:pPr algn="ctr"/>
-          </a:p>
-        </p:txBody>
-      </p:sp>
-      <p:sp>
-        <p:nvSpPr>
-          <p:cNvPr id="17" name="TextBox 16"/>
-          <p:cNvSpPr txBox="1"/>
-          <p:nvPr/>
-        </p:nvSpPr>
-        <p:spPr>
-          <a:xfrm>
-            <a:off x="731519" y="3337560"/>
-            <a:ext cx="411480" cy="658368"/>
-          </a:xfrm>
-          <a:prstGeom prst="rect">
-            <a:avLst/>
-          </a:prstGeom>
-          <a:noFill/>
-        </p:spPr>
-        <p:txBody>
-          <a:bodyPr wrap="square" anchor="ctr" lIns="45720" rIns="45720">
-            <a:spAutoFit/>
-          </a:bodyPr>
-          <a:lstStyle/>
-          <a:p>
-            <a:pPr algn="ctr" eaLnBrk="0">
-              <a:lnSpc>
-                <a:spcPct val="120000"/>
-              </a:lnSpc>
-              <a:spcAft>
-                <a:spcPts val="600"/>
-              </a:spcAft>
-            </a:pPr>
-            <a:r>
-              <a:rPr sz="1800" b="1" lang="ko-KR" altLang="en-US">
-                <a:solidFill>
-                  <a:srgbClr val="0D6B5F"/>
-                </a:solidFill>
-                <a:latin typeface="맑은 고딕"/>
-                <a:ea typeface="맑은 고딕"/>
-              </a:rPr>
-              <a:t>2</a:t>
-            </a:r>
-          </a:p>
-        </p:txBody>
-      </p:sp>
-      <p:sp>
-        <p:nvSpPr>
-          <p:cNvPr id="18" name="TextBox 17"/>
-          <p:cNvSpPr txBox="1"/>
-          <p:nvPr/>
-        </p:nvSpPr>
-        <p:spPr>
-          <a:xfrm>
-            <a:off x="1188719" y="3374136"/>
-            <a:ext cx="3108960" cy="320040"/>
-          </a:xfrm>
-          <a:prstGeom prst="rect">
-            <a:avLst/>
-          </a:prstGeom>
-          <a:noFill/>
-        </p:spPr>
-        <p:txBody>
-          <a:bodyPr wrap="square" anchor="t" lIns="45720" rIns="45720">
-            <a:spAutoFit/>
-          </a:bodyPr>
-          <a:lstStyle/>
-          <a:p>
-            <a:pPr algn="l" eaLnBrk="0">
-              <a:lnSpc>
-                <a:spcPct val="120000"/>
-              </a:lnSpc>
-              <a:spcAft>
-                <a:spcPts val="600"/>
-              </a:spcAft>
-            </a:pPr>
-            <a:r>
-              <a:rPr sz="1400" b="1" lang="ko-KR" altLang="en-US">
-                <a:solidFill>
-                  <a:srgbClr val="1B2422"/>
-                </a:solidFill>
-                <a:latin typeface="맑은 고딕"/>
-                <a:ea typeface="맑은 고딕"/>
-              </a:rPr>
-              <a:t>레트로 게임 팝업 C</a:t>
-            </a:r>
-          </a:p>
-        </p:txBody>
-      </p:sp>
-      <p:sp>
-        <p:nvSpPr>
-          <p:cNvPr id="19" name="TextBox 18"/>
-          <p:cNvSpPr txBox="1"/>
-          <p:nvPr/>
-        </p:nvSpPr>
-        <p:spPr>
-          <a:xfrm>
-            <a:off x="1188719" y="3675887"/>
-            <a:ext cx="3108960" cy="274320"/>
-          </a:xfrm>
-          <a:prstGeom prst="rect">
-            <a:avLst/>
-          </a:prstGeom>
-          <a:noFill/>
-        </p:spPr>
-        <p:txBody>
-          <a:bodyPr wrap="square" anchor="t" lIns="45720" rIns="45720">
-            <a:spAutoFit/>
-          </a:bodyPr>
-          <a:lstStyle/>
-          <a:p>
-            <a:pPr algn="l" eaLnBrk="0">
-              <a:lnSpc>
-                <a:spcPct val="120000"/>
-              </a:lnSpc>
-              <a:spcAft>
-                <a:spcPts val="600"/>
-              </a:spcAft>
-            </a:pPr>
-            <a:r>
-              <a:rPr sz="1100" b="0" lang="ko-KR" altLang="en-US">
-                <a:solidFill>
-                  <a:srgbClr val="5C6865"/>
-                </a:solidFill>
-                <a:latin typeface="맑은 고딕"/>
-                <a:ea typeface="맑은 고딕"/>
-              </a:rPr>
-              <a:t>홍대 · 무료</a:t>
-            </a:r>
-          </a:p>
-        </p:txBody>
-      </p:sp>
-      <p:sp>
-        <p:nvSpPr>
-          <p:cNvPr id="20" name="Rectangle 19"/>
-          <p:cNvSpPr/>
-          <p:nvPr/>
-        </p:nvSpPr>
-        <p:spPr>
-          <a:xfrm>
-            <a:off x="3931920" y="3611879"/>
-            <a:ext cx="1371600" cy="109728"/>
-          </a:xfrm>
-          <a:prstGeom prst="rect">
-            <a:avLst/>
-          </a:prstGeom>
-          <a:solidFill>
-            <a:srgbClr val="D9DFDC"/>
-          </a:solidFill>
-          <a:ln>
-            <a:noFill/>
-          </a:ln>
-          <a:effectLst/>
-        </p:spPr>
-        <p:style>
-          <a:lnRef idx="1">
-            <a:schemeClr val="accent1"/>
-          </a:lnRef>
-          <a:fillRef idx="3">
-            <a:schemeClr val="accent1"/>
-          </a:fillRef>
-          <a:effectRef idx="2">
-            <a:schemeClr val="accent1"/>
-          </a:effectRef>
-          <a:fontRef idx="minor">
-            <a:schemeClr val="lt1"/>
-          </a:fontRef>
-        </p:style>
-        <p:txBody>
-          <a:bodyPr rtlCol="0" anchor="ctr"/>
-          <a:lstStyle/>
-          <a:p>
-            <a:pPr algn="ctr"/>
-          </a:p>
-        </p:txBody>
-      </p:sp>
-      <p:sp>
-        <p:nvSpPr>
-          <p:cNvPr id="21" name="Rectangle 20"/>
-          <p:cNvSpPr/>
-          <p:nvPr/>
-        </p:nvSpPr>
-        <p:spPr>
-          <a:xfrm>
-            <a:off x="3931920" y="3611879"/>
-            <a:ext cx="946403" cy="109728"/>
-          </a:xfrm>
-          <a:prstGeom prst="rect">
-            <a:avLst/>
-          </a:prstGeom>
-          <a:solidFill>
-            <a:srgbClr val="0D6B5F"/>
-          </a:solidFill>
-          <a:ln>
-            <a:noFill/>
-          </a:ln>
-          <a:effectLst/>
-        </p:spPr>
-        <p:style>
-          <a:lnRef idx="1">
-            <a:schemeClr val="accent1"/>
-          </a:lnRef>
-          <a:fillRef idx="3">
-            <a:schemeClr val="accent1"/>
-          </a:fillRef>
-          <a:effectRef idx="2">
-            <a:schemeClr val="accent1"/>
-          </a:effectRef>
-          <a:fontRef idx="minor">
-            <a:schemeClr val="lt1"/>
-          </a:fontRef>
-        </p:style>
-        <p:txBody>
-          <a:bodyPr rtlCol="0" anchor="ctr"/>
-          <a:lstStyle/>
-          <a:p>
-            <a:pPr algn="ctr"/>
-          </a:p>
-        </p:txBody>
-      </p:sp>
-      <p:sp>
-        <p:nvSpPr>
-          <p:cNvPr id="22" name="TextBox 21"/>
-          <p:cNvSpPr txBox="1"/>
-          <p:nvPr/>
-        </p:nvSpPr>
-        <p:spPr>
-          <a:xfrm>
-            <a:off x="5303520" y="3337560"/>
-            <a:ext cx="594360" cy="658368"/>
-          </a:xfrm>
-          <a:prstGeom prst="rect">
-            <a:avLst/>
-          </a:prstGeom>
-          <a:noFill/>
-        </p:spPr>
-        <p:txBody>
-          <a:bodyPr wrap="square" anchor="ctr" lIns="45720" rIns="45720">
-            <a:spAutoFit/>
-          </a:bodyPr>
-          <a:lstStyle/>
-          <a:p>
-            <a:pPr algn="r" eaLnBrk="0">
-              <a:lnSpc>
-                <a:spcPct val="120000"/>
-              </a:lnSpc>
-              <a:spcAft>
-                <a:spcPts val="600"/>
-              </a:spcAft>
-            </a:pPr>
-            <a:r>
-              <a:rPr sz="1300" b="0" lang="ko-KR" altLang="en-US">
-                <a:solidFill>
-                  <a:srgbClr val="1B2422"/>
-                </a:solidFill>
-                <a:latin typeface="Consolas"/>
-                <a:ea typeface="맑은 고딕"/>
-              </a:rPr>
-              <a:t>0.69</a:t>
-            </a:r>
-          </a:p>
-        </p:txBody>
-      </p:sp>
-      <p:sp>
-        <p:nvSpPr>
-          <p:cNvPr id="23" name="Rounded Rectangle 22"/>
-          <p:cNvSpPr/>
-          <p:nvPr/>
-        </p:nvSpPr>
-        <p:spPr>
-          <a:xfrm>
-            <a:off x="640080" y="4114800"/>
-            <a:ext cx="5303520" cy="658368"/>
-          </a:xfrm>
-          <a:prstGeom prst="roundRect">
-            <a:avLst>
-              <a:gd name="adj" fmla="val 8000"/>
-            </a:avLst>
-          </a:prstGeom>
-          <a:solidFill>
-            <a:srgbClr val="FFFFFF"/>
-          </a:solidFill>
-          <a:ln w="12700">
-            <a:solidFill>
-              <a:srgbClr val="D9DFDC"/>
-            </a:solidFill>
-          </a:ln>
-          <a:effectLst/>
-        </p:spPr>
-        <p:style>
-          <a:lnRef idx="1">
-            <a:schemeClr val="accent1"/>
-          </a:lnRef>
-          <a:fillRef idx="3">
-            <a:schemeClr val="accent1"/>
-          </a:fillRef>
-          <a:effectRef idx="2">
-            <a:schemeClr val="accent1"/>
-          </a:effectRef>
-          <a:fontRef idx="minor">
-            <a:schemeClr val="lt1"/>
-          </a:fontRef>
-        </p:style>
-        <p:txBody>
-          <a:bodyPr rtlCol="0" anchor="ctr"/>
-          <a:lstStyle/>
-          <a:p>
-            <a:pPr algn="ctr"/>
-          </a:p>
-        </p:txBody>
-      </p:sp>
-      <p:sp>
-        <p:nvSpPr>
-          <p:cNvPr id="24" name="TextBox 23"/>
-          <p:cNvSpPr txBox="1"/>
-          <p:nvPr/>
-        </p:nvSpPr>
-        <p:spPr>
-          <a:xfrm>
-            <a:off x="731519" y="4114800"/>
-            <a:ext cx="411480" cy="658368"/>
-          </a:xfrm>
-          <a:prstGeom prst="rect">
-            <a:avLst/>
-          </a:prstGeom>
-          <a:noFill/>
-        </p:spPr>
-        <p:txBody>
-          <a:bodyPr wrap="square" anchor="ctr" lIns="45720" rIns="45720">
-            <a:spAutoFit/>
-          </a:bodyPr>
-          <a:lstStyle/>
-          <a:p>
-            <a:pPr algn="ctr" eaLnBrk="0">
-              <a:lnSpc>
-                <a:spcPct val="120000"/>
-              </a:lnSpc>
-              <a:spcAft>
-                <a:spcPts val="600"/>
-              </a:spcAft>
-            </a:pPr>
-            <a:r>
-              <a:rPr sz="1800" b="1" lang="ko-KR" altLang="en-US">
-                <a:solidFill>
-                  <a:srgbClr val="0D6B5F"/>
-                </a:solidFill>
-                <a:latin typeface="맑은 고딕"/>
-                <a:ea typeface="맑은 고딕"/>
-              </a:rPr>
-              <a:t>3</a:t>
-            </a:r>
-          </a:p>
-        </p:txBody>
-      </p:sp>
-      <p:sp>
-        <p:nvSpPr>
-          <p:cNvPr id="25" name="TextBox 24"/>
-          <p:cNvSpPr txBox="1"/>
-          <p:nvPr/>
-        </p:nvSpPr>
-        <p:spPr>
-          <a:xfrm>
-            <a:off x="1188719" y="4151376"/>
-            <a:ext cx="3108960" cy="320040"/>
-          </a:xfrm>
-          <a:prstGeom prst="rect">
-            <a:avLst/>
-          </a:prstGeom>
-          <a:noFill/>
-        </p:spPr>
-        <p:txBody>
-          <a:bodyPr wrap="square" anchor="t" lIns="45720" rIns="45720">
-            <a:spAutoFit/>
-          </a:bodyPr>
-          <a:lstStyle/>
-          <a:p>
-            <a:pPr algn="l" eaLnBrk="0">
-              <a:lnSpc>
-                <a:spcPct val="120000"/>
-              </a:lnSpc>
-              <a:spcAft>
-                <a:spcPts val="600"/>
-              </a:spcAft>
-            </a:pPr>
-            <a:r>
-              <a:rPr sz="1400" b="1" lang="ko-KR" altLang="en-US">
-                <a:solidFill>
-                  <a:srgbClr val="1B2422"/>
-                </a:solidFill>
-                <a:latin typeface="맑은 고딕"/>
-                <a:ea typeface="맑은 고딕"/>
-              </a:rPr>
-              <a:t>디저트 팝업 E</a:t>
-            </a:r>
-          </a:p>
-        </p:txBody>
-      </p:sp>
-      <p:sp>
-        <p:nvSpPr>
-          <p:cNvPr id="26" name="TextBox 25"/>
-          <p:cNvSpPr txBox="1"/>
-          <p:nvPr/>
-        </p:nvSpPr>
-        <p:spPr>
-          <a:xfrm>
-            <a:off x="1188719" y="4453128"/>
-            <a:ext cx="3108960" cy="274320"/>
-          </a:xfrm>
-          <a:prstGeom prst="rect">
-            <a:avLst/>
-          </a:prstGeom>
-          <a:noFill/>
-        </p:spPr>
-        <p:txBody>
-          <a:bodyPr wrap="square" anchor="t" lIns="45720" rIns="45720">
-            <a:spAutoFit/>
-          </a:bodyPr>
-          <a:lstStyle/>
-          <a:p>
-            <a:pPr algn="l" eaLnBrk="0">
-              <a:lnSpc>
-                <a:spcPct val="120000"/>
-              </a:lnSpc>
-              <a:spcAft>
-                <a:spcPts val="600"/>
-              </a:spcAft>
-            </a:pPr>
-            <a:r>
-              <a:rPr sz="1100" b="0" lang="ko-KR" altLang="en-US">
-                <a:solidFill>
-                  <a:srgbClr val="5C6865"/>
-                </a:solidFill>
-                <a:latin typeface="맑은 고딕"/>
-                <a:ea typeface="맑은 고딕"/>
-              </a:rPr>
-              <a:t>성수 · 1만원 이하</a:t>
-            </a:r>
-          </a:p>
-        </p:txBody>
-      </p:sp>
-      <p:sp>
-        <p:nvSpPr>
-          <p:cNvPr id="27" name="Rectangle 26"/>
-          <p:cNvSpPr/>
-          <p:nvPr/>
-        </p:nvSpPr>
-        <p:spPr>
-          <a:xfrm>
-            <a:off x="3931920" y="4389120"/>
-            <a:ext cx="1371600" cy="109728"/>
-          </a:xfrm>
-          <a:prstGeom prst="rect">
-            <a:avLst/>
-          </a:prstGeom>
-          <a:solidFill>
-            <a:srgbClr val="D9DFDC"/>
-          </a:solidFill>
-          <a:ln>
-            <a:noFill/>
-          </a:ln>
-          <a:effectLst/>
-        </p:spPr>
-        <p:style>
-          <a:lnRef idx="1">
-            <a:schemeClr val="accent1"/>
-          </a:lnRef>
-          <a:fillRef idx="3">
-            <a:schemeClr val="accent1"/>
-          </a:fillRef>
-          <a:effectRef idx="2">
-            <a:schemeClr val="accent1"/>
-          </a:effectRef>
-          <a:fontRef idx="minor">
-            <a:schemeClr val="lt1"/>
-          </a:fontRef>
-        </p:style>
-        <p:txBody>
-          <a:bodyPr rtlCol="0" anchor="ctr"/>
-          <a:lstStyle/>
-          <a:p>
-            <a:pPr algn="ctr"/>
-          </a:p>
-        </p:txBody>
-      </p:sp>
-      <p:sp>
-        <p:nvSpPr>
-          <p:cNvPr id="28" name="Rectangle 27"/>
-          <p:cNvSpPr/>
-          <p:nvPr/>
-        </p:nvSpPr>
-        <p:spPr>
-          <a:xfrm>
-            <a:off x="3931920" y="4389120"/>
-            <a:ext cx="888796" cy="109728"/>
-          </a:xfrm>
-          <a:prstGeom prst="rect">
-            <a:avLst/>
-          </a:prstGeom>
-          <a:solidFill>
-            <a:srgbClr val="0D6B5F"/>
-          </a:solidFill>
-          <a:ln>
-            <a:noFill/>
-          </a:ln>
-          <a:effectLst/>
-        </p:spPr>
-        <p:style>
-          <a:lnRef idx="1">
-            <a:schemeClr val="accent1"/>
-          </a:lnRef>
-          <a:fillRef idx="3">
-            <a:schemeClr val="accent1"/>
-          </a:fillRef>
-          <a:effectRef idx="2">
-            <a:schemeClr val="accent1"/>
-          </a:effectRef>
-          <a:fontRef idx="minor">
-            <a:schemeClr val="lt1"/>
-          </a:fontRef>
-        </p:style>
-        <p:txBody>
-          <a:bodyPr rtlCol="0" anchor="ctr"/>
-          <a:lstStyle/>
-          <a:p>
-            <a:pPr algn="ctr"/>
-          </a:p>
-        </p:txBody>
-      </p:sp>
-      <p:sp>
-        <p:nvSpPr>
-          <p:cNvPr id="29" name="TextBox 28"/>
-          <p:cNvSpPr txBox="1"/>
-          <p:nvPr/>
-        </p:nvSpPr>
-        <p:spPr>
-          <a:xfrm>
-            <a:off x="5303520" y="4114800"/>
-            <a:ext cx="594360" cy="658368"/>
-          </a:xfrm>
-          <a:prstGeom prst="rect">
-            <a:avLst/>
-          </a:prstGeom>
-          <a:noFill/>
-        </p:spPr>
-        <p:txBody>
-          <a:bodyPr wrap="square" anchor="ctr" lIns="45720" rIns="45720">
-            <a:spAutoFit/>
-          </a:bodyPr>
-          <a:lstStyle/>
-          <a:p>
-            <a:pPr algn="r" eaLnBrk="0">
-              <a:lnSpc>
-                <a:spcPct val="120000"/>
-              </a:lnSpc>
-              <a:spcAft>
-                <a:spcPts val="600"/>
-              </a:spcAft>
-            </a:pPr>
-            <a:r>
-              <a:rPr sz="1300" b="0" lang="ko-KR" altLang="en-US">
-                <a:solidFill>
-                  <a:srgbClr val="1B2422"/>
-                </a:solidFill>
-                <a:latin typeface="Consolas"/>
-                <a:ea typeface="맑은 고딕"/>
-              </a:rPr>
-              <a:t>0.65</a:t>
-            </a:r>
-          </a:p>
-        </p:txBody>
-      </p:sp>
-      <p:sp>
-        <p:nvSpPr>
-          <p:cNvPr id="30" name="TextBox 29"/>
-          <p:cNvSpPr txBox="1"/>
-          <p:nvPr/>
-        </p:nvSpPr>
-        <p:spPr>
-          <a:xfrm>
-            <a:off x="6217920" y="2103120"/>
-            <a:ext cx="5303520" cy="365760"/>
-          </a:xfrm>
-          <a:prstGeom prst="rect">
-            <a:avLst/>
-          </a:prstGeom>
-          <a:noFill/>
-        </p:spPr>
-        <p:txBody>
-          <a:bodyPr wrap="square" anchor="t" lIns="45720" rIns="45720">
-            <a:spAutoFit/>
-          </a:bodyPr>
-          <a:lstStyle/>
-          <a:p>
-            <a:pPr algn="l" eaLnBrk="0">
-              <a:lnSpc>
-                <a:spcPct val="120000"/>
-              </a:lnSpc>
-              <a:spcAft>
-                <a:spcPts val="600"/>
-              </a:spcAft>
-            </a:pPr>
-            <a:r>
-              <a:rPr sz="1500" b="1" lang="ko-KR" altLang="en-US">
-                <a:solidFill>
-                  <a:srgbClr val="1B2422"/>
-                </a:solidFill>
-                <a:latin typeface="맑은 고딕"/>
-                <a:ea typeface="맑은 고딕"/>
-              </a:rPr>
-              <a:t>사용자 B  ·  관람·조용한·예술적</a:t>
-            </a:r>
-          </a:p>
-        </p:txBody>
-      </p:sp>
-      <p:sp>
-        <p:nvSpPr>
-          <p:cNvPr id="31" name="Rounded Rectangle 30"/>
-          <p:cNvSpPr/>
-          <p:nvPr/>
-        </p:nvSpPr>
-        <p:spPr>
-          <a:xfrm>
-            <a:off x="6217920" y="2560320"/>
-            <a:ext cx="5303520" cy="658368"/>
-          </a:xfrm>
-          <a:prstGeom prst="roundRect">
-            <a:avLst>
-              <a:gd name="adj" fmla="val 8000"/>
-            </a:avLst>
-          </a:prstGeom>
-          <a:solidFill>
-            <a:srgbClr val="FFFFFF"/>
-          </a:solidFill>
-          <a:ln w="12700">
-            <a:solidFill>
-              <a:srgbClr val="D9DFDC"/>
-            </a:solidFill>
-          </a:ln>
-          <a:effectLst/>
-        </p:spPr>
-        <p:style>
-          <a:lnRef idx="1">
-            <a:schemeClr val="accent1"/>
-          </a:lnRef>
-          <a:fillRef idx="3">
-            <a:schemeClr val="accent1"/>
-          </a:fillRef>
-          <a:effectRef idx="2">
-            <a:schemeClr val="accent1"/>
-          </a:effectRef>
-          <a:fontRef idx="minor">
-            <a:schemeClr val="lt1"/>
-          </a:fontRef>
-        </p:style>
-        <p:txBody>
-          <a:bodyPr rtlCol="0" anchor="ctr"/>
-          <a:lstStyle/>
-          <a:p>
-            <a:pPr algn="ctr"/>
-          </a:p>
-        </p:txBody>
-      </p:sp>
-      <p:sp>
-        <p:nvSpPr>
-          <p:cNvPr id="32" name="TextBox 31"/>
-          <p:cNvSpPr txBox="1"/>
-          <p:nvPr/>
-        </p:nvSpPr>
-        <p:spPr>
-          <a:xfrm>
-            <a:off x="6309359" y="2560320"/>
-            <a:ext cx="411480" cy="658368"/>
-          </a:xfrm>
-          <a:prstGeom prst="rect">
-            <a:avLst/>
-          </a:prstGeom>
-          <a:noFill/>
-        </p:spPr>
-        <p:txBody>
-          <a:bodyPr wrap="square" anchor="ctr" lIns="45720" rIns="45720">
-            <a:spAutoFit/>
-          </a:bodyPr>
-          <a:lstStyle/>
-          <a:p>
-            <a:pPr algn="ctr" eaLnBrk="0">
-              <a:lnSpc>
-                <a:spcPct val="120000"/>
-              </a:lnSpc>
-              <a:spcAft>
-                <a:spcPts val="600"/>
-              </a:spcAft>
-            </a:pPr>
-            <a:r>
-              <a:rPr sz="1800" b="1" lang="ko-KR" altLang="en-US">
-                <a:solidFill>
-                  <a:srgbClr val="0D6B5F"/>
-                </a:solidFill>
-                <a:latin typeface="맑은 고딕"/>
-                <a:ea typeface="맑은 고딕"/>
-              </a:rPr>
-              <a:t>1</a:t>
-            </a:r>
-          </a:p>
-        </p:txBody>
-      </p:sp>
-      <p:sp>
-        <p:nvSpPr>
-          <p:cNvPr id="33" name="TextBox 32"/>
-          <p:cNvSpPr txBox="1"/>
-          <p:nvPr/>
-        </p:nvSpPr>
-        <p:spPr>
-          <a:xfrm>
-            <a:off x="6766559" y="2596896"/>
-            <a:ext cx="3108960" cy="320040"/>
-          </a:xfrm>
-          <a:prstGeom prst="rect">
-            <a:avLst/>
-          </a:prstGeom>
-          <a:noFill/>
-        </p:spPr>
-        <p:txBody>
-          <a:bodyPr wrap="square" anchor="t" lIns="45720" rIns="45720">
-            <a:spAutoFit/>
-          </a:bodyPr>
-          <a:lstStyle/>
-          <a:p>
-            <a:pPr algn="l" eaLnBrk="0">
-              <a:lnSpc>
-                <a:spcPct val="120000"/>
-              </a:lnSpc>
-              <a:spcAft>
-                <a:spcPts val="600"/>
-              </a:spcAft>
-            </a:pPr>
-            <a:r>
-              <a:rPr sz="1400" b="1" lang="ko-KR" altLang="en-US">
-                <a:solidFill>
-                  <a:srgbClr val="1B2422"/>
-                </a:solidFill>
-                <a:latin typeface="맑은 고딕"/>
-                <a:ea typeface="맑은 고딕"/>
-              </a:rPr>
-              <a:t>미디어아트 전시 B</a:t>
-            </a:r>
-          </a:p>
-        </p:txBody>
-      </p:sp>
-      <p:sp>
-        <p:nvSpPr>
-          <p:cNvPr id="34" name="TextBox 33"/>
-          <p:cNvSpPr txBox="1"/>
-          <p:nvPr/>
-        </p:nvSpPr>
-        <p:spPr>
-          <a:xfrm>
-            <a:off x="6766559" y="2898648"/>
-            <a:ext cx="3108960" cy="274320"/>
-          </a:xfrm>
-          <a:prstGeom prst="rect">
-            <a:avLst/>
-          </a:prstGeom>
-          <a:noFill/>
-        </p:spPr>
-        <p:txBody>
-          <a:bodyPr wrap="square" anchor="t" lIns="45720" rIns="45720">
-            <a:spAutoFit/>
-          </a:bodyPr>
-          <a:lstStyle/>
-          <a:p>
-            <a:pPr algn="l" eaLnBrk="0">
-              <a:lnSpc>
-                <a:spcPct val="120000"/>
-              </a:lnSpc>
-              <a:spcAft>
-                <a:spcPts val="600"/>
-              </a:spcAft>
-            </a:pPr>
-            <a:r>
-              <a:rPr sz="1100" b="0" lang="ko-KR" altLang="en-US">
-                <a:solidFill>
-                  <a:srgbClr val="5C6865"/>
-                </a:solidFill>
-                <a:latin typeface="맑은 고딕"/>
-                <a:ea typeface="맑은 고딕"/>
-              </a:rPr>
-              <a:t>종로 · 1~3만원</a:t>
-            </a:r>
-          </a:p>
-        </p:txBody>
-      </p:sp>
-      <p:sp>
-        <p:nvSpPr>
-          <p:cNvPr id="35" name="Rectangle 34"/>
-          <p:cNvSpPr/>
-          <p:nvPr/>
-        </p:nvSpPr>
-        <p:spPr>
-          <a:xfrm>
-            <a:off x="9509760" y="2834639"/>
-            <a:ext cx="1371600" cy="109728"/>
-          </a:xfrm>
-          <a:prstGeom prst="rect">
-            <a:avLst/>
-          </a:prstGeom>
-          <a:solidFill>
-            <a:srgbClr val="D9DFDC"/>
-          </a:solidFill>
-          <a:ln>
-            <a:noFill/>
-          </a:ln>
-          <a:effectLst/>
-        </p:spPr>
-        <p:style>
-          <a:lnRef idx="1">
-            <a:schemeClr val="accent1"/>
-          </a:lnRef>
-          <a:fillRef idx="3">
-            <a:schemeClr val="accent1"/>
-          </a:fillRef>
-          <a:effectRef idx="2">
-            <a:schemeClr val="accent1"/>
-          </a:effectRef>
-          <a:fontRef idx="minor">
-            <a:schemeClr val="lt1"/>
-          </a:fontRef>
-        </p:style>
-        <p:txBody>
-          <a:bodyPr rtlCol="0" anchor="ctr"/>
-          <a:lstStyle/>
-          <a:p>
-            <a:pPr algn="ctr"/>
-          </a:p>
-        </p:txBody>
-      </p:sp>
-      <p:sp>
-        <p:nvSpPr>
-          <p:cNvPr id="36" name="Rectangle 35"/>
-          <p:cNvSpPr/>
-          <p:nvPr/>
-        </p:nvSpPr>
-        <p:spPr>
-          <a:xfrm>
-            <a:off x="9509760" y="2834639"/>
-            <a:ext cx="1268730" cy="109728"/>
-          </a:xfrm>
-          <a:prstGeom prst="rect">
-            <a:avLst/>
-          </a:prstGeom>
-          <a:solidFill>
-            <a:srgbClr val="0D6B5F"/>
-          </a:solidFill>
-          <a:ln>
-            <a:noFill/>
-          </a:ln>
-          <a:effectLst/>
-        </p:spPr>
-        <p:style>
-          <a:lnRef idx="1">
-            <a:schemeClr val="accent1"/>
-          </a:lnRef>
-          <a:fillRef idx="3">
-            <a:schemeClr val="accent1"/>
-          </a:fillRef>
-          <a:effectRef idx="2">
-            <a:schemeClr val="accent1"/>
-          </a:effectRef>
-          <a:fontRef idx="minor">
-            <a:schemeClr val="lt1"/>
-          </a:fontRef>
-        </p:style>
-        <p:txBody>
-          <a:bodyPr rtlCol="0" anchor="ctr"/>
-          <a:lstStyle/>
-          <a:p>
-            <a:pPr algn="ctr"/>
-          </a:p>
-        </p:txBody>
-      </p:sp>
-      <p:sp>
-        <p:nvSpPr>
-          <p:cNvPr id="37" name="TextBox 36"/>
-          <p:cNvSpPr txBox="1"/>
-          <p:nvPr/>
-        </p:nvSpPr>
-        <p:spPr>
-          <a:xfrm>
-            <a:off x="10881359" y="2560320"/>
-            <a:ext cx="594360" cy="658368"/>
-          </a:xfrm>
-          <a:prstGeom prst="rect">
-            <a:avLst/>
-          </a:prstGeom>
-          <a:noFill/>
-        </p:spPr>
-        <p:txBody>
-          <a:bodyPr wrap="square" anchor="ctr" lIns="45720" rIns="45720">
-            <a:spAutoFit/>
-          </a:bodyPr>
-          <a:lstStyle/>
-          <a:p>
-            <a:pPr algn="r" eaLnBrk="0">
-              <a:lnSpc>
-                <a:spcPct val="120000"/>
-              </a:lnSpc>
-              <a:spcAft>
-                <a:spcPts val="600"/>
-              </a:spcAft>
-            </a:pPr>
-            <a:r>
-              <a:rPr sz="1300" b="0" lang="ko-KR" altLang="en-US">
-                <a:solidFill>
-                  <a:srgbClr val="1B2422"/>
-                </a:solidFill>
-                <a:latin typeface="Consolas"/>
-                <a:ea typeface="맑은 고딕"/>
-              </a:rPr>
-              <a:t>0.93</a:t>
-            </a:r>
-          </a:p>
-        </p:txBody>
-      </p:sp>
-      <p:sp>
-        <p:nvSpPr>
-          <p:cNvPr id="38" name="Rounded Rectangle 37"/>
-          <p:cNvSpPr/>
-          <p:nvPr/>
-        </p:nvSpPr>
-        <p:spPr>
-          <a:xfrm>
-            <a:off x="6217920" y="3337560"/>
-            <a:ext cx="5303520" cy="658368"/>
-          </a:xfrm>
-          <a:prstGeom prst="roundRect">
-            <a:avLst>
-              <a:gd name="adj" fmla="val 8000"/>
-            </a:avLst>
-          </a:prstGeom>
-          <a:solidFill>
-            <a:srgbClr val="FFFFFF"/>
-          </a:solidFill>
-          <a:ln w="12700">
-            <a:solidFill>
-              <a:srgbClr val="D9DFDC"/>
-            </a:solidFill>
-          </a:ln>
-          <a:effectLst/>
-        </p:spPr>
-        <p:style>
-          <a:lnRef idx="1">
-            <a:schemeClr val="accent1"/>
-          </a:lnRef>
-          <a:fillRef idx="3">
-            <a:schemeClr val="accent1"/>
-          </a:fillRef>
-          <a:effectRef idx="2">
-            <a:schemeClr val="accent1"/>
-          </a:effectRef>
-          <a:fontRef idx="minor">
-            <a:schemeClr val="lt1"/>
-          </a:fontRef>
-        </p:style>
-        <p:txBody>
-          <a:bodyPr rtlCol="0" anchor="ctr"/>
-          <a:lstStyle/>
-          <a:p>
-            <a:pPr algn="ctr"/>
-          </a:p>
-        </p:txBody>
-      </p:sp>
-      <p:sp>
-        <p:nvSpPr>
-          <p:cNvPr id="39" name="TextBox 38"/>
-          <p:cNvSpPr txBox="1"/>
-          <p:nvPr/>
-        </p:nvSpPr>
-        <p:spPr>
-          <a:xfrm>
-            <a:off x="6309359" y="3337560"/>
-            <a:ext cx="411480" cy="658368"/>
-          </a:xfrm>
-          <a:prstGeom prst="rect">
-            <a:avLst/>
-          </a:prstGeom>
-          <a:noFill/>
-        </p:spPr>
-        <p:txBody>
-          <a:bodyPr wrap="square" anchor="ctr" lIns="45720" rIns="45720">
-            <a:spAutoFit/>
-          </a:bodyPr>
-          <a:lstStyle/>
-          <a:p>
-            <a:pPr algn="ctr" eaLnBrk="0">
-              <a:lnSpc>
-                <a:spcPct val="120000"/>
-              </a:lnSpc>
-              <a:spcAft>
-                <a:spcPts val="600"/>
-              </a:spcAft>
-            </a:pPr>
-            <a:r>
-              <a:rPr sz="1800" b="1" lang="ko-KR" altLang="en-US">
-                <a:solidFill>
-                  <a:srgbClr val="0D6B5F"/>
-                </a:solidFill>
-                <a:latin typeface="맑은 고딕"/>
-                <a:ea typeface="맑은 고딕"/>
-              </a:rPr>
-              <a:t>2</a:t>
-            </a:r>
-          </a:p>
-        </p:txBody>
-      </p:sp>
-      <p:sp>
-        <p:nvSpPr>
-          <p:cNvPr id="40" name="TextBox 39"/>
-          <p:cNvSpPr txBox="1"/>
-          <p:nvPr/>
-        </p:nvSpPr>
-        <p:spPr>
-          <a:xfrm>
-            <a:off x="6766559" y="3374136"/>
-            <a:ext cx="3108960" cy="320040"/>
-          </a:xfrm>
-          <a:prstGeom prst="rect">
-            <a:avLst/>
-          </a:prstGeom>
-          <a:noFill/>
-        </p:spPr>
-        <p:txBody>
-          <a:bodyPr wrap="square" anchor="t" lIns="45720" rIns="45720">
-            <a:spAutoFit/>
-          </a:bodyPr>
-          <a:lstStyle/>
-          <a:p>
-            <a:pPr algn="l" eaLnBrk="0">
-              <a:lnSpc>
-                <a:spcPct val="120000"/>
-              </a:lnSpc>
-              <a:spcAft>
-                <a:spcPts val="600"/>
-              </a:spcAft>
-            </a:pPr>
-            <a:r>
-              <a:rPr sz="1400" b="1" lang="ko-KR" altLang="en-US">
-                <a:solidFill>
-                  <a:srgbClr val="1B2422"/>
-                </a:solidFill>
-                <a:latin typeface="맑은 고딕"/>
-                <a:ea typeface="맑은 고딕"/>
-              </a:rPr>
-              <a:t>사진전 F</a:t>
-            </a:r>
-          </a:p>
-        </p:txBody>
-      </p:sp>
-      <p:sp>
-        <p:nvSpPr>
-          <p:cNvPr id="41" name="TextBox 40"/>
-          <p:cNvSpPr txBox="1"/>
-          <p:nvPr/>
-        </p:nvSpPr>
-        <p:spPr>
-          <a:xfrm>
-            <a:off x="6766559" y="3675887"/>
-            <a:ext cx="3108960" cy="274320"/>
-          </a:xfrm>
-          <a:prstGeom prst="rect">
-            <a:avLst/>
-          </a:prstGeom>
-          <a:noFill/>
-        </p:spPr>
-        <p:txBody>
-          <a:bodyPr wrap="square" anchor="t" lIns="45720" rIns="45720">
-            <a:spAutoFit/>
-          </a:bodyPr>
-          <a:lstStyle/>
-          <a:p>
-            <a:pPr algn="l" eaLnBrk="0">
-              <a:lnSpc>
-                <a:spcPct val="120000"/>
-              </a:lnSpc>
-              <a:spcAft>
-                <a:spcPts val="600"/>
-              </a:spcAft>
-            </a:pPr>
-            <a:r>
-              <a:rPr sz="1100" b="0" lang="ko-KR" altLang="en-US">
-                <a:solidFill>
-                  <a:srgbClr val="5C6865"/>
-                </a:solidFill>
-                <a:latin typeface="맑은 고딕"/>
-                <a:ea typeface="맑은 고딕"/>
-              </a:rPr>
-              <a:t>용산 · 1만원 이하</a:t>
-            </a:r>
-          </a:p>
-        </p:txBody>
-      </p:sp>
-      <p:sp>
-        <p:nvSpPr>
-          <p:cNvPr id="42" name="Rectangle 41"/>
-          <p:cNvSpPr/>
-          <p:nvPr/>
-        </p:nvSpPr>
-        <p:spPr>
-          <a:xfrm>
-            <a:off x="9509760" y="3611879"/>
-            <a:ext cx="1371600" cy="109728"/>
-          </a:xfrm>
-          <a:prstGeom prst="rect">
-            <a:avLst/>
-          </a:prstGeom>
-          <a:solidFill>
-            <a:srgbClr val="D9DFDC"/>
-          </a:solidFill>
-          <a:ln>
-            <a:noFill/>
-          </a:ln>
-          <a:effectLst/>
-        </p:spPr>
-        <p:style>
-          <a:lnRef idx="1">
-            <a:schemeClr val="accent1"/>
-          </a:lnRef>
-          <a:fillRef idx="3">
-            <a:schemeClr val="accent1"/>
-          </a:fillRef>
-          <a:effectRef idx="2">
-            <a:schemeClr val="accent1"/>
-          </a:effectRef>
-          <a:fontRef idx="minor">
-            <a:schemeClr val="lt1"/>
-          </a:fontRef>
-        </p:style>
-        <p:txBody>
-          <a:bodyPr rtlCol="0" anchor="ctr"/>
-          <a:lstStyle/>
-          <a:p>
-            <a:pPr algn="ctr"/>
-          </a:p>
-        </p:txBody>
-      </p:sp>
-      <p:sp>
-        <p:nvSpPr>
-          <p:cNvPr id="43" name="Rectangle 42"/>
-          <p:cNvSpPr/>
-          <p:nvPr/>
-        </p:nvSpPr>
-        <p:spPr>
-          <a:xfrm>
-            <a:off x="9509760" y="3611879"/>
-            <a:ext cx="1094536" cy="109728"/>
-          </a:xfrm>
-          <a:prstGeom prst="rect">
-            <a:avLst/>
-          </a:prstGeom>
-          <a:solidFill>
-            <a:srgbClr val="0D6B5F"/>
-          </a:solidFill>
-          <a:ln>
-            <a:noFill/>
-          </a:ln>
-          <a:effectLst/>
-        </p:spPr>
-        <p:style>
-          <a:lnRef idx="1">
-            <a:schemeClr val="accent1"/>
-          </a:lnRef>
-          <a:fillRef idx="3">
-            <a:schemeClr val="accent1"/>
-          </a:fillRef>
-          <a:effectRef idx="2">
-            <a:schemeClr val="accent1"/>
-          </a:effectRef>
-          <a:fontRef idx="minor">
-            <a:schemeClr val="lt1"/>
-          </a:fontRef>
-        </p:style>
-        <p:txBody>
-          <a:bodyPr rtlCol="0" anchor="ctr"/>
-          <a:lstStyle/>
-          <a:p>
-            <a:pPr algn="ctr"/>
-          </a:p>
-        </p:txBody>
-      </p:sp>
-      <p:sp>
-        <p:nvSpPr>
-          <p:cNvPr id="44" name="TextBox 43"/>
-          <p:cNvSpPr txBox="1"/>
-          <p:nvPr/>
-        </p:nvSpPr>
-        <p:spPr>
-          <a:xfrm>
-            <a:off x="10881359" y="3337560"/>
-            <a:ext cx="594360" cy="658368"/>
-          </a:xfrm>
-          <a:prstGeom prst="rect">
-            <a:avLst/>
-          </a:prstGeom>
-          <a:noFill/>
-        </p:spPr>
-        <p:txBody>
-          <a:bodyPr wrap="square" anchor="ctr" lIns="45720" rIns="45720">
-            <a:spAutoFit/>
-          </a:bodyPr>
-          <a:lstStyle/>
-          <a:p>
-            <a:pPr algn="r" eaLnBrk="0">
-              <a:lnSpc>
-                <a:spcPct val="120000"/>
-              </a:lnSpc>
-              <a:spcAft>
-                <a:spcPts val="600"/>
-              </a:spcAft>
-            </a:pPr>
-            <a:r>
-              <a:rPr sz="1300" b="0" lang="ko-KR" altLang="en-US">
-                <a:solidFill>
-                  <a:srgbClr val="1B2422"/>
-                </a:solidFill>
-                <a:latin typeface="Consolas"/>
-                <a:ea typeface="맑은 고딕"/>
-              </a:rPr>
-              <a:t>0.80</a:t>
-            </a:r>
-          </a:p>
-        </p:txBody>
-      </p:sp>
-      <p:sp>
-        <p:nvSpPr>
-          <p:cNvPr id="45" name="Rounded Rectangle 44"/>
-          <p:cNvSpPr/>
-          <p:nvPr/>
-        </p:nvSpPr>
-        <p:spPr>
-          <a:xfrm>
-            <a:off x="6217920" y="4114800"/>
-            <a:ext cx="5303520" cy="658368"/>
-          </a:xfrm>
-          <a:prstGeom prst="roundRect">
-            <a:avLst>
-              <a:gd name="adj" fmla="val 8000"/>
-            </a:avLst>
-          </a:prstGeom>
-          <a:solidFill>
-            <a:srgbClr val="FFFFFF"/>
-          </a:solidFill>
-          <a:ln w="12700">
-            <a:solidFill>
-              <a:srgbClr val="D9DFDC"/>
-            </a:solidFill>
-          </a:ln>
-          <a:effectLst/>
-        </p:spPr>
-        <p:style>
-          <a:lnRef idx="1">
-            <a:schemeClr val="accent1"/>
-          </a:lnRef>
-          <a:fillRef idx="3">
-            <a:schemeClr val="accent1"/>
-          </a:fillRef>
-          <a:effectRef idx="2">
-            <a:schemeClr val="accent1"/>
-          </a:effectRef>
-          <a:fontRef idx="minor">
-            <a:schemeClr val="lt1"/>
-          </a:fontRef>
-        </p:style>
-        <p:txBody>
-          <a:bodyPr rtlCol="0" anchor="ctr"/>
-          <a:lstStyle/>
-          <a:p>
-            <a:pPr algn="ctr"/>
-          </a:p>
-        </p:txBody>
-      </p:sp>
-      <p:sp>
-        <p:nvSpPr>
-          <p:cNvPr id="46" name="TextBox 45"/>
-          <p:cNvSpPr txBox="1"/>
-          <p:nvPr/>
-        </p:nvSpPr>
-        <p:spPr>
-          <a:xfrm>
-            <a:off x="6309359" y="4114800"/>
-            <a:ext cx="411480" cy="658368"/>
-          </a:xfrm>
-          <a:prstGeom prst="rect">
-            <a:avLst/>
-          </a:prstGeom>
-          <a:noFill/>
-        </p:spPr>
-        <p:txBody>
-          <a:bodyPr wrap="square" anchor="ctr" lIns="45720" rIns="45720">
-            <a:spAutoFit/>
-          </a:bodyPr>
-          <a:lstStyle/>
-          <a:p>
-            <a:pPr algn="ctr" eaLnBrk="0">
-              <a:lnSpc>
-                <a:spcPct val="120000"/>
-              </a:lnSpc>
-              <a:spcAft>
-                <a:spcPts val="600"/>
-              </a:spcAft>
-            </a:pPr>
-            <a:r>
-              <a:rPr sz="1800" b="1" lang="ko-KR" altLang="en-US">
-                <a:solidFill>
-                  <a:srgbClr val="0D6B5F"/>
-                </a:solidFill>
-                <a:latin typeface="맑은 고딕"/>
-                <a:ea typeface="맑은 고딕"/>
-              </a:rPr>
-              <a:t>3</a:t>
-            </a:r>
-          </a:p>
-        </p:txBody>
-      </p:sp>
-      <p:sp>
-        <p:nvSpPr>
-          <p:cNvPr id="47" name="TextBox 46"/>
-          <p:cNvSpPr txBox="1"/>
-          <p:nvPr/>
-        </p:nvSpPr>
-        <p:spPr>
-          <a:xfrm>
-            <a:off x="6766559" y="4151376"/>
-            <a:ext cx="3108960" cy="320040"/>
-          </a:xfrm>
-          <a:prstGeom prst="rect">
-            <a:avLst/>
-          </a:prstGeom>
-          <a:noFill/>
-        </p:spPr>
-        <p:txBody>
-          <a:bodyPr wrap="square" anchor="t" lIns="45720" rIns="45720">
-            <a:spAutoFit/>
-          </a:bodyPr>
-          <a:lstStyle/>
-          <a:p>
-            <a:pPr algn="l" eaLnBrk="0">
-              <a:lnSpc>
-                <a:spcPct val="120000"/>
-              </a:lnSpc>
-              <a:spcAft>
-                <a:spcPts val="600"/>
-              </a:spcAft>
-            </a:pPr>
-            <a:r>
-              <a:rPr sz="1400" b="1" lang="ko-KR" altLang="en-US">
-                <a:solidFill>
-                  <a:srgbClr val="1B2422"/>
-                </a:solidFill>
-                <a:latin typeface="맑은 고딕"/>
-                <a:ea typeface="맑은 고딕"/>
-              </a:rPr>
-              <a:t>북카페 D</a:t>
-            </a:r>
-          </a:p>
-        </p:txBody>
-      </p:sp>
-      <p:sp>
-        <p:nvSpPr>
-          <p:cNvPr id="48" name="TextBox 47"/>
-          <p:cNvSpPr txBox="1"/>
-          <p:nvPr/>
-        </p:nvSpPr>
-        <p:spPr>
-          <a:xfrm>
-            <a:off x="6766559" y="4453128"/>
-            <a:ext cx="3108960" cy="274320"/>
-          </a:xfrm>
-          <a:prstGeom prst="rect">
-            <a:avLst/>
-          </a:prstGeom>
-          <a:noFill/>
-        </p:spPr>
-        <p:txBody>
-          <a:bodyPr wrap="square" anchor="t" lIns="45720" rIns="45720">
-            <a:spAutoFit/>
-          </a:bodyPr>
-          <a:lstStyle/>
-          <a:p>
-            <a:pPr algn="l" eaLnBrk="0">
-              <a:lnSpc>
-                <a:spcPct val="120000"/>
-              </a:lnSpc>
-              <a:spcAft>
-                <a:spcPts val="600"/>
-              </a:spcAft>
-            </a:pPr>
-            <a:r>
-              <a:rPr sz="1100" b="0" lang="ko-KR" altLang="en-US">
-                <a:solidFill>
-                  <a:srgbClr val="5C6865"/>
-                </a:solidFill>
-                <a:latin typeface="맑은 고딕"/>
-                <a:ea typeface="맑은 고딕"/>
-              </a:rPr>
-              <a:t>종로 · 1만원 이하</a:t>
-            </a:r>
-          </a:p>
-        </p:txBody>
-      </p:sp>
-      <p:sp>
-        <p:nvSpPr>
-          <p:cNvPr id="49" name="Rectangle 48"/>
-          <p:cNvSpPr/>
-          <p:nvPr/>
-        </p:nvSpPr>
-        <p:spPr>
-          <a:xfrm>
-            <a:off x="9509760" y="4389120"/>
-            <a:ext cx="1371600" cy="109728"/>
-          </a:xfrm>
-          <a:prstGeom prst="rect">
-            <a:avLst/>
-          </a:prstGeom>
-          <a:solidFill>
-            <a:srgbClr val="D9DFDC"/>
-          </a:solidFill>
-          <a:ln>
-            <a:noFill/>
-          </a:ln>
-          <a:effectLst/>
-        </p:spPr>
-        <p:style>
-          <a:lnRef idx="1">
-            <a:schemeClr val="accent1"/>
-          </a:lnRef>
-          <a:fillRef idx="3">
-            <a:schemeClr val="accent1"/>
-          </a:fillRef>
-          <a:effectRef idx="2">
-            <a:schemeClr val="accent1"/>
-          </a:effectRef>
-          <a:fontRef idx="minor">
-            <a:schemeClr val="lt1"/>
-          </a:fontRef>
-        </p:style>
-        <p:txBody>
-          <a:bodyPr rtlCol="0" anchor="ctr"/>
-          <a:lstStyle/>
-          <a:p>
-            <a:pPr algn="ctr"/>
-          </a:p>
-        </p:txBody>
-      </p:sp>
-      <p:sp>
-        <p:nvSpPr>
-          <p:cNvPr id="50" name="Rectangle 49"/>
-          <p:cNvSpPr/>
-          <p:nvPr/>
-        </p:nvSpPr>
-        <p:spPr>
-          <a:xfrm>
-            <a:off x="9509760" y="4389120"/>
-            <a:ext cx="529437" cy="109728"/>
-          </a:xfrm>
-          <a:prstGeom prst="rect">
-            <a:avLst/>
-          </a:prstGeom>
-          <a:solidFill>
-            <a:srgbClr val="0D6B5F"/>
-          </a:solidFill>
-          <a:ln>
-            <a:noFill/>
-          </a:ln>
-          <a:effectLst/>
-        </p:spPr>
-        <p:style>
-          <a:lnRef idx="1">
-            <a:schemeClr val="accent1"/>
-          </a:lnRef>
-          <a:fillRef idx="3">
-            <a:schemeClr val="accent1"/>
-          </a:fillRef>
-          <a:effectRef idx="2">
-            <a:schemeClr val="accent1"/>
-          </a:effectRef>
-          <a:fontRef idx="minor">
-            <a:schemeClr val="lt1"/>
-          </a:fontRef>
-        </p:style>
-        <p:txBody>
-          <a:bodyPr rtlCol="0" anchor="ctr"/>
-          <a:lstStyle/>
-          <a:p>
-            <a:pPr algn="ctr"/>
-          </a:p>
-        </p:txBody>
-      </p:sp>
-      <p:sp>
-        <p:nvSpPr>
-          <p:cNvPr id="51" name="TextBox 50"/>
-          <p:cNvSpPr txBox="1"/>
-          <p:nvPr/>
-        </p:nvSpPr>
-        <p:spPr>
-          <a:xfrm>
-            <a:off x="10881359" y="4114800"/>
-            <a:ext cx="594360" cy="658368"/>
-          </a:xfrm>
-          <a:prstGeom prst="rect">
-            <a:avLst/>
-          </a:prstGeom>
-          <a:noFill/>
-        </p:spPr>
-        <p:txBody>
-          <a:bodyPr wrap="square" anchor="ctr" lIns="45720" rIns="45720">
-            <a:spAutoFit/>
-          </a:bodyPr>
-          <a:lstStyle/>
-          <a:p>
-            <a:pPr algn="r" eaLnBrk="0">
-              <a:lnSpc>
-                <a:spcPct val="120000"/>
-              </a:lnSpc>
-              <a:spcAft>
-                <a:spcPts val="600"/>
-              </a:spcAft>
-            </a:pPr>
-            <a:r>
-              <a:rPr sz="1300" b="0" lang="ko-KR" altLang="en-US">
-                <a:solidFill>
-                  <a:srgbClr val="1B2422"/>
-                </a:solidFill>
-                <a:latin typeface="Consolas"/>
-                <a:ea typeface="맑은 고딕"/>
-              </a:rPr>
-              <a:t>0.39</a:t>
-            </a:r>
-          </a:p>
-        </p:txBody>
-      </p:sp>
-      <p:sp>
-        <p:nvSpPr>
-          <p:cNvPr id="52" name="Rounded Rectangle 51"/>
-          <p:cNvSpPr/>
-          <p:nvPr/>
-        </p:nvSpPr>
-        <p:spPr>
-          <a:xfrm>
-            <a:off x="640080" y="4983480"/>
-            <a:ext cx="10881360" cy="1143000"/>
-          </a:xfrm>
-          <a:prstGeom prst="roundRect">
-            <a:avLst>
-              <a:gd name="adj" fmla="val 8000"/>
-            </a:avLst>
-          </a:prstGeom>
-          <a:solidFill>
-            <a:srgbClr val="FFFFFF"/>
-          </a:solidFill>
-          <a:ln w="12700">
-            <a:solidFill>
-              <a:srgbClr val="D9DFDC"/>
-            </a:solidFill>
-          </a:ln>
-          <a:effectLst/>
-        </p:spPr>
-        <p:style>
-          <a:lnRef idx="1">
-            <a:schemeClr val="accent1"/>
-          </a:lnRef>
-          <a:fillRef idx="3">
-            <a:schemeClr val="accent1"/>
-          </a:fillRef>
-          <a:effectRef idx="2">
-            <a:schemeClr val="accent1"/>
-          </a:effectRef>
-          <a:fontRef idx="minor">
-            <a:schemeClr val="lt1"/>
-          </a:fontRef>
-        </p:style>
-        <p:txBody>
-          <a:bodyPr rtlCol="0" anchor="ctr"/>
-          <a:lstStyle/>
-          <a:p>
-            <a:pPr algn="ctr"/>
-          </a:p>
-        </p:txBody>
-      </p:sp>
-      <p:sp>
-        <p:nvSpPr>
-          <p:cNvPr id="53" name="TextBox 52"/>
-          <p:cNvSpPr txBox="1"/>
-          <p:nvPr/>
-        </p:nvSpPr>
-        <p:spPr>
-          <a:xfrm>
-            <a:off x="868680" y="5074920"/>
-            <a:ext cx="5943600" cy="1005840"/>
-          </a:xfrm>
-          <a:prstGeom prst="rect">
-            <a:avLst/>
-          </a:prstGeom>
-          <a:noFill/>
-        </p:spPr>
-        <p:txBody>
-          <a:bodyPr wrap="square" anchor="t" lIns="45720" rIns="45720">
-            <a:spAutoFit/>
-          </a:bodyPr>
-          <a:lstStyle/>
-          <a:p>
-            <a:pPr algn="l" eaLnBrk="0">
-              <a:lnSpc>
-                <a:spcPct val="110000"/>
-              </a:lnSpc>
-              <a:spcAft>
-                <a:spcPts val="600"/>
-              </a:spcAft>
-            </a:pPr>
-            <a:r>
-              <a:rPr sz="1300" b="1" lang="ko-KR" altLang="en-US">
-                <a:solidFill>
-                  <a:srgbClr val="B4462F"/>
-                </a:solidFill>
-                <a:latin typeface="맑은 고딕"/>
-                <a:ea typeface="맑은 고딕"/>
-              </a:rPr>
-              <a:t>자동으로 제외된 곳</a:t>
-            </a:r>
-          </a:p>
-          <a:p>
-            <a:pPr algn="l" eaLnBrk="0">
-              <a:lnSpc>
-                <a:spcPct val="110000"/>
-              </a:lnSpc>
-              <a:spcAft>
-                <a:spcPts val="600"/>
-              </a:spcAft>
-            </a:pPr>
-            <a:r>
-              <a:rPr sz="1300" b="0" lang="ko-KR" altLang="en-US">
-                <a:solidFill>
-                  <a:srgbClr val="1B2422"/>
-                </a:solidFill>
-                <a:latin typeface="맑은 고딕"/>
-                <a:ea typeface="맑은 고딕"/>
-              </a:rPr>
-              <a:t>종료된 팝업 G  →  운영 종료</a:t>
-            </a:r>
-          </a:p>
-          <a:p>
-            <a:pPr algn="l" eaLnBrk="0">
-              <a:lnSpc>
-                <a:spcPct val="110000"/>
-              </a:lnSpc>
-              <a:spcAft>
-                <a:spcPts val="600"/>
-              </a:spcAft>
-            </a:pPr>
-            <a:r>
-              <a:rPr sz="1300" b="0" lang="ko-KR" altLang="en-US">
-                <a:solidFill>
-                  <a:srgbClr val="1B2422"/>
-                </a:solidFill>
-                <a:latin typeface="맑은 고딕"/>
-                <a:ea typeface="맑은 고딕"/>
-              </a:rPr>
-              <a:t>향수 브랜드 팝업 H  →  방문일에 아직 시작 전 (11/5 시작)</a:t>
-            </a:r>
-          </a:p>
-        </p:txBody>
-      </p:sp>
-      <p:sp>
-        <p:nvSpPr>
-          <p:cNvPr id="54" name="TextBox 53"/>
-          <p:cNvSpPr txBox="1"/>
-          <p:nvPr/>
-        </p:nvSpPr>
-        <p:spPr>
-          <a:xfrm>
-            <a:off x="6766560" y="5074920"/>
-            <a:ext cx="4572000" cy="1005840"/>
-          </a:xfrm>
-          <a:prstGeom prst="rect">
-            <a:avLst/>
-          </a:prstGeom>
-          <a:noFill/>
-        </p:spPr>
-        <p:txBody>
-          <a:bodyPr wrap="square" anchor="t" lIns="45720" rIns="45720">
-            <a:spAutoFit/>
-          </a:bodyPr>
-          <a:lstStyle/>
-          <a:p>
-            <a:pPr algn="l" eaLnBrk="0">
-              <a:lnSpc>
-                <a:spcPct val="110000"/>
-              </a:lnSpc>
-              <a:spcAft>
-                <a:spcPts val="600"/>
-              </a:spcAft>
-            </a:pPr>
-            <a:r>
-              <a:rPr sz="1300" b="1" lang="ko-KR" altLang="en-US">
-                <a:solidFill>
-                  <a:srgbClr val="0D6B5F"/>
-                </a:solidFill>
-                <a:latin typeface="맑은 고딕"/>
-                <a:ea typeface="맑은 고딕"/>
-              </a:rPr>
-              <a:t>점수 계산식</a:t>
-            </a:r>
-          </a:p>
-          <a:p>
-            <a:pPr algn="l" eaLnBrk="0">
-              <a:lnSpc>
-                <a:spcPct val="110000"/>
-              </a:lnSpc>
-              <a:spcAft>
-                <a:spcPts val="600"/>
-              </a:spcAft>
-            </a:pPr>
-            <a:r>
-              <a:rPr sz="1300" b="0" lang="ko-KR" altLang="en-US">
-                <a:solidFill>
-                  <a:srgbClr val="1B2422"/>
-                </a:solidFill>
-                <a:latin typeface="맑은 고딕"/>
-                <a:ea typeface="맑은 고딕"/>
-              </a:rPr>
-              <a:t>0.4 × 활동 일치 + 0.3 × 분위기 일치
-+ 0.15 × 종류 선호 + 0.15 × 가격 적합도</a:t>
+              <a:t>ChatGPT 실행 화면 캡처를 여기에 넣기</a:t>
             </a:r>
           </a:p>
         </p:txBody>
@@ -9656,7 +9387,7 @@
           </a:bodyPr>
           <a:lstStyle/>
           <a:p>
-            <a:pPr algn="l" eaLnBrk="0">
+            <a:pPr algn="l">
               <a:lnSpc>
                 <a:spcPct val="120000"/>
               </a:lnSpc>
@@ -9672,7 +9403,7 @@
                 <a:latin typeface="맑은 고딕"/>
                 <a:ea typeface="맑은 고딕"/>
               </a:rPr>
-              <a:t>AI 사용 실 사례 ③</a:t>
+              <a:t>기획 발전 과정</a:t>
             </a:r>
           </a:p>
         </p:txBody>
@@ -9699,7 +9430,7 @@
           </a:bodyPr>
           <a:lstStyle/>
           <a:p>
-            <a:pPr algn="l" eaLnBrk="0">
+            <a:pPr algn="l">
               <a:lnSpc>
                 <a:spcPct val="120000"/>
               </a:lnSpc>
@@ -9715,7 +9446,7 @@
                 <a:latin typeface="맑은 고딕"/>
                 <a:ea typeface="맑은 고딕"/>
               </a:rPr>
-              <a:t>추천 이유 만들기 (AI ③)</a:t>
+              <a:t>더 간단하게, 비용은 0원으로</a:t>
             </a:r>
           </a:p>
         </p:txBody>
@@ -9786,7 +9517,7 @@
           </a:bodyPr>
           <a:lstStyle/>
           <a:p>
-            <a:pPr algn="l" eaLnBrk="0">
+            <a:pPr algn="l">
               <a:lnSpc>
                 <a:spcPct val="120000"/>
               </a:lnSpc>
@@ -9829,7 +9560,7 @@
           </a:bodyPr>
           <a:lstStyle/>
           <a:p>
-            <a:pPr algn="r" eaLnBrk="0">
+            <a:pPr algn="r">
               <a:lnSpc>
                 <a:spcPct val="120000"/>
               </a:lnSpc>
@@ -9845,21 +9576,474 @@
                 <a:latin typeface="맑은 고딕"/>
                 <a:ea typeface="맑은 고딕"/>
               </a:rPr>
-              <a:t>7 / 10</a:t>
-            </a:r>
-          </a:p>
-        </p:txBody>
-      </p:sp>
-      <p:sp>
-        <p:nvSpPr>
-          <p:cNvPr id="7" name="TextBox 6"/>
+              <a:t>7 / 9</a:t>
+            </a:r>
+          </a:p>
+        </p:txBody>
+      </p:sp>
+      <p:graphicFrame>
+        <p:nvGraphicFramePr>
+          <p:cNvPr id="7" name="Table 6"/>
+          <p:cNvGraphicFramePr>
+            <a:graphicFrameLocks noGrp="1"/>
+          </p:cNvGraphicFramePr>
+          <p:nvPr/>
+        </p:nvGraphicFramePr>
+        <p:xfrm>
+          <a:off x="640080" y="1828800"/>
+          <a:ext cx="10881360" cy="3401568"/>
+        </p:xfrm>
+        <a:graphic>
+          <a:graphicData uri="http://schemas.openxmlformats.org/drawingml/2006/table">
+            <a:tbl>
+              <a:tblPr firstRow="1" bandRow="1">
+                <a:tableStyleId>{5C22544A-7EE6-4342-B048-85BDC9FD1C3A}</a:tableStyleId>
+              </a:tblPr>
+              <a:tblGrid>
+                <a:gridCol w="1828800"/>
+                <a:gridCol w="4389120"/>
+                <a:gridCol w="4663440"/>
+              </a:tblGrid>
+              <a:tr h="566928">
+                <a:tc>
+                  <a:txBody>
+                    <a:bodyPr wrap="square"/>
+                    <a:lstStyle/>
+                    <a:p>
+                      <a:r>
+                        <a:rPr sz="1300" b="1" lang="ko-KR" altLang="en-US">
+                          <a:solidFill>
+                            <a:srgbClr val="FFFFFF"/>
+                          </a:solidFill>
+                          <a:latin typeface="맑은 고딕"/>
+                          <a:ea typeface="맑은 고딕"/>
+                        </a:rPr>
+                        <a:t/>
+                      </a:r>
+                    </a:p>
+                  </a:txBody>
+                  <a:tcPr marL="109728" marR="109728" anchor="ctr">
+                    <a:solidFill>
+                      <a:srgbClr val="0D6B5F"/>
+                    </a:solidFill>
+                  </a:tcPr>
+                </a:tc>
+                <a:tc>
+                  <a:txBody>
+                    <a:bodyPr wrap="square"/>
+                    <a:lstStyle/>
+                    <a:p>
+                      <a:r>
+                        <a:rPr sz="1300" b="1" lang="ko-KR" altLang="en-US">
+                          <a:solidFill>
+                            <a:srgbClr val="FFFFFF"/>
+                          </a:solidFill>
+                          <a:latin typeface="맑은 고딕"/>
+                          <a:ea typeface="맑은 고딕"/>
+                        </a:rPr>
+                        <a:t>처음 계획</a:t>
+                      </a:r>
+                    </a:p>
+                  </a:txBody>
+                  <a:tcPr marL="109728" marR="109728" anchor="ctr">
+                    <a:solidFill>
+                      <a:srgbClr val="0D6B5F"/>
+                    </a:solidFill>
+                  </a:tcPr>
+                </a:tc>
+                <a:tc>
+                  <a:txBody>
+                    <a:bodyPr wrap="square"/>
+                    <a:lstStyle/>
+                    <a:p>
+                      <a:r>
+                        <a:rPr sz="1300" b="1" lang="ko-KR" altLang="en-US">
+                          <a:solidFill>
+                            <a:srgbClr val="FFFFFF"/>
+                          </a:solidFill>
+                          <a:latin typeface="맑은 고딕"/>
+                          <a:ea typeface="맑은 고딕"/>
+                        </a:rPr>
+                        <a:t>바꾼 계획</a:t>
+                      </a:r>
+                    </a:p>
+                  </a:txBody>
+                  <a:tcPr marL="109728" marR="109728" anchor="ctr">
+                    <a:solidFill>
+                      <a:srgbClr val="0D6B5F"/>
+                    </a:solidFill>
+                  </a:tcPr>
+                </a:tc>
+              </a:tr>
+              <a:tr h="566928">
+                <a:tc>
+                  <a:txBody>
+                    <a:bodyPr wrap="square"/>
+                    <a:lstStyle/>
+                    <a:p>
+                      <a:r>
+                        <a:rPr sz="1400" b="1" lang="ko-KR" altLang="en-US">
+                          <a:solidFill>
+                            <a:srgbClr val="0D6B5F"/>
+                          </a:solidFill>
+                          <a:latin typeface="맑은 고딕"/>
+                          <a:ea typeface="맑은 고딕"/>
+                        </a:rPr>
+                        <a:t>취향 입력</a:t>
+                      </a:r>
+                    </a:p>
+                  </a:txBody>
+                  <a:tcPr marL="109728" marR="109728" anchor="ctr">
+                    <a:solidFill>
+                      <a:srgbClr val="FFFFFF"/>
+                    </a:solidFill>
+                  </a:tcPr>
+                </a:tc>
+                <a:tc>
+                  <a:txBody>
+                    <a:bodyPr wrap="square"/>
+                    <a:lstStyle/>
+                    <a:p>
+                      <a:r>
+                        <a:rPr sz="1400" b="0" lang="ko-KR" altLang="en-US">
+                          <a:solidFill>
+                            <a:srgbClr val="1B2422"/>
+                          </a:solidFill>
+                          <a:latin typeface="맑은 고딕"/>
+                          <a:ea typeface="맑은 고딕"/>
+                        </a:rPr>
+                        <a:t>취향 질문지 여러 개에 답하기</a:t>
+                      </a:r>
+                    </a:p>
+                  </a:txBody>
+                  <a:tcPr marL="109728" marR="109728" anchor="ctr">
+                    <a:solidFill>
+                      <a:srgbClr val="FFFFFF"/>
+                    </a:solidFill>
+                  </a:tcPr>
+                </a:tc>
+                <a:tc>
+                  <a:txBody>
+                    <a:bodyPr wrap="square"/>
+                    <a:lstStyle/>
+                    <a:p>
+                      <a:r>
+                        <a:rPr sz="1400" b="0" lang="ko-KR" altLang="en-US">
+                          <a:solidFill>
+                            <a:srgbClr val="1B2422"/>
+                          </a:solidFill>
+                          <a:latin typeface="맑은 고딕"/>
+                          <a:ea typeface="맑은 고딕"/>
+                        </a:rPr>
+                        <a:t>문장 하나로 기분·취향 말하기</a:t>
+                      </a:r>
+                    </a:p>
+                  </a:txBody>
+                  <a:tcPr marL="109728" marR="109728" anchor="ctr">
+                    <a:solidFill>
+                      <a:srgbClr val="FFFFFF"/>
+                    </a:solidFill>
+                  </a:tcPr>
+                </a:tc>
+              </a:tr>
+              <a:tr h="566928">
+                <a:tc>
+                  <a:txBody>
+                    <a:bodyPr wrap="square"/>
+                    <a:lstStyle/>
+                    <a:p>
+                      <a:r>
+                        <a:rPr sz="1400" b="1" lang="ko-KR" altLang="en-US">
+                          <a:solidFill>
+                            <a:srgbClr val="0D6B5F"/>
+                          </a:solidFill>
+                          <a:latin typeface="맑은 고딕"/>
+                          <a:ea typeface="맑은 고딕"/>
+                        </a:rPr>
+                        <a:t>취향 비교</a:t>
+                      </a:r>
+                    </a:p>
+                  </a:txBody>
+                  <a:tcPr marL="109728" marR="109728" anchor="ctr">
+                    <a:solidFill>
+                      <a:srgbClr val="F6F7F5"/>
+                    </a:solidFill>
+                  </a:tcPr>
+                </a:tc>
+                <a:tc>
+                  <a:txBody>
+                    <a:bodyPr wrap="square"/>
+                    <a:lstStyle/>
+                    <a:p>
+                      <a:r>
+                        <a:rPr sz="1400" b="0" lang="ko-KR" altLang="en-US">
+                          <a:solidFill>
+                            <a:srgbClr val="1B2422"/>
+                          </a:solidFill>
+                          <a:latin typeface="맑은 고딕"/>
+                          <a:ea typeface="맑은 고딕"/>
+                        </a:rPr>
+                        <a:t>태그 목록을 정하고 장소마다 태그 붙이기, 가중치 점수</a:t>
+                      </a:r>
+                    </a:p>
+                  </a:txBody>
+                  <a:tcPr marL="109728" marR="109728" anchor="ctr">
+                    <a:solidFill>
+                      <a:srgbClr val="F6F7F5"/>
+                    </a:solidFill>
+                  </a:tcPr>
+                </a:tc>
+                <a:tc>
+                  <a:txBody>
+                    <a:bodyPr wrap="square"/>
+                    <a:lstStyle/>
+                    <a:p>
+                      <a:r>
+                        <a:rPr sz="1400" b="0" lang="ko-KR" altLang="en-US">
+                          <a:solidFill>
+                            <a:srgbClr val="1B2422"/>
+                          </a:solidFill>
+                          <a:latin typeface="맑은 고딕"/>
+                          <a:ea typeface="맑은 고딕"/>
+                        </a:rPr>
+                        <a:t>문장 임베딩으로 의미 유사도 계산 (태그 관리 불필요)</a:t>
+                      </a:r>
+                    </a:p>
+                  </a:txBody>
+                  <a:tcPr marL="109728" marR="109728" anchor="ctr">
+                    <a:solidFill>
+                      <a:srgbClr val="F6F7F5"/>
+                    </a:solidFill>
+                  </a:tcPr>
+                </a:tc>
+              </a:tr>
+              <a:tr h="566928">
+                <a:tc>
+                  <a:txBody>
+                    <a:bodyPr wrap="square"/>
+                    <a:lstStyle/>
+                    <a:p>
+                      <a:r>
+                        <a:rPr sz="1400" b="1" lang="ko-KR" altLang="en-US">
+                          <a:solidFill>
+                            <a:srgbClr val="0D6B5F"/>
+                          </a:solidFill>
+                          <a:latin typeface="맑은 고딕"/>
+                          <a:ea typeface="맑은 고딕"/>
+                        </a:rPr>
+                        <a:t>사용 AI</a:t>
+                      </a:r>
+                    </a:p>
+                  </a:txBody>
+                  <a:tcPr marL="109728" marR="109728" anchor="ctr">
+                    <a:solidFill>
+                      <a:srgbClr val="FFFFFF"/>
+                    </a:solidFill>
+                  </a:tcPr>
+                </a:tc>
+                <a:tc>
+                  <a:txBody>
+                    <a:bodyPr wrap="square"/>
+                    <a:lstStyle/>
+                    <a:p>
+                      <a:r>
+                        <a:rPr sz="1400" b="0" lang="ko-KR" altLang="en-US">
+                          <a:solidFill>
+                            <a:srgbClr val="1B2422"/>
+                          </a:solidFill>
+                          <a:latin typeface="맑은 고딕"/>
+                          <a:ea typeface="맑은 고딕"/>
+                        </a:rPr>
+                        <a:t>GPT API 3종 (유료)</a:t>
+                      </a:r>
+                    </a:p>
+                  </a:txBody>
+                  <a:tcPr marL="109728" marR="109728" anchor="ctr">
+                    <a:solidFill>
+                      <a:srgbClr val="FFFFFF"/>
+                    </a:solidFill>
+                  </a:tcPr>
+                </a:tc>
+                <a:tc>
+                  <a:txBody>
+                    <a:bodyPr wrap="square"/>
+                    <a:lstStyle/>
+                    <a:p>
+                      <a:r>
+                        <a:rPr sz="1400" b="0" lang="ko-KR" altLang="en-US">
+                          <a:solidFill>
+                            <a:srgbClr val="1B2422"/>
+                          </a:solidFill>
+                          <a:latin typeface="맑은 고딕"/>
+                          <a:ea typeface="맑은 고딕"/>
+                        </a:rPr>
+                        <a:t>무료 임베딩 모델 + ChatGPT 무료 버전</a:t>
+                      </a:r>
+                    </a:p>
+                  </a:txBody>
+                  <a:tcPr marL="109728" marR="109728" anchor="ctr">
+                    <a:solidFill>
+                      <a:srgbClr val="FFFFFF"/>
+                    </a:solidFill>
+                  </a:tcPr>
+                </a:tc>
+              </a:tr>
+              <a:tr h="566928">
+                <a:tc>
+                  <a:txBody>
+                    <a:bodyPr wrap="square"/>
+                    <a:lstStyle/>
+                    <a:p>
+                      <a:r>
+                        <a:rPr sz="1400" b="1" lang="ko-KR" altLang="en-US">
+                          <a:solidFill>
+                            <a:srgbClr val="0D6B5F"/>
+                          </a:solidFill>
+                          <a:latin typeface="맑은 고딕"/>
+                          <a:ea typeface="맑은 고딕"/>
+                        </a:rPr>
+                        <a:t>데이터</a:t>
+                      </a:r>
+                    </a:p>
+                  </a:txBody>
+                  <a:tcPr marL="109728" marR="109728" anchor="ctr">
+                    <a:solidFill>
+                      <a:srgbClr val="F6F7F5"/>
+                    </a:solidFill>
+                  </a:tcPr>
+                </a:tc>
+                <a:tc>
+                  <a:txBody>
+                    <a:bodyPr wrap="square"/>
+                    <a:lstStyle/>
+                    <a:p>
+                      <a:r>
+                        <a:rPr sz="1400" b="0" lang="ko-KR" altLang="en-US">
+                          <a:solidFill>
+                            <a:srgbClr val="1B2422"/>
+                          </a:solidFill>
+                          <a:latin typeface="맑은 고딕"/>
+                          <a:ea typeface="맑은 고딕"/>
+                        </a:rPr>
+                        <a:t>검색 API 자동 수집, 매일 갱신</a:t>
+                      </a:r>
+                    </a:p>
+                  </a:txBody>
+                  <a:tcPr marL="109728" marR="109728" anchor="ctr">
+                    <a:solidFill>
+                      <a:srgbClr val="F6F7F5"/>
+                    </a:solidFill>
+                  </a:tcPr>
+                </a:tc>
+                <a:tc>
+                  <a:txBody>
+                    <a:bodyPr wrap="square"/>
+                    <a:lstStyle/>
+                    <a:p>
+                      <a:r>
+                        <a:rPr sz="1400" b="0" lang="ko-KR" altLang="en-US">
+                          <a:solidFill>
+                            <a:srgbClr val="1B2422"/>
+                          </a:solidFill>
+                          <a:latin typeface="맑은 고딕"/>
+                          <a:ea typeface="맑은 고딕"/>
+                        </a:rPr>
+                        <a:t>공식 안내문 정리 + 종료일 지나면 자동 제외</a:t>
+                      </a:r>
+                    </a:p>
+                  </a:txBody>
+                  <a:tcPr marL="109728" marR="109728" anchor="ctr">
+                    <a:solidFill>
+                      <a:srgbClr val="F6F7F5"/>
+                    </a:solidFill>
+                  </a:tcPr>
+                </a:tc>
+              </a:tr>
+              <a:tr h="566928">
+                <a:tc>
+                  <a:txBody>
+                    <a:bodyPr wrap="square"/>
+                    <a:lstStyle/>
+                    <a:p>
+                      <a:r>
+                        <a:rPr sz="1400" b="1" lang="ko-KR" altLang="en-US">
+                          <a:solidFill>
+                            <a:srgbClr val="0D6B5F"/>
+                          </a:solidFill>
+                          <a:latin typeface="맑은 고딕"/>
+                          <a:ea typeface="맑은 고딕"/>
+                        </a:rPr>
+                        <a:t>비용</a:t>
+                      </a:r>
+                    </a:p>
+                  </a:txBody>
+                  <a:tcPr marL="109728" marR="109728" anchor="ctr">
+                    <a:solidFill>
+                      <a:srgbClr val="FFFFFF"/>
+                    </a:solidFill>
+                  </a:tcPr>
+                </a:tc>
+                <a:tc>
+                  <a:txBody>
+                    <a:bodyPr wrap="square"/>
+                    <a:lstStyle/>
+                    <a:p>
+                      <a:r>
+                        <a:rPr sz="1400" b="0" lang="ko-KR" altLang="en-US">
+                          <a:solidFill>
+                            <a:srgbClr val="1B2422"/>
+                          </a:solidFill>
+                          <a:latin typeface="맑은 고딕"/>
+                          <a:ea typeface="맑은 고딕"/>
+                        </a:rPr>
+                        <a:t>API 사용량만큼 발생</a:t>
+                      </a:r>
+                    </a:p>
+                  </a:txBody>
+                  <a:tcPr marL="109728" marR="109728" anchor="ctr">
+                    <a:solidFill>
+                      <a:srgbClr val="FFFFFF"/>
+                    </a:solidFill>
+                  </a:tcPr>
+                </a:tc>
+                <a:tc>
+                  <a:txBody>
+                    <a:bodyPr wrap="square"/>
+                    <a:lstStyle/>
+                    <a:p>
+                      <a:r>
+                        <a:rPr sz="1400" b="0" lang="ko-KR" altLang="en-US">
+                          <a:solidFill>
+                            <a:srgbClr val="1B2422"/>
+                          </a:solidFill>
+                          <a:latin typeface="맑은 고딕"/>
+                          <a:ea typeface="맑은 고딕"/>
+                        </a:rPr>
+                        <a:t>0원</a:t>
+                      </a:r>
+                    </a:p>
+                  </a:txBody>
+                  <a:tcPr marL="109728" marR="109728" anchor="ctr">
+                    <a:solidFill>
+                      <a:srgbClr val="FFFFFF"/>
+                    </a:solidFill>
+                  </a:tcPr>
+                </a:tc>
+              </a:tr>
+            </a:tbl>
+          </a:graphicData>
+        </a:graphic>
+      </p:graphicFrame>
+      <p:sp>
+        <p:nvSpPr>
+          <p:cNvPr id="8" name="TextBox 7"/>
           <p:cNvSpPr txBox="1"/>
           <p:nvPr/>
         </p:nvSpPr>
         <p:spPr>
           <a:xfrm>
-            <a:off x="640080" y="1783080"/>
-            <a:ext cx="5303520" cy="365760"/>
+            <a:off x="640080" y="5486400"/>
+            <a:ext cx="10881360" cy="548640"/>
           </a:xfrm>
           <a:prstGeom prst="rect">
             <a:avLst/>
@@ -9872,7 +10056,7 @@
           </a:bodyPr>
           <a:lstStyle/>
           <a:p>
-            <a:pPr algn="l" eaLnBrk="0">
+            <a:pPr algn="l">
               <a:lnSpc>
                 <a:spcPct val="120000"/>
               </a:lnSpc>
@@ -9881,284 +10065,14 @@
               </a:spcAft>
             </a:pPr>
             <a:r>
-              <a:rPr sz="1300" b="1" lang="ko-KR" altLang="en-US">
+              <a:rPr sz="1500" b="1" lang="ko-KR" altLang="en-US">
                 <a:solidFill>
                   <a:srgbClr val="0D6B5F"/>
                 </a:solidFill>
                 <a:latin typeface="맑은 고딕"/>
                 <a:ea typeface="맑은 고딕"/>
               </a:rPr>
-              <a:t>ChatGPT에 입력한 프롬프트</a:t>
-            </a:r>
-          </a:p>
-        </p:txBody>
-      </p:sp>
-      <p:sp>
-        <p:nvSpPr>
-          <p:cNvPr id="8" name="Rectangle 7"/>
-          <p:cNvSpPr/>
-          <p:nvPr/>
-        </p:nvSpPr>
-        <p:spPr>
-          <a:xfrm>
-            <a:off x="640080" y="2148840"/>
-            <a:ext cx="5303520" cy="2651760"/>
-          </a:xfrm>
-          <a:prstGeom prst="rect">
-            <a:avLst/>
-          </a:prstGeom>
-          <a:solidFill>
-            <a:srgbClr val="FFFFFF"/>
-          </a:solidFill>
-          <a:ln w="12700">
-            <a:solidFill>
-              <a:srgbClr val="D9DFDC"/>
-            </a:solidFill>
-          </a:ln>
-          <a:effectLst/>
-        </p:spPr>
-        <p:style>
-          <a:lnRef idx="1">
-            <a:schemeClr val="accent1"/>
-          </a:lnRef>
-          <a:fillRef idx="3">
-            <a:schemeClr val="accent1"/>
-          </a:fillRef>
-          <a:effectRef idx="2">
-            <a:schemeClr val="accent1"/>
-          </a:effectRef>
-          <a:fontRef idx="minor">
-            <a:schemeClr val="lt1"/>
-          </a:fontRef>
-        </p:style>
-        <p:txBody>
-          <a:bodyPr rtlCol="0" anchor="ctr"/>
-          <a:lstStyle/>
-          <a:p>
-            <a:pPr algn="ctr"/>
-          </a:p>
-        </p:txBody>
-      </p:sp>
-      <p:sp>
-        <p:nvSpPr>
-          <p:cNvPr id="9" name="TextBox 8"/>
-          <p:cNvSpPr txBox="1"/>
-          <p:nvPr/>
-        </p:nvSpPr>
-        <p:spPr>
-          <a:xfrm>
-            <a:off x="822960" y="2286000"/>
-            <a:ext cx="5029200" cy="2468880"/>
-          </a:xfrm>
-          <a:prstGeom prst="rect">
-            <a:avLst/>
-          </a:prstGeom>
-          <a:noFill/>
-        </p:spPr>
-        <p:txBody>
-          <a:bodyPr wrap="square" anchor="t" lIns="45720" rIns="45720">
-            <a:spAutoFit/>
-          </a:bodyPr>
-          <a:lstStyle/>
-          <a:p>
-            <a:pPr algn="l" eaLnBrk="0">
-              <a:lnSpc>
-                <a:spcPct val="110000"/>
-              </a:lnSpc>
-              <a:spcAft>
-                <a:spcPts val="600"/>
-              </a:spcAft>
-            </a:pPr>
-            <a:r>
-              <a:rPr sz="1300" b="0" lang="ko-KR" altLang="en-US">
-                <a:solidFill>
-                  <a:srgbClr val="1B2422"/>
-                </a:solidFill>
-                <a:latin typeface="맑은 고딕"/>
-                <a:ea typeface="맑은 고딕"/>
-              </a:rPr>
-              <a:t>사용자 취향: 체험(1순위), 사진(2순위),
-            귀여운 분위기, 무료 선호
-추천 장소: 캐릭터 팝업 A
-          (1위, 이미 확정된 순위이므로 바꾸지 마)
-일치한 특징: 체험, 사진, 굿즈, 귀여운, 트렌디
-            / 무료 입장
-이 장소를 추천하는 이유를 친근한 말투로
-2문장 이내로 써줘.</a:t>
-            </a:r>
-          </a:p>
-        </p:txBody>
-      </p:sp>
-      <p:sp>
-        <p:nvSpPr>
-          <p:cNvPr id="10" name="TextBox 9"/>
-          <p:cNvSpPr txBox="1"/>
-          <p:nvPr/>
-        </p:nvSpPr>
-        <p:spPr>
-          <a:xfrm>
-            <a:off x="640080" y="4983480"/>
-            <a:ext cx="5303520" cy="1097280"/>
-          </a:xfrm>
-          <a:prstGeom prst="rect">
-            <a:avLst/>
-          </a:prstGeom>
-          <a:noFill/>
-        </p:spPr>
-        <p:txBody>
-          <a:bodyPr wrap="square" anchor="t" lIns="45720" rIns="45720">
-            <a:spAutoFit/>
-          </a:bodyPr>
-          <a:lstStyle/>
-          <a:p>
-            <a:pPr algn="l" eaLnBrk="0">
-              <a:lnSpc>
-                <a:spcPct val="135000"/>
-              </a:lnSpc>
-              <a:spcAft>
-                <a:spcPts val="600"/>
-              </a:spcAft>
-            </a:pPr>
-            <a:r>
-              <a:rPr sz="1400" b="0" lang="ko-KR" altLang="en-US">
-                <a:solidFill>
-                  <a:srgbClr val="1B2422"/>
-                </a:solidFill>
-                <a:latin typeface="맑은 고딕"/>
-                <a:ea typeface="맑은 고딕"/>
-              </a:rPr>
-              <a:t>순위는 코드가 이미 정했다. AI는 그 결과를 사용자가 이해하기 쉬운 말로 설명하는 역할만 맡는다.</a:t>
-            </a:r>
-          </a:p>
-        </p:txBody>
-      </p:sp>
-      <p:sp>
-        <p:nvSpPr>
-          <p:cNvPr id="11" name="TextBox 10"/>
-          <p:cNvSpPr txBox="1"/>
-          <p:nvPr/>
-        </p:nvSpPr>
-        <p:spPr>
-          <a:xfrm>
-            <a:off x="6309360" y="1783080"/>
-            <a:ext cx="5212080" cy="365760"/>
-          </a:xfrm>
-          <a:prstGeom prst="rect">
-            <a:avLst/>
-          </a:prstGeom>
-          <a:noFill/>
-        </p:spPr>
-        <p:txBody>
-          <a:bodyPr wrap="square" anchor="t" lIns="45720" rIns="45720">
-            <a:spAutoFit/>
-          </a:bodyPr>
-          <a:lstStyle/>
-          <a:p>
-            <a:pPr algn="l" eaLnBrk="0">
-              <a:lnSpc>
-                <a:spcPct val="120000"/>
-              </a:lnSpc>
-              <a:spcAft>
-                <a:spcPts val="600"/>
-              </a:spcAft>
-            </a:pPr>
-            <a:r>
-              <a:rPr sz="1300" b="1" lang="ko-KR" altLang="en-US">
-                <a:solidFill>
-                  <a:srgbClr val="0D6B5F"/>
-                </a:solidFill>
-                <a:latin typeface="맑은 고딕"/>
-                <a:ea typeface="맑은 고딕"/>
-              </a:rPr>
-              <a:t>실행 결과</a:t>
-            </a:r>
-          </a:p>
-        </p:txBody>
-      </p:sp>
-      <p:sp>
-        <p:nvSpPr>
-          <p:cNvPr id="12" name="Rectangle 11"/>
-          <p:cNvSpPr/>
-          <p:nvPr/>
-        </p:nvSpPr>
-        <p:spPr>
-          <a:xfrm>
-            <a:off x="6309360" y="2148840"/>
-            <a:ext cx="5212080" cy="3931920"/>
-          </a:xfrm>
-          <a:prstGeom prst="rect">
-            <a:avLst/>
-          </a:prstGeom>
-          <a:noFill/>
-          <a:ln w="12700">
-            <a:solidFill>
-              <a:srgbClr val="5C6865"/>
-            </a:solidFill>
-            <a:prstDash val="dash"/>
-          </a:ln>
-          <a:effectLst/>
-        </p:spPr>
-        <p:style>
-          <a:lnRef idx="1">
-            <a:schemeClr val="accent1"/>
-          </a:lnRef>
-          <a:fillRef idx="3">
-            <a:schemeClr val="accent1"/>
-          </a:fillRef>
-          <a:effectRef idx="2">
-            <a:schemeClr val="accent1"/>
-          </a:effectRef>
-          <a:fontRef idx="minor">
-            <a:schemeClr val="lt1"/>
-          </a:fontRef>
-        </p:style>
-        <p:txBody>
-          <a:bodyPr rtlCol="0" anchor="ctr"/>
-          <a:lstStyle/>
-          <a:p>
-            <a:pPr algn="ctr"/>
-          </a:p>
-        </p:txBody>
-      </p:sp>
-      <p:sp>
-        <p:nvSpPr>
-          <p:cNvPr id="13" name="TextBox 12"/>
-          <p:cNvSpPr txBox="1"/>
-          <p:nvPr/>
-        </p:nvSpPr>
-        <p:spPr>
-          <a:xfrm>
-            <a:off x="6309360" y="2148840"/>
-            <a:ext cx="5212080" cy="3931920"/>
-          </a:xfrm>
-          <a:prstGeom prst="rect">
-            <a:avLst/>
-          </a:prstGeom>
-          <a:noFill/>
-        </p:spPr>
-        <p:txBody>
-          <a:bodyPr wrap="square" anchor="ctr" lIns="45720" rIns="45720">
-            <a:spAutoFit/>
-          </a:bodyPr>
-          <a:lstStyle/>
-          <a:p>
-            <a:pPr algn="ctr" eaLnBrk="0">
-              <a:lnSpc>
-                <a:spcPct val="120000"/>
-              </a:lnSpc>
-              <a:spcAft>
-                <a:spcPts val="600"/>
-              </a:spcAft>
-            </a:pPr>
-            <a:r>
-              <a:rPr sz="1400" b="0" lang="ko-KR" altLang="en-US">
-                <a:solidFill>
-                  <a:srgbClr val="5C6865"/>
-                </a:solidFill>
-                <a:latin typeface="맑은 고딕"/>
-                <a:ea typeface="맑은 고딕"/>
-              </a:rPr>
-              <a:t>ChatGPT 실행 화면 캡처를 여기에 넣기</a:t>
+              <a:t>그대로 지킨 원칙  느낌 이해는 AI, 필터와 순위는 코드</a:t>
             </a:r>
           </a:p>
         </p:txBody>
@@ -10211,7 +10125,7 @@
           </a:bodyPr>
           <a:lstStyle/>
           <a:p>
-            <a:pPr algn="l" eaLnBrk="0">
+            <a:pPr algn="l">
               <a:lnSpc>
                 <a:spcPct val="120000"/>
               </a:lnSpc>
@@ -10227,7 +10141,7 @@
                 <a:latin typeface="맑은 고딕"/>
                 <a:ea typeface="맑은 고딕"/>
               </a:rPr>
-              <a:t>기획 발전 과정</a:t>
+              <a:t>최종 발표까지 계획</a:t>
             </a:r>
           </a:p>
         </p:txBody>
@@ -10254,7 +10168,7 @@
           </a:bodyPr>
           <a:lstStyle/>
           <a:p>
-            <a:pPr algn="l" eaLnBrk="0">
+            <a:pPr algn="l">
               <a:lnSpc>
                 <a:spcPct val="120000"/>
               </a:lnSpc>
@@ -10270,7 +10184,7 @@
                 <a:latin typeface="맑은 고딕"/>
                 <a:ea typeface="맑은 고딕"/>
               </a:rPr>
-              <a:t>아이디어에서 추천 시스템으로</a:t>
+              <a:t>최종 발표까지 5주 로드맵</a:t>
             </a:r>
           </a:p>
         </p:txBody>
@@ -10341,7 +10255,7 @@
           </a:bodyPr>
           <a:lstStyle/>
           <a:p>
-            <a:pPr algn="l" eaLnBrk="0">
+            <a:pPr algn="l">
               <a:lnSpc>
                 <a:spcPct val="120000"/>
               </a:lnSpc>
@@ -10384,7 +10298,7 @@
           </a:bodyPr>
           <a:lstStyle/>
           <a:p>
-            <a:pPr algn="r" eaLnBrk="0">
+            <a:pPr algn="r">
               <a:lnSpc>
                 <a:spcPct val="120000"/>
               </a:lnSpc>
@@ -10400,943 +10314,7 @@
                 <a:latin typeface="맑은 고딕"/>
                 <a:ea typeface="맑은 고딕"/>
               </a:rPr>
-              <a:t>8 / 10</a:t>
-            </a:r>
-          </a:p>
-        </p:txBody>
-      </p:sp>
-      <p:sp>
-        <p:nvSpPr>
-          <p:cNvPr id="7" name="Rectangle 6"/>
-          <p:cNvSpPr/>
-          <p:nvPr/>
-        </p:nvSpPr>
-        <p:spPr>
-          <a:xfrm>
-            <a:off x="868680" y="2377440"/>
-            <a:ext cx="10424160" cy="36576"/>
-          </a:xfrm>
-          <a:prstGeom prst="rect">
-            <a:avLst/>
-          </a:prstGeom>
-          <a:solidFill>
-            <a:srgbClr val="D9DFDC"/>
-          </a:solidFill>
-          <a:ln>
-            <a:noFill/>
-          </a:ln>
-          <a:effectLst/>
-        </p:spPr>
-        <p:style>
-          <a:lnRef idx="1">
-            <a:schemeClr val="accent1"/>
-          </a:lnRef>
-          <a:fillRef idx="3">
-            <a:schemeClr val="accent1"/>
-          </a:fillRef>
-          <a:effectRef idx="2">
-            <a:schemeClr val="accent1"/>
-          </a:effectRef>
-          <a:fontRef idx="minor">
-            <a:schemeClr val="lt1"/>
-          </a:fontRef>
-        </p:style>
-        <p:txBody>
-          <a:bodyPr rtlCol="0" anchor="ctr"/>
-          <a:lstStyle/>
-          <a:p>
-            <a:pPr algn="ctr"/>
-          </a:p>
-        </p:txBody>
-      </p:sp>
-      <p:sp>
-        <p:nvSpPr>
-          <p:cNvPr id="8" name="Oval 7"/>
-          <p:cNvSpPr/>
-          <p:nvPr/>
-        </p:nvSpPr>
-        <p:spPr>
-          <a:xfrm>
-            <a:off x="777240" y="2258568"/>
-            <a:ext cx="274320" cy="274320"/>
-          </a:xfrm>
-          <a:prstGeom prst="ellipse">
-            <a:avLst/>
-          </a:prstGeom>
-          <a:solidFill>
-            <a:srgbClr val="5C6865"/>
-          </a:solidFill>
-          <a:ln>
-            <a:noFill/>
-          </a:ln>
-          <a:effectLst/>
-        </p:spPr>
-        <p:style>
-          <a:lnRef idx="1">
-            <a:schemeClr val="accent1"/>
-          </a:lnRef>
-          <a:fillRef idx="3">
-            <a:schemeClr val="accent1"/>
-          </a:fillRef>
-          <a:effectRef idx="2">
-            <a:schemeClr val="accent1"/>
-          </a:effectRef>
-          <a:fontRef idx="minor">
-            <a:schemeClr val="lt1"/>
-          </a:fontRef>
-        </p:style>
-        <p:txBody>
-          <a:bodyPr rtlCol="0" anchor="ctr"/>
-          <a:lstStyle/>
-          <a:p>
-            <a:pPr algn="ctr"/>
-          </a:p>
-        </p:txBody>
-      </p:sp>
-      <p:sp>
-        <p:nvSpPr>
-          <p:cNvPr id="9" name="TextBox 8"/>
-          <p:cNvSpPr txBox="1"/>
-          <p:nvPr/>
-        </p:nvSpPr>
-        <p:spPr>
-          <a:xfrm>
-            <a:off x="640080" y="2743200"/>
-            <a:ext cx="2011680" cy="365760"/>
-          </a:xfrm>
-          <a:prstGeom prst="rect">
-            <a:avLst/>
-          </a:prstGeom>
-          <a:noFill/>
-        </p:spPr>
-        <p:txBody>
-          <a:bodyPr wrap="square" anchor="t" lIns="45720" rIns="45720">
-            <a:spAutoFit/>
-          </a:bodyPr>
-          <a:lstStyle/>
-          <a:p>
-            <a:pPr algn="l" eaLnBrk="0">
-              <a:lnSpc>
-                <a:spcPct val="120000"/>
-              </a:lnSpc>
-              <a:spcAft>
-                <a:spcPts val="600"/>
-              </a:spcAft>
-            </a:pPr>
-            <a:r>
-              <a:rPr sz="1600" b="1" lang="ko-KR" altLang="en-US">
-                <a:solidFill>
-                  <a:srgbClr val="5C6865"/>
-                </a:solidFill>
-                <a:latin typeface="맑은 고딕"/>
-                <a:ea typeface="맑은 고딕"/>
-              </a:rPr>
-              <a:t>처음</a:t>
-            </a:r>
-          </a:p>
-        </p:txBody>
-      </p:sp>
-      <p:sp>
-        <p:nvSpPr>
-          <p:cNvPr id="10" name="TextBox 9"/>
-          <p:cNvSpPr txBox="1"/>
-          <p:nvPr/>
-        </p:nvSpPr>
-        <p:spPr>
-          <a:xfrm>
-            <a:off x="640080" y="3200400"/>
-            <a:ext cx="2011680" cy="2286000"/>
-          </a:xfrm>
-          <a:prstGeom prst="rect">
-            <a:avLst/>
-          </a:prstGeom>
-          <a:noFill/>
-        </p:spPr>
-        <p:txBody>
-          <a:bodyPr wrap="square" anchor="t" lIns="45720" rIns="45720">
-            <a:spAutoFit/>
-          </a:bodyPr>
-          <a:lstStyle/>
-          <a:p>
-            <a:pPr algn="l" eaLnBrk="0">
-              <a:lnSpc>
-                <a:spcPct val="135000"/>
-              </a:lnSpc>
-              <a:spcAft>
-                <a:spcPts val="600"/>
-              </a:spcAft>
-            </a:pPr>
-            <a:r>
-              <a:rPr sz="1400" b="0" lang="ko-KR" altLang="en-US">
-                <a:solidFill>
-                  <a:srgbClr val="1B2422"/>
-                </a:solidFill>
-                <a:latin typeface="맑은 고딕"/>
-                <a:ea typeface="맑은 고딕"/>
-              </a:rPr>
-              <a:t>AI가 팝업을 추천해 주는 아이디어</a:t>
-            </a:r>
-          </a:p>
-        </p:txBody>
-      </p:sp>
-      <p:sp>
-        <p:nvSpPr>
-          <p:cNvPr id="11" name="Oval 10"/>
-          <p:cNvSpPr/>
-          <p:nvPr/>
-        </p:nvSpPr>
-        <p:spPr>
-          <a:xfrm>
-            <a:off x="2971799" y="2258568"/>
-            <a:ext cx="274320" cy="274320"/>
-          </a:xfrm>
-          <a:prstGeom prst="ellipse">
-            <a:avLst/>
-          </a:prstGeom>
-          <a:solidFill>
-            <a:srgbClr val="0D6B5F"/>
-          </a:solidFill>
-          <a:ln>
-            <a:noFill/>
-          </a:ln>
-          <a:effectLst/>
-        </p:spPr>
-        <p:style>
-          <a:lnRef idx="1">
-            <a:schemeClr val="accent1"/>
-          </a:lnRef>
-          <a:fillRef idx="3">
-            <a:schemeClr val="accent1"/>
-          </a:fillRef>
-          <a:effectRef idx="2">
-            <a:schemeClr val="accent1"/>
-          </a:effectRef>
-          <a:fontRef idx="minor">
-            <a:schemeClr val="lt1"/>
-          </a:fontRef>
-        </p:style>
-        <p:txBody>
-          <a:bodyPr rtlCol="0" anchor="ctr"/>
-          <a:lstStyle/>
-          <a:p>
-            <a:pPr algn="ctr"/>
-          </a:p>
-        </p:txBody>
-      </p:sp>
-      <p:sp>
-        <p:nvSpPr>
-          <p:cNvPr id="12" name="TextBox 11"/>
-          <p:cNvSpPr txBox="1"/>
-          <p:nvPr/>
-        </p:nvSpPr>
-        <p:spPr>
-          <a:xfrm>
-            <a:off x="2834639" y="2743200"/>
-            <a:ext cx="2011680" cy="365760"/>
-          </a:xfrm>
-          <a:prstGeom prst="rect">
-            <a:avLst/>
-          </a:prstGeom>
-          <a:noFill/>
-        </p:spPr>
-        <p:txBody>
-          <a:bodyPr wrap="square" anchor="t" lIns="45720" rIns="45720">
-            <a:spAutoFit/>
-          </a:bodyPr>
-          <a:lstStyle/>
-          <a:p>
-            <a:pPr algn="l" eaLnBrk="0">
-              <a:lnSpc>
-                <a:spcPct val="120000"/>
-              </a:lnSpc>
-              <a:spcAft>
-                <a:spcPts val="600"/>
-              </a:spcAft>
-            </a:pPr>
-            <a:r>
-              <a:rPr sz="1600" b="1" lang="ko-KR" altLang="en-US">
-                <a:solidFill>
-                  <a:srgbClr val="0D6B5F"/>
-                </a:solidFill>
-                <a:latin typeface="맑은 고딕"/>
-                <a:ea typeface="맑은 고딕"/>
-              </a:rPr>
-              <a:t>구조화</a:t>
-            </a:r>
-          </a:p>
-        </p:txBody>
-      </p:sp>
-      <p:sp>
-        <p:nvSpPr>
-          <p:cNvPr id="13" name="TextBox 12"/>
-          <p:cNvSpPr txBox="1"/>
-          <p:nvPr/>
-        </p:nvSpPr>
-        <p:spPr>
-          <a:xfrm>
-            <a:off x="2834639" y="3200400"/>
-            <a:ext cx="2011680" cy="2286000"/>
-          </a:xfrm>
-          <a:prstGeom prst="rect">
-            <a:avLst/>
-          </a:prstGeom>
-          <a:noFill/>
-        </p:spPr>
-        <p:txBody>
-          <a:bodyPr wrap="square" anchor="t" lIns="45720" rIns="45720">
-            <a:spAutoFit/>
-          </a:bodyPr>
-          <a:lstStyle/>
-          <a:p>
-            <a:pPr algn="l" eaLnBrk="0">
-              <a:lnSpc>
-                <a:spcPct val="135000"/>
-              </a:lnSpc>
-              <a:spcAft>
-                <a:spcPts val="600"/>
-              </a:spcAft>
-            </a:pPr>
-            <a:r>
-              <a:rPr sz="1400" b="0" lang="ko-KR" altLang="en-US">
-                <a:solidFill>
-                  <a:srgbClr val="1B2422"/>
-                </a:solidFill>
-                <a:latin typeface="맑은 고딕"/>
-                <a:ea typeface="맑은 고딕"/>
-              </a:rPr>
-              <a:t>사용자 취향과 장소 정보를 같은 기준의 태그 데이터로 표현</a:t>
-            </a:r>
-          </a:p>
-        </p:txBody>
-      </p:sp>
-      <p:sp>
-        <p:nvSpPr>
-          <p:cNvPr id="14" name="Oval 13"/>
-          <p:cNvSpPr/>
-          <p:nvPr/>
-        </p:nvSpPr>
-        <p:spPr>
-          <a:xfrm>
-            <a:off x="5166360" y="2258568"/>
-            <a:ext cx="274320" cy="274320"/>
-          </a:xfrm>
-          <a:prstGeom prst="ellipse">
-            <a:avLst/>
-          </a:prstGeom>
-          <a:solidFill>
-            <a:srgbClr val="0D6B5F"/>
-          </a:solidFill>
-          <a:ln>
-            <a:noFill/>
-          </a:ln>
-          <a:effectLst/>
-        </p:spPr>
-        <p:style>
-          <a:lnRef idx="1">
-            <a:schemeClr val="accent1"/>
-          </a:lnRef>
-          <a:fillRef idx="3">
-            <a:schemeClr val="accent1"/>
-          </a:fillRef>
-          <a:effectRef idx="2">
-            <a:schemeClr val="accent1"/>
-          </a:effectRef>
-          <a:fontRef idx="minor">
-            <a:schemeClr val="lt1"/>
-          </a:fontRef>
-        </p:style>
-        <p:txBody>
-          <a:bodyPr rtlCol="0" anchor="ctr"/>
-          <a:lstStyle/>
-          <a:p>
-            <a:pPr algn="ctr"/>
-          </a:p>
-        </p:txBody>
-      </p:sp>
-      <p:sp>
-        <p:nvSpPr>
-          <p:cNvPr id="15" name="TextBox 14"/>
-          <p:cNvSpPr txBox="1"/>
-          <p:nvPr/>
-        </p:nvSpPr>
-        <p:spPr>
-          <a:xfrm>
-            <a:off x="5029200" y="2743200"/>
-            <a:ext cx="2011680" cy="365760"/>
-          </a:xfrm>
-          <a:prstGeom prst="rect">
-            <a:avLst/>
-          </a:prstGeom>
-          <a:noFill/>
-        </p:spPr>
-        <p:txBody>
-          <a:bodyPr wrap="square" anchor="t" lIns="45720" rIns="45720">
-            <a:spAutoFit/>
-          </a:bodyPr>
-          <a:lstStyle/>
-          <a:p>
-            <a:pPr algn="l" eaLnBrk="0">
-              <a:lnSpc>
-                <a:spcPct val="120000"/>
-              </a:lnSpc>
-              <a:spcAft>
-                <a:spcPts val="600"/>
-              </a:spcAft>
-            </a:pPr>
-            <a:r>
-              <a:rPr sz="1600" b="1" lang="ko-KR" altLang="en-US">
-                <a:solidFill>
-                  <a:srgbClr val="0D6B5F"/>
-                </a:solidFill>
-                <a:latin typeface="맑은 고딕"/>
-                <a:ea typeface="맑은 고딕"/>
-              </a:rPr>
-              <a:t>역할 분리</a:t>
-            </a:r>
-          </a:p>
-        </p:txBody>
-      </p:sp>
-      <p:sp>
-        <p:nvSpPr>
-          <p:cNvPr id="16" name="TextBox 15"/>
-          <p:cNvSpPr txBox="1"/>
-          <p:nvPr/>
-        </p:nvSpPr>
-        <p:spPr>
-          <a:xfrm>
-            <a:off x="5029200" y="3200400"/>
-            <a:ext cx="2011680" cy="2286000"/>
-          </a:xfrm>
-          <a:prstGeom prst="rect">
-            <a:avLst/>
-          </a:prstGeom>
-          <a:noFill/>
-        </p:spPr>
-        <p:txBody>
-          <a:bodyPr wrap="square" anchor="t" lIns="45720" rIns="45720">
-            <a:spAutoFit/>
-          </a:bodyPr>
-          <a:lstStyle/>
-          <a:p>
-            <a:pPr algn="l" eaLnBrk="0">
-              <a:lnSpc>
-                <a:spcPct val="135000"/>
-              </a:lnSpc>
-              <a:spcAft>
-                <a:spcPts val="600"/>
-              </a:spcAft>
-            </a:pPr>
-            <a:r>
-              <a:rPr sz="1400" b="0" lang="ko-KR" altLang="en-US">
-                <a:solidFill>
-                  <a:srgbClr val="1B2422"/>
-                </a:solidFill>
-                <a:latin typeface="맑은 고딕"/>
-                <a:ea typeface="맑은 고딕"/>
-              </a:rPr>
-              <a:t>AI는 분석과 설명, 알고리즘은 필터와 순위</a:t>
-            </a:r>
-          </a:p>
-        </p:txBody>
-      </p:sp>
-      <p:sp>
-        <p:nvSpPr>
-          <p:cNvPr id="17" name="Oval 16"/>
-          <p:cNvSpPr/>
-          <p:nvPr/>
-        </p:nvSpPr>
-        <p:spPr>
-          <a:xfrm>
-            <a:off x="7360919" y="2258568"/>
-            <a:ext cx="274320" cy="274320"/>
-          </a:xfrm>
-          <a:prstGeom prst="ellipse">
-            <a:avLst/>
-          </a:prstGeom>
-          <a:solidFill>
-            <a:srgbClr val="0D6B5F"/>
-          </a:solidFill>
-          <a:ln>
-            <a:noFill/>
-          </a:ln>
-          <a:effectLst/>
-        </p:spPr>
-        <p:style>
-          <a:lnRef idx="1">
-            <a:schemeClr val="accent1"/>
-          </a:lnRef>
-          <a:fillRef idx="3">
-            <a:schemeClr val="accent1"/>
-          </a:fillRef>
-          <a:effectRef idx="2">
-            <a:schemeClr val="accent1"/>
-          </a:effectRef>
-          <a:fontRef idx="minor">
-            <a:schemeClr val="lt1"/>
-          </a:fontRef>
-        </p:style>
-        <p:txBody>
-          <a:bodyPr rtlCol="0" anchor="ctr"/>
-          <a:lstStyle/>
-          <a:p>
-            <a:pPr algn="ctr"/>
-          </a:p>
-        </p:txBody>
-      </p:sp>
-      <p:sp>
-        <p:nvSpPr>
-          <p:cNvPr id="18" name="TextBox 17"/>
-          <p:cNvSpPr txBox="1"/>
-          <p:nvPr/>
-        </p:nvSpPr>
-        <p:spPr>
-          <a:xfrm>
-            <a:off x="7223759" y="2743200"/>
-            <a:ext cx="2011680" cy="365760"/>
-          </a:xfrm>
-          <a:prstGeom prst="rect">
-            <a:avLst/>
-          </a:prstGeom>
-          <a:noFill/>
-        </p:spPr>
-        <p:txBody>
-          <a:bodyPr wrap="square" anchor="t" lIns="45720" rIns="45720">
-            <a:spAutoFit/>
-          </a:bodyPr>
-          <a:lstStyle/>
-          <a:p>
-            <a:pPr algn="l" eaLnBrk="0">
-              <a:lnSpc>
-                <a:spcPct val="120000"/>
-              </a:lnSpc>
-              <a:spcAft>
-                <a:spcPts val="600"/>
-              </a:spcAft>
-            </a:pPr>
-            <a:r>
-              <a:rPr sz="1600" b="1" lang="ko-KR" altLang="en-US">
-                <a:solidFill>
-                  <a:srgbClr val="0D6B5F"/>
-                </a:solidFill>
-                <a:latin typeface="맑은 고딕"/>
-                <a:ea typeface="맑은 고딕"/>
-              </a:rPr>
-              <a:t>데이터 수집</a:t>
-            </a:r>
-          </a:p>
-        </p:txBody>
-      </p:sp>
-      <p:sp>
-        <p:nvSpPr>
-          <p:cNvPr id="19" name="TextBox 18"/>
-          <p:cNvSpPr txBox="1"/>
-          <p:nvPr/>
-        </p:nvSpPr>
-        <p:spPr>
-          <a:xfrm>
-            <a:off x="7223759" y="3200400"/>
-            <a:ext cx="2011680" cy="2286000"/>
-          </a:xfrm>
-          <a:prstGeom prst="rect">
-            <a:avLst/>
-          </a:prstGeom>
-          <a:noFill/>
-        </p:spPr>
-        <p:txBody>
-          <a:bodyPr wrap="square" anchor="t" lIns="45720" rIns="45720">
-            <a:spAutoFit/>
-          </a:bodyPr>
-          <a:lstStyle/>
-          <a:p>
-            <a:pPr algn="l" eaLnBrk="0">
-              <a:lnSpc>
-                <a:spcPct val="135000"/>
-              </a:lnSpc>
-              <a:spcAft>
-                <a:spcPts val="600"/>
-              </a:spcAft>
-            </a:pPr>
-            <a:r>
-              <a:rPr sz="1400" b="0" lang="ko-KR" altLang="en-US">
-                <a:solidFill>
-                  <a:srgbClr val="1B2422"/>
-                </a:solidFill>
-                <a:latin typeface="맑은 고딕"/>
-                <a:ea typeface="맑은 고딕"/>
-              </a:rPr>
-              <a:t>검색 API의 저장·재가공 제한을 고려해 공식 출처로 확인한 정보만 저장</a:t>
-            </a:r>
-          </a:p>
-        </p:txBody>
-      </p:sp>
-      <p:sp>
-        <p:nvSpPr>
-          <p:cNvPr id="20" name="Oval 19"/>
-          <p:cNvSpPr/>
-          <p:nvPr/>
-        </p:nvSpPr>
-        <p:spPr>
-          <a:xfrm>
-            <a:off x="9555480" y="2258568"/>
-            <a:ext cx="274320" cy="274320"/>
-          </a:xfrm>
-          <a:prstGeom prst="ellipse">
-            <a:avLst/>
-          </a:prstGeom>
-          <a:solidFill>
-            <a:srgbClr val="0D6B5F"/>
-          </a:solidFill>
-          <a:ln>
-            <a:noFill/>
-          </a:ln>
-          <a:effectLst/>
-        </p:spPr>
-        <p:style>
-          <a:lnRef idx="1">
-            <a:schemeClr val="accent1"/>
-          </a:lnRef>
-          <a:fillRef idx="3">
-            <a:schemeClr val="accent1"/>
-          </a:fillRef>
-          <a:effectRef idx="2">
-            <a:schemeClr val="accent1"/>
-          </a:effectRef>
-          <a:fontRef idx="minor">
-            <a:schemeClr val="lt1"/>
-          </a:fontRef>
-        </p:style>
-        <p:txBody>
-          <a:bodyPr rtlCol="0" anchor="ctr"/>
-          <a:lstStyle/>
-          <a:p>
-            <a:pPr algn="ctr"/>
-          </a:p>
-        </p:txBody>
-      </p:sp>
-      <p:sp>
-        <p:nvSpPr>
-          <p:cNvPr id="21" name="TextBox 20"/>
-          <p:cNvSpPr txBox="1"/>
-          <p:nvPr/>
-        </p:nvSpPr>
-        <p:spPr>
-          <a:xfrm>
-            <a:off x="9418319" y="2743200"/>
-            <a:ext cx="2011680" cy="365760"/>
-          </a:xfrm>
-          <a:prstGeom prst="rect">
-            <a:avLst/>
-          </a:prstGeom>
-          <a:noFill/>
-        </p:spPr>
-        <p:txBody>
-          <a:bodyPr wrap="square" anchor="t" lIns="45720" rIns="45720">
-            <a:spAutoFit/>
-          </a:bodyPr>
-          <a:lstStyle/>
-          <a:p>
-            <a:pPr algn="l" eaLnBrk="0">
-              <a:lnSpc>
-                <a:spcPct val="120000"/>
-              </a:lnSpc>
-              <a:spcAft>
-                <a:spcPts val="600"/>
-              </a:spcAft>
-            </a:pPr>
-            <a:r>
-              <a:rPr sz="1600" b="1" lang="ko-KR" altLang="en-US">
-                <a:solidFill>
-                  <a:srgbClr val="0D6B5F"/>
-                </a:solidFill>
-                <a:latin typeface="맑은 고딕"/>
-                <a:ea typeface="맑은 고딕"/>
-              </a:rPr>
-              <a:t>검증 후 확장</a:t>
-            </a:r>
-          </a:p>
-        </p:txBody>
-      </p:sp>
-      <p:sp>
-        <p:nvSpPr>
-          <p:cNvPr id="22" name="TextBox 21"/>
-          <p:cNvSpPr txBox="1"/>
-          <p:nvPr/>
-        </p:nvSpPr>
-        <p:spPr>
-          <a:xfrm>
-            <a:off x="9418319" y="3200400"/>
-            <a:ext cx="2011680" cy="2286000"/>
-          </a:xfrm>
-          <a:prstGeom prst="rect">
-            <a:avLst/>
-          </a:prstGeom>
-          <a:noFill/>
-        </p:spPr>
-        <p:txBody>
-          <a:bodyPr wrap="square" anchor="t" lIns="45720" rIns="45720">
-            <a:spAutoFit/>
-          </a:bodyPr>
-          <a:lstStyle/>
-          <a:p>
-            <a:pPr algn="l" eaLnBrk="0">
-              <a:lnSpc>
-                <a:spcPct val="135000"/>
-              </a:lnSpc>
-              <a:spcAft>
-                <a:spcPts val="600"/>
-              </a:spcAft>
-            </a:pPr>
-            <a:r>
-              <a:rPr sz="1400" b="0" lang="ko-KR" altLang="en-US">
-                <a:solidFill>
-                  <a:srgbClr val="1B2422"/>
-                </a:solidFill>
-                <a:latin typeface="맑은 고딕"/>
-                <a:ea typeface="맑은 고딕"/>
-              </a:rPr>
-              <a:t>소규모 데이터로 먼저 검증하고 자동 수집으로 확장</a:t>
-            </a:r>
-          </a:p>
-        </p:txBody>
-      </p:sp>
-    </p:spTree>
-  </p:cSld>
-  <p:clrMapOvr>
-    <a:masterClrMapping/>
-  </p:clrMapOvr>
-</p:sld>
-</file>
-
-<file path=ppt/slides/slide9.xml><?xml version="1.0" encoding="utf-8"?>
-<p:sld xmlns:a="http://schemas.openxmlformats.org/drawingml/2006/main" xmlns:p="http://schemas.openxmlformats.org/presentationml/2006/main" xmlns:r="http://schemas.openxmlformats.org/officeDocument/2006/relationships">
-  <p:cSld>
-    <p:bg>
-      <p:bgPr>
-        <a:solidFill>
-          <a:srgbClr val="F6F7F5"/>
-        </a:solidFill>
-        <a:effectLst/>
-      </p:bgPr>
-    </p:bg>
-    <p:spTree>
-      <p:nvGrpSpPr>
-        <p:cNvPr id="1" name=""/>
-        <p:cNvGrpSpPr/>
-        <p:nvPr/>
-      </p:nvGrpSpPr>
-      <p:grpSpPr/>
-      <p:sp>
-        <p:nvSpPr>
-          <p:cNvPr id="2" name="TextBox 1"/>
-          <p:cNvSpPr txBox="1"/>
-          <p:nvPr/>
-        </p:nvSpPr>
-        <p:spPr>
-          <a:xfrm>
-            <a:off x="640080" y="411480"/>
-            <a:ext cx="8229600" cy="320040"/>
-          </a:xfrm>
-          <a:prstGeom prst="rect">
-            <a:avLst/>
-          </a:prstGeom>
-          <a:noFill/>
-        </p:spPr>
-        <p:txBody>
-          <a:bodyPr wrap="square" anchor="t" lIns="45720" rIns="45720">
-            <a:spAutoFit/>
-          </a:bodyPr>
-          <a:lstStyle/>
-          <a:p>
-            <a:pPr algn="l" eaLnBrk="0">
-              <a:lnSpc>
-                <a:spcPct val="120000"/>
-              </a:lnSpc>
-              <a:spcAft>
-                <a:spcPts val="600"/>
-              </a:spcAft>
-            </a:pPr>
-            <a:r>
-              <a:rPr sz="1200" b="1" lang="ko-KR" altLang="en-US">
-                <a:solidFill>
-                  <a:srgbClr val="0D6B5F"/>
-                </a:solidFill>
-                <a:latin typeface="맑은 고딕"/>
-                <a:ea typeface="맑은 고딕"/>
-              </a:rPr>
-              <a:t>최종 발표까지 계획</a:t>
-            </a:r>
-          </a:p>
-        </p:txBody>
-      </p:sp>
-      <p:sp>
-        <p:nvSpPr>
-          <p:cNvPr id="3" name="TextBox 2"/>
-          <p:cNvSpPr txBox="1"/>
-          <p:nvPr/>
-        </p:nvSpPr>
-        <p:spPr>
-          <a:xfrm>
-            <a:off x="640080" y="731520"/>
-            <a:ext cx="10881360" cy="731520"/>
-          </a:xfrm>
-          <a:prstGeom prst="rect">
-            <a:avLst/>
-          </a:prstGeom>
-          <a:noFill/>
-        </p:spPr>
-        <p:txBody>
-          <a:bodyPr wrap="square" anchor="t" lIns="45720" rIns="45720">
-            <a:spAutoFit/>
-          </a:bodyPr>
-          <a:lstStyle/>
-          <a:p>
-            <a:pPr algn="l" eaLnBrk="0">
-              <a:lnSpc>
-                <a:spcPct val="120000"/>
-              </a:lnSpc>
-              <a:spcAft>
-                <a:spcPts val="600"/>
-              </a:spcAft>
-            </a:pPr>
-            <a:r>
-              <a:rPr sz="2800" b="1" lang="ko-KR" altLang="en-US">
-                <a:solidFill>
-                  <a:srgbClr val="1B2422"/>
-                </a:solidFill>
-                <a:latin typeface="맑은 고딕"/>
-                <a:ea typeface="맑은 고딕"/>
-              </a:rPr>
-              <a:t>6주 개발 일정</a:t>
-            </a:r>
-          </a:p>
-        </p:txBody>
-      </p:sp>
-      <p:sp>
-        <p:nvSpPr>
-          <p:cNvPr id="4" name="Rectangle 3"/>
-          <p:cNvSpPr/>
-          <p:nvPr/>
-        </p:nvSpPr>
-        <p:spPr>
-          <a:xfrm>
-            <a:off x="640080" y="1481328"/>
-            <a:ext cx="548640" cy="54864"/>
-          </a:xfrm>
-          <a:prstGeom prst="rect">
-            <a:avLst/>
-          </a:prstGeom>
-          <a:solidFill>
-            <a:srgbClr val="0D6B5F"/>
-          </a:solidFill>
-          <a:ln>
-            <a:noFill/>
-          </a:ln>
-          <a:effectLst/>
-        </p:spPr>
-        <p:style>
-          <a:lnRef idx="1">
-            <a:schemeClr val="accent1"/>
-          </a:lnRef>
-          <a:fillRef idx="3">
-            <a:schemeClr val="accent1"/>
-          </a:fillRef>
-          <a:effectRef idx="2">
-            <a:schemeClr val="accent1"/>
-          </a:effectRef>
-          <a:fontRef idx="minor">
-            <a:schemeClr val="lt1"/>
-          </a:fontRef>
-        </p:style>
-        <p:txBody>
-          <a:bodyPr rtlCol="0" anchor="ctr"/>
-          <a:lstStyle/>
-          <a:p>
-            <a:pPr algn="ctr"/>
-          </a:p>
-        </p:txBody>
-      </p:sp>
-      <p:sp>
-        <p:nvSpPr>
-          <p:cNvPr id="5" name="TextBox 4"/>
-          <p:cNvSpPr txBox="1"/>
-          <p:nvPr/>
-        </p:nvSpPr>
-        <p:spPr>
-          <a:xfrm>
-            <a:off x="640080" y="6400800"/>
-            <a:ext cx="5486400" cy="274320"/>
-          </a:xfrm>
-          <a:prstGeom prst="rect">
-            <a:avLst/>
-          </a:prstGeom>
-          <a:noFill/>
-        </p:spPr>
-        <p:txBody>
-          <a:bodyPr wrap="square" anchor="t" lIns="45720" rIns="45720">
-            <a:spAutoFit/>
-          </a:bodyPr>
-          <a:lstStyle/>
-          <a:p>
-            <a:pPr algn="l" eaLnBrk="0">
-              <a:lnSpc>
-                <a:spcPct val="120000"/>
-              </a:lnSpc>
-              <a:spcAft>
-                <a:spcPts val="600"/>
-              </a:spcAft>
-            </a:pPr>
-            <a:r>
-              <a:rPr sz="1000" b="0" lang="ko-KR" altLang="en-US">
-                <a:solidFill>
-                  <a:srgbClr val="5C6865"/>
-                </a:solidFill>
-                <a:latin typeface="맑은 고딕"/>
-                <a:ea typeface="맑은 고딕"/>
-              </a:rPr>
-              <a:t>MoodMatch  ·  중간발표 2026.10.27</a:t>
-            </a:r>
-          </a:p>
-        </p:txBody>
-      </p:sp>
-      <p:sp>
-        <p:nvSpPr>
-          <p:cNvPr id="6" name="TextBox 5"/>
-          <p:cNvSpPr txBox="1"/>
-          <p:nvPr/>
-        </p:nvSpPr>
-        <p:spPr>
-          <a:xfrm>
-            <a:off x="10607040" y="6400800"/>
-            <a:ext cx="914400" cy="274320"/>
-          </a:xfrm>
-          <a:prstGeom prst="rect">
-            <a:avLst/>
-          </a:prstGeom>
-          <a:noFill/>
-        </p:spPr>
-        <p:txBody>
-          <a:bodyPr wrap="square" anchor="t" lIns="45720" rIns="45720">
-            <a:spAutoFit/>
-          </a:bodyPr>
-          <a:lstStyle/>
-          <a:p>
-            <a:pPr algn="r" eaLnBrk="0">
-              <a:lnSpc>
-                <a:spcPct val="120000"/>
-              </a:lnSpc>
-              <a:spcAft>
-                <a:spcPts val="600"/>
-              </a:spcAft>
-            </a:pPr>
-            <a:r>
-              <a:rPr sz="1000" b="0" lang="ko-KR" altLang="en-US">
-                <a:solidFill>
-                  <a:srgbClr val="5C6865"/>
-                </a:solidFill>
-                <a:latin typeface="맑은 고딕"/>
-                <a:ea typeface="맑은 고딕"/>
-              </a:rPr>
-              <a:t>9 / 10</a:t>
+              <a:t>8 / 9</a:t>
             </a:r>
           </a:p>
         </p:txBody>
@@ -11351,7 +10329,7 @@
         </p:nvGraphicFramePr>
         <p:xfrm>
           <a:off x="640080" y="1783080"/>
-          <a:ext cx="10881360" cy="3712463"/>
+          <a:ext cx="10881360" cy="3621024"/>
         </p:xfrm>
         <a:graphic>
           <a:graphicData uri="http://schemas.openxmlformats.org/drawingml/2006/table">
@@ -11361,16 +10339,15 @@
               </a:tblPr>
               <a:tblGrid>
                 <a:gridCol w="1920240"/>
-                <a:gridCol w="6583680"/>
-                <a:gridCol w="2377440"/>
+                <a:gridCol w="6400800"/>
+                <a:gridCol w="2560320"/>
               </a:tblGrid>
-              <a:tr h="530351">
+              <a:tr h="603504">
                 <a:tc>
                   <a:txBody>
                     <a:bodyPr wrap="square"/>
                     <a:lstStyle/>
                     <a:p>
-                      <a:pPr eaLnBrk="0"/>
                       <a:r>
                         <a:rPr sz="1300" b="1" lang="ko-KR" altLang="en-US">
                           <a:solidFill>
@@ -11394,7 +10371,6 @@
                     <a:bodyPr wrap="square"/>
                     <a:lstStyle/>
                     <a:p>
-                      <a:pPr eaLnBrk="0"/>
                       <a:r>
                         <a:rPr sz="1300" b="1" lang="ko-KR" altLang="en-US">
                           <a:solidFill>
@@ -11418,7 +10394,6 @@
                     <a:bodyPr wrap="square"/>
                     <a:lstStyle/>
                     <a:p>
-                      <a:pPr eaLnBrk="0"/>
                       <a:r>
                         <a:rPr sz="1300" b="1" lang="ko-KR" altLang="en-US">
                           <a:solidFill>
@@ -11438,13 +10413,12 @@
                   </a:tcPr>
                 </a:tc>
               </a:tr>
-              <a:tr h="530351">
+              <a:tr h="603504">
                 <a:tc>
                   <a:txBody>
                     <a:bodyPr wrap="square"/>
                     <a:lstStyle/>
                     <a:p>
-                      <a:pPr eaLnBrk="0"/>
                       <a:r>
                         <a:rPr sz="1400" b="1" lang="ko-KR" altLang="en-US">
                           <a:solidFill>
@@ -11468,7 +10442,6 @@
                     <a:bodyPr wrap="square"/>
                     <a:lstStyle/>
                     <a:p>
-                      <a:pPr eaLnBrk="0"/>
                       <a:r>
                         <a:rPr sz="1400" b="0" lang="ko-KR" altLang="en-US">
                           <a:solidFill>
@@ -11477,7 +10450,7 @@
                           <a:latin typeface="맑은 고딕"/>
                           <a:ea typeface="맑은 고딕"/>
                         </a:rPr>
-                        <a:t>실제 팝업·전시·카페 15~20곳 수집(공식 출처), Supabase DB 구축</a:t>
+                        <a:t>실제 팝업·전시·카페 20곳 정리 (공식 안내문 + ChatGPT)</a:t>
                       </a:r>
                     </a:p>
                   </a:txBody>
@@ -11492,7 +10465,6 @@
                     <a:bodyPr wrap="square"/>
                     <a:lstStyle/>
                     <a:p>
-                      <a:pPr eaLnBrk="0"/>
                       <a:r>
                         <a:rPr sz="1400" b="0" lang="ko-KR" altLang="en-US">
                           <a:solidFill>
@@ -11501,7 +10473,7 @@
                           <a:latin typeface="맑은 고딕"/>
                           <a:ea typeface="맑은 고딕"/>
                         </a:rPr>
-                        <a:t>장소 DB</a:t>
+                        <a:t>장소 데이터 파일</a:t>
                       </a:r>
                     </a:p>
                   </a:txBody>
@@ -11512,13 +10484,12 @@
                   </a:tcPr>
                 </a:tc>
               </a:tr>
-              <a:tr h="530351">
+              <a:tr h="603504">
                 <a:tc>
                   <a:txBody>
                     <a:bodyPr wrap="square"/>
                     <a:lstStyle/>
                     <a:p>
-                      <a:pPr eaLnBrk="0"/>
                       <a:r>
                         <a:rPr sz="1400" b="1" lang="ko-KR" altLang="en-US">
                           <a:solidFill>
@@ -11542,7 +10513,6 @@
                     <a:bodyPr wrap="square"/>
                     <a:lstStyle/>
                     <a:p>
-                      <a:pPr eaLnBrk="0"/>
                       <a:r>
                         <a:rPr sz="1400" b="0" lang="ko-KR" altLang="en-US">
                           <a:solidFill>
@@ -11551,7 +10521,7 @@
                           <a:latin typeface="맑은 고딕"/>
                           <a:ea typeface="맑은 고딕"/>
                         </a:rPr>
-                        <a:t>GPT API 연동: 장소 특징 자동 추출, 사람이 붙인 태그와 정확도 비교</a:t>
+                        <a:t>웹 화면 만들기: 문장 입력, 날짜·지역·예산 선택, 결과 카드</a:t>
                       </a:r>
                     </a:p>
                   </a:txBody>
@@ -11566,7 +10536,6 @@
                     <a:bodyPr wrap="square"/>
                     <a:lstStyle/>
                     <a:p>
-                      <a:pPr eaLnBrk="0"/>
                       <a:r>
                         <a:rPr sz="1400" b="0" lang="ko-KR" altLang="en-US">
                           <a:solidFill>
@@ -11575,7 +10544,7 @@
                           <a:latin typeface="맑은 고딕"/>
                           <a:ea typeface="맑은 고딕"/>
                         </a:rPr>
-                        <a:t>특징 추출 기능</a:t>
+                        <a:t>Streamlit 웹</a:t>
                       </a:r>
                     </a:p>
                   </a:txBody>
@@ -11586,13 +10555,12 @@
                   </a:tcPr>
                 </a:tc>
               </a:tr>
-              <a:tr h="530351">
+              <a:tr h="603504">
                 <a:tc>
                   <a:txBody>
                     <a:bodyPr wrap="square"/>
                     <a:lstStyle/>
                     <a:p>
-                      <a:pPr eaLnBrk="0"/>
                       <a:r>
                         <a:rPr sz="1400" b="1" lang="ko-KR" altLang="en-US">
                           <a:solidFill>
@@ -11616,7 +10584,6 @@
                     <a:bodyPr wrap="square"/>
                     <a:lstStyle/>
                     <a:p>
-                      <a:pPr eaLnBrk="0"/>
                       <a:r>
                         <a:rPr sz="1400" b="0" lang="ko-KR" altLang="en-US">
                           <a:solidFill>
@@ -11625,7 +10592,7 @@
                           <a:latin typeface="맑은 고딕"/>
                           <a:ea typeface="맑은 고딕"/>
                         </a:rPr>
-                        <a:t>취향 질문 화면과 추천 결과 화면(웹), 추천 이유 연동</a:t>
+                        <a:t>추천 이유 표시, 좋아요/별로예요 반영</a:t>
                       </a:r>
                     </a:p>
                   </a:txBody>
@@ -11640,7 +10607,6 @@
                     <a:bodyPr wrap="square"/>
                     <a:lstStyle/>
                     <a:p>
-                      <a:pPr eaLnBrk="0"/>
                       <a:r>
                         <a:rPr sz="1400" b="0" lang="ko-KR" altLang="en-US">
                           <a:solidFill>
@@ -11649,7 +10615,7 @@
                           <a:latin typeface="맑은 고딕"/>
                           <a:ea typeface="맑은 고딕"/>
                         </a:rPr>
-                        <a:t>동작하는 웹</a:t>
+                        <a:t>완성된 추천 흐름</a:t>
                       </a:r>
                     </a:p>
                   </a:txBody>
@@ -11660,13 +10626,12 @@
                   </a:tcPr>
                 </a:tc>
               </a:tr>
-              <a:tr h="530351">
+              <a:tr h="603504">
                 <a:tc>
                   <a:txBody>
                     <a:bodyPr wrap="square"/>
                     <a:lstStyle/>
                     <a:p>
-                      <a:pPr eaLnBrk="0"/>
                       <a:r>
                         <a:rPr sz="1400" b="1" lang="ko-KR" altLang="en-US">
                           <a:solidFill>
@@ -11690,7 +10655,6 @@
                     <a:bodyPr wrap="square"/>
                     <a:lstStyle/>
                     <a:p>
-                      <a:pPr eaLnBrk="0"/>
                       <a:r>
                         <a:rPr sz="1400" b="0" lang="ko-KR" altLang="en-US">
                           <a:solidFill>
@@ -11699,7 +10663,7 @@
                           <a:latin typeface="맑은 고딕"/>
                           <a:ea typeface="맑은 고딕"/>
                         </a:rPr>
-                        <a:t>좋아요/별로예요 피드백 반영, 가상 사용자로 추천 결과 검증</a:t>
+                        <a:t>친구 5명에게 써 보게 하고 의견 반영</a:t>
                       </a:r>
                     </a:p>
                   </a:txBody>
@@ -11714,7 +10678,6 @@
                     <a:bodyPr wrap="square"/>
                     <a:lstStyle/>
                     <a:p>
-                      <a:pPr eaLnBrk="0"/>
                       <a:r>
                         <a:rPr sz="1400" b="0" lang="ko-KR" altLang="en-US">
                           <a:solidFill>
@@ -11723,7 +10686,7 @@
                           <a:latin typeface="맑은 고딕"/>
                           <a:ea typeface="맑은 고딕"/>
                         </a:rPr>
-                        <a:t>검증 결과</a:t>
+                        <a:t>테스트 결과</a:t>
                       </a:r>
                     </a:p>
                   </a:txBody>
@@ -11734,13 +10697,12 @@
                   </a:tcPr>
                 </a:tc>
               </a:tr>
-              <a:tr h="530351">
+              <a:tr h="603504">
                 <a:tc>
                   <a:txBody>
                     <a:bodyPr wrap="square"/>
                     <a:lstStyle/>
                     <a:p>
-                      <a:pPr eaLnBrk="0"/>
                       <a:r>
                         <a:rPr sz="1400" b="1" lang="ko-KR" altLang="en-US">
                           <a:solidFill>
@@ -11764,7 +10726,6 @@
                     <a:bodyPr wrap="square"/>
                     <a:lstStyle/>
                     <a:p>
-                      <a:pPr eaLnBrk="0"/>
                       <a:r>
                         <a:rPr sz="1400" b="0" lang="ko-KR" altLang="en-US">
                           <a:solidFill>
@@ -11773,7 +10734,7 @@
                           <a:latin typeface="맑은 고딕"/>
                           <a:ea typeface="맑은 고딕"/>
                         </a:rPr>
-                        <a:t>정기 업데이트(종료 장소 자동 제외, 신규 후보 등록), API 약관 확인</a:t>
+                        <a:t>무료 배포 (Streamlit Cloud), 최종 발표 준비</a:t>
                       </a:r>
                     </a:p>
                   </a:txBody>
@@ -11788,7 +10749,6 @@
                     <a:bodyPr wrap="square"/>
                     <a:lstStyle/>
                     <a:p>
-                      <a:pPr eaLnBrk="0"/>
                       <a:r>
                         <a:rPr sz="1400" b="0" lang="ko-KR" altLang="en-US">
                           <a:solidFill>
@@ -11797,7 +10757,7 @@
                           <a:latin typeface="맑은 고딕"/>
                           <a:ea typeface="맑은 고딕"/>
                         </a:rPr>
-                        <a:t>자동 갱신 기능</a:t>
+                        <a:t>누구나 접속 가능한 링크</a:t>
                       </a:r>
                     </a:p>
                   </a:txBody>
@@ -11808,80 +10768,6 @@
                   </a:tcPr>
                 </a:tc>
               </a:tr>
-              <a:tr h="530357">
-                <a:tc>
-                  <a:txBody>
-                    <a:bodyPr wrap="square"/>
-                    <a:lstStyle/>
-                    <a:p>
-                      <a:pPr eaLnBrk="0"/>
-                      <a:r>
-                        <a:rPr sz="1400" b="1" lang="ko-KR" altLang="en-US">
-                          <a:solidFill>
-                            <a:srgbClr val="0D6B5F"/>
-                          </a:solidFill>
-                          <a:latin typeface="맑은 고딕"/>
-                          <a:ea typeface="맑은 고딕"/>
-                        </a:rPr>
-                        <a:t>12/2 – 12/8</a:t>
-                      </a:r>
-                    </a:p>
-                  </a:txBody>
-                  <a:tcPr marL="109728" marR="109728" anchor="ctr">
-                    <a:solidFill>
-                      <a:srgbClr val="F6F7F5"/>
-                    </a:solidFill>
-                  </a:tcPr>
-                </a:tc>
-                <a:tc>
-                  <a:txBody>
-                    <a:bodyPr wrap="square"/>
-                    <a:lstStyle/>
-                    <a:p>
-                      <a:pPr eaLnBrk="0"/>
-                      <a:r>
-                        <a:rPr sz="1400" b="0" lang="ko-KR" altLang="en-US">
-                          <a:solidFill>
-                            <a:srgbClr val="1B2422"/>
-                          </a:solidFill>
-                          <a:latin typeface="맑은 고딕"/>
-                          <a:ea typeface="맑은 고딕"/>
-                        </a:rPr>
-                        <a:t>테스트, 버그 수정, 최종 발표 준비</a:t>
-                      </a:r>
-                    </a:p>
-                  </a:txBody>
-                  <a:tcPr marL="109728" marR="109728" anchor="ctr">
-                    <a:solidFill>
-                      <a:srgbClr val="F6F7F5"/>
-                    </a:solidFill>
-                  </a:tcPr>
-                </a:tc>
-                <a:tc>
-                  <a:txBody>
-                    <a:bodyPr wrap="square"/>
-                    <a:lstStyle/>
-                    <a:p>
-                      <a:pPr eaLnBrk="0"/>
-                      <a:r>
-                        <a:rPr sz="1400" b="0" lang="ko-KR" altLang="en-US">
-                          <a:solidFill>
-                            <a:srgbClr val="1B2422"/>
-                          </a:solidFill>
-                          <a:latin typeface="맑은 고딕"/>
-                          <a:ea typeface="맑은 고딕"/>
-                        </a:rPr>
-                        <a:t>최종 시연</a:t>
-                      </a:r>
-                    </a:p>
-                  </a:txBody>
-                  <a:tcPr marL="109728" marR="109728" anchor="ctr">
-                    <a:solidFill>
-                      <a:srgbClr val="F6F7F5"/>
-                    </a:solidFill>
-                  </a:tcPr>
-                </a:tc>
-              </a:tr>
             </a:tbl>
           </a:graphicData>
         </a:graphic>
@@ -11894,7 +10780,7 @@
         </p:nvSpPr>
         <p:spPr>
           <a:xfrm>
-            <a:off x="640080" y="5715000"/>
+            <a:off x="640080" y="5577840"/>
             <a:ext cx="10881360" cy="365760"/>
           </a:xfrm>
           <a:prstGeom prst="rect">
@@ -11908,7 +10794,7 @@
           </a:bodyPr>
           <a:lstStyle/>
           <a:p>
-            <a:pPr algn="l" eaLnBrk="0">
+            <a:pPr algn="l">
               <a:lnSpc>
                 <a:spcPct val="120000"/>
               </a:lnSpc>
@@ -11924,7 +10810,383 @@
                 <a:latin typeface="맑은 고딕"/>
                 <a:ea typeface="맑은 고딕"/>
               </a:rPr>
-              <a:t>기술 스택  Python(추천 알고리즘) · OpenAI GPT API · Supabase(DB) · 웹 화면 · 스케줄러(하루 1회 갱신)</a:t>
+              <a:t>사용 기술  Python · sentence-transformers(무료 임베딩) · Streamlit · JSON 파일  —  비용 0원</a:t>
+            </a:r>
+          </a:p>
+        </p:txBody>
+      </p:sp>
+    </p:spTree>
+  </p:cSld>
+  <p:clrMapOvr>
+    <a:masterClrMapping/>
+  </p:clrMapOvr>
+</p:sld>
+</file>
+
+<file path=ppt/slides/slide9.xml><?xml version="1.0" encoding="utf-8"?>
+<p:sld xmlns:a="http://schemas.openxmlformats.org/drawingml/2006/main" xmlns:p="http://schemas.openxmlformats.org/presentationml/2006/main" xmlns:r="http://schemas.openxmlformats.org/officeDocument/2006/relationships">
+  <p:cSld>
+    <p:bg>
+      <p:bgPr>
+        <a:solidFill>
+          <a:srgbClr val="0D6B5F"/>
+        </a:solidFill>
+        <a:effectLst/>
+      </p:bgPr>
+    </p:bg>
+    <p:spTree>
+      <p:nvGrpSpPr>
+        <p:cNvPr id="1" name=""/>
+        <p:cNvGrpSpPr/>
+        <p:nvPr/>
+      </p:nvGrpSpPr>
+      <p:grpSpPr/>
+      <p:sp>
+        <p:nvSpPr>
+          <p:cNvPr id="2" name="Oval 1"/>
+          <p:cNvSpPr/>
+          <p:nvPr/>
+        </p:nvSpPr>
+        <p:spPr>
+          <a:xfrm>
+            <a:off x="8778240" y="640080"/>
+            <a:ext cx="2926080" cy="2926080"/>
+          </a:xfrm>
+          <a:prstGeom prst="ellipse">
+            <a:avLst/>
+          </a:prstGeom>
+          <a:solidFill>
+            <a:srgbClr val="9FD8CB"/>
+          </a:solidFill>
+          <a:ln>
+            <a:noFill/>
+          </a:ln>
+          <a:effectLst/>
+        </p:spPr>
+        <p:style>
+          <a:lnRef idx="1">
+            <a:schemeClr val="accent1"/>
+          </a:lnRef>
+          <a:fillRef idx="3">
+            <a:schemeClr val="accent1"/>
+          </a:fillRef>
+          <a:effectRef idx="2">
+            <a:schemeClr val="accent1"/>
+          </a:effectRef>
+          <a:fontRef idx="minor">
+            <a:schemeClr val="lt1"/>
+          </a:fontRef>
+        </p:style>
+        <p:txBody>
+          <a:bodyPr rtlCol="0" anchor="ctr"/>
+          <a:lstStyle/>
+          <a:p>
+            <a:pPr algn="ctr"/>
+          </a:p>
+        </p:txBody>
+      </p:sp>
+      <p:sp>
+        <p:nvSpPr>
+          <p:cNvPr id="3" name="Oval 2"/>
+          <p:cNvSpPr/>
+          <p:nvPr/>
+        </p:nvSpPr>
+        <p:spPr>
+          <a:xfrm>
+            <a:off x="10241280" y="2743200"/>
+            <a:ext cx="2194560" cy="2194560"/>
+          </a:xfrm>
+          <a:prstGeom prst="ellipse">
+            <a:avLst/>
+          </a:prstGeom>
+          <a:solidFill>
+            <a:srgbClr val="F6C9B5"/>
+          </a:solidFill>
+          <a:ln>
+            <a:noFill/>
+          </a:ln>
+          <a:effectLst/>
+        </p:spPr>
+        <p:style>
+          <a:lnRef idx="1">
+            <a:schemeClr val="accent1"/>
+          </a:lnRef>
+          <a:fillRef idx="3">
+            <a:schemeClr val="accent1"/>
+          </a:fillRef>
+          <a:effectRef idx="2">
+            <a:schemeClr val="accent1"/>
+          </a:effectRef>
+          <a:fontRef idx="minor">
+            <a:schemeClr val="lt1"/>
+          </a:fontRef>
+        </p:style>
+        <p:txBody>
+          <a:bodyPr rtlCol="0" anchor="ctr"/>
+          <a:lstStyle/>
+          <a:p>
+            <a:pPr algn="ctr"/>
+          </a:p>
+        </p:txBody>
+      </p:sp>
+      <p:sp>
+        <p:nvSpPr>
+          <p:cNvPr id="4" name="Oval 3"/>
+          <p:cNvSpPr/>
+          <p:nvPr/>
+        </p:nvSpPr>
+        <p:spPr>
+          <a:xfrm>
+            <a:off x="8412480" y="4023360"/>
+            <a:ext cx="1463040" cy="1463040"/>
+          </a:xfrm>
+          <a:prstGeom prst="ellipse">
+            <a:avLst/>
+          </a:prstGeom>
+          <a:solidFill>
+            <a:srgbClr val="F5E3A3"/>
+          </a:solidFill>
+          <a:ln>
+            <a:noFill/>
+          </a:ln>
+          <a:effectLst/>
+        </p:spPr>
+        <p:style>
+          <a:lnRef idx="1">
+            <a:schemeClr val="accent1"/>
+          </a:lnRef>
+          <a:fillRef idx="3">
+            <a:schemeClr val="accent1"/>
+          </a:fillRef>
+          <a:effectRef idx="2">
+            <a:schemeClr val="accent1"/>
+          </a:effectRef>
+          <a:fontRef idx="minor">
+            <a:schemeClr val="lt1"/>
+          </a:fontRef>
+        </p:style>
+        <p:txBody>
+          <a:bodyPr rtlCol="0" anchor="ctr"/>
+          <a:lstStyle/>
+          <a:p>
+            <a:pPr algn="ctr"/>
+          </a:p>
+        </p:txBody>
+      </p:sp>
+      <p:sp>
+        <p:nvSpPr>
+          <p:cNvPr id="5" name="Oval 4"/>
+          <p:cNvSpPr/>
+          <p:nvPr/>
+        </p:nvSpPr>
+        <p:spPr>
+          <a:xfrm>
+            <a:off x="11155680" y="1097280"/>
+            <a:ext cx="640080" cy="640080"/>
+          </a:xfrm>
+          <a:prstGeom prst="ellipse">
+            <a:avLst/>
+          </a:prstGeom>
+          <a:solidFill>
+            <a:srgbClr val="F6C9B5"/>
+          </a:solidFill>
+          <a:ln>
+            <a:noFill/>
+          </a:ln>
+          <a:effectLst/>
+        </p:spPr>
+        <p:style>
+          <a:lnRef idx="1">
+            <a:schemeClr val="accent1"/>
+          </a:lnRef>
+          <a:fillRef idx="3">
+            <a:schemeClr val="accent1"/>
+          </a:fillRef>
+          <a:effectRef idx="2">
+            <a:schemeClr val="accent1"/>
+          </a:effectRef>
+          <a:fontRef idx="minor">
+            <a:schemeClr val="lt1"/>
+          </a:fontRef>
+        </p:style>
+        <p:txBody>
+          <a:bodyPr rtlCol="0" anchor="ctr"/>
+          <a:lstStyle/>
+          <a:p>
+            <a:pPr algn="ctr"/>
+          </a:p>
+        </p:txBody>
+      </p:sp>
+      <p:sp>
+        <p:nvSpPr>
+          <p:cNvPr id="6" name="TextBox 5"/>
+          <p:cNvSpPr txBox="1"/>
+          <p:nvPr/>
+        </p:nvSpPr>
+        <p:spPr>
+          <a:xfrm>
+            <a:off x="822960" y="1280160"/>
+            <a:ext cx="7315200" cy="365760"/>
+          </a:xfrm>
+          <a:prstGeom prst="rect">
+            <a:avLst/>
+          </a:prstGeom>
+          <a:noFill/>
+        </p:spPr>
+        <p:txBody>
+          <a:bodyPr wrap="square" anchor="t" lIns="45720" rIns="45720">
+            <a:spAutoFit/>
+          </a:bodyPr>
+          <a:lstStyle/>
+          <a:p>
+            <a:pPr algn="l">
+              <a:lnSpc>
+                <a:spcPct val="120000"/>
+              </a:lnSpc>
+              <a:spcAft>
+                <a:spcPts val="600"/>
+              </a:spcAft>
+            </a:pPr>
+            <a:r>
+              <a:rPr sz="1600" b="1" lang="ko-KR" altLang="en-US">
+                <a:solidFill>
+                  <a:srgbClr val="DCEFEB"/>
+                </a:solidFill>
+                <a:latin typeface="맑은 고딕"/>
+                <a:ea typeface="맑은 고딕"/>
+              </a:rPr>
+              <a:t>최종 목표</a:t>
+            </a:r>
+          </a:p>
+        </p:txBody>
+      </p:sp>
+      <p:sp>
+        <p:nvSpPr>
+          <p:cNvPr id="7" name="TextBox 6"/>
+          <p:cNvSpPr txBox="1"/>
+          <p:nvPr/>
+        </p:nvSpPr>
+        <p:spPr>
+          <a:xfrm>
+            <a:off x="822960" y="1920240"/>
+            <a:ext cx="7772400" cy="2194560"/>
+          </a:xfrm>
+          <a:prstGeom prst="rect">
+            <a:avLst/>
+          </a:prstGeom>
+          <a:noFill/>
+        </p:spPr>
+        <p:txBody>
+          <a:bodyPr wrap="square" anchor="t" lIns="45720" rIns="45720">
+            <a:spAutoFit/>
+          </a:bodyPr>
+          <a:lstStyle/>
+          <a:p>
+            <a:pPr algn="l">
+              <a:lnSpc>
+                <a:spcPct val="130000"/>
+              </a:lnSpc>
+              <a:spcAft>
+                <a:spcPts val="600"/>
+              </a:spcAft>
+            </a:pPr>
+            <a:r>
+              <a:rPr sz="3000" b="1" lang="ko-KR" altLang="en-US">
+                <a:solidFill>
+                  <a:srgbClr val="FFFFFF"/>
+                </a:solidFill>
+                <a:latin typeface="맑은 고딕"/>
+                <a:ea typeface="맑은 고딕"/>
+              </a:rPr>
+              <a:t>기분 한 문장으로 찾는,
+지금 가기 딱 좋은 곳</a:t>
+            </a:r>
+          </a:p>
+        </p:txBody>
+      </p:sp>
+      <p:sp>
+        <p:nvSpPr>
+          <p:cNvPr id="8" name="Rectangle 7"/>
+          <p:cNvSpPr/>
+          <p:nvPr/>
+        </p:nvSpPr>
+        <p:spPr>
+          <a:xfrm>
+            <a:off x="822960" y="4297680"/>
+            <a:ext cx="914400" cy="54864"/>
+          </a:xfrm>
+          <a:prstGeom prst="rect">
+            <a:avLst/>
+          </a:prstGeom>
+          <a:solidFill>
+            <a:srgbClr val="FFFFFF"/>
+          </a:solidFill>
+          <a:ln>
+            <a:noFill/>
+          </a:ln>
+          <a:effectLst/>
+        </p:spPr>
+        <p:style>
+          <a:lnRef idx="1">
+            <a:schemeClr val="accent1"/>
+          </a:lnRef>
+          <a:fillRef idx="3">
+            <a:schemeClr val="accent1"/>
+          </a:fillRef>
+          <a:effectRef idx="2">
+            <a:schemeClr val="accent1"/>
+          </a:effectRef>
+          <a:fontRef idx="minor">
+            <a:schemeClr val="lt1"/>
+          </a:fontRef>
+        </p:style>
+        <p:txBody>
+          <a:bodyPr rtlCol="0" anchor="ctr"/>
+          <a:lstStyle/>
+          <a:p>
+            <a:pPr algn="ctr"/>
+          </a:p>
+        </p:txBody>
+      </p:sp>
+      <p:sp>
+        <p:nvSpPr>
+          <p:cNvPr id="9" name="TextBox 8"/>
+          <p:cNvSpPr txBox="1"/>
+          <p:nvPr/>
+        </p:nvSpPr>
+        <p:spPr>
+          <a:xfrm>
+            <a:off x="822960" y="4846320"/>
+            <a:ext cx="10058400" cy="548640"/>
+          </a:xfrm>
+          <a:prstGeom prst="rect">
+            <a:avLst/>
+          </a:prstGeom>
+          <a:noFill/>
+        </p:spPr>
+        <p:txBody>
+          <a:bodyPr wrap="square" anchor="t" lIns="45720" rIns="45720">
+            <a:spAutoFit/>
+          </a:bodyPr>
+          <a:lstStyle/>
+          <a:p>
+            <a:pPr algn="l">
+              <a:lnSpc>
+                <a:spcPct val="120000"/>
+              </a:lnSpc>
+              <a:spcAft>
+                <a:spcPts val="600"/>
+              </a:spcAft>
+            </a:pPr>
+            <a:r>
+              <a:rPr sz="2200" b="0" lang="ko-KR" altLang="en-US">
+                <a:solidFill>
+                  <a:srgbClr val="FFFFFF"/>
+                </a:solidFill>
+                <a:latin typeface="맑은 고딕"/>
+                <a:ea typeface="맑은 고딕"/>
+              </a:rPr>
+              <a:t>감사합니다  ·  질문 받겠습니다</a:t>
             </a:r>
           </a:p>
         </p:txBody>

--- a/docs/MoodMatch_중간발표.pptx
+++ b/docs/MoodMatch_중간발표.pptx
@@ -6160,8 +6160,8 @@
                           <a:latin typeface="맑은 고딕"/>
                           <a:ea typeface="맑은 고딕"/>
                         </a:rPr>
-                        <a:t>② ChatGPT
-(무료 버전, 데이터 정리용)</a:t>
+                        <a:t>② 생성형 AI (Claude)
+(데이터 정리용)</a:t>
                       </a:r>
                     </a:p>
                   </a:txBody>
@@ -6184,7 +6184,7 @@
                           <a:latin typeface="맑은 고딕"/>
                           <a:ea typeface="맑은 고딕"/>
                         </a:rPr>
-                        <a:t>팝업 공식 안내 문구</a:t>
+                        <a:t>팝업 안내 문구</a:t>
                       </a:r>
                     </a:p>
                   </a:txBody>
@@ -6612,7 +6612,7 @@
                 <a:latin typeface="맑은 고딕"/>
                 <a:ea typeface="맑은 고딕"/>
               </a:rPr>
-              <a:t>demo/recommend.py 실제 실행 결과  ·  테스트 장소 8곳(가상 예시)  ·  방문일 2026-10-31</a:t>
+              <a:t>demo/recommend.py 실제 실행 결과  ·  테스트 장소 9곳(가상 예시 8 + 실제 팝업 1)  ·  방문일 2026-10-31</a:t>
             </a:r>
           </a:p>
         </p:txBody>
@@ -7117,7 +7117,7 @@
                 <a:latin typeface="맑은 고딕"/>
                 <a:ea typeface="맑은 고딕"/>
               </a:rPr>
-              <a:t>레트로 게임 팝업 C</a:t>
+              <a:t>짱구는 못말려 전시 ★실제</a:t>
             </a:r>
           </a:p>
         </p:txBody>
@@ -7160,7 +7160,7 @@
                 <a:latin typeface="맑은 고딕"/>
                 <a:ea typeface="맑은 고딕"/>
               </a:rPr>
-              <a:t>홍대 · 무료</a:t>
+              <a:t>성수 · 가격 미확인</a:t>
             </a:r>
           </a:p>
         </p:txBody>
@@ -7218,7 +7218,7 @@
         <p:spPr>
           <a:xfrm>
             <a:off x="3931920" y="3794760"/>
-            <a:ext cx="562356" cy="109728"/>
+            <a:ext cx="685800" cy="109728"/>
           </a:xfrm>
           <a:prstGeom prst="rect">
             <a:avLst/>
@@ -7291,7 +7291,7 @@
                 <a:latin typeface="맑은 고딕"/>
                 <a:ea typeface="맑은 고딕"/>
               </a:rPr>
-              <a:t>0.41</a:t>
+              <a:t>0.50</a:t>
             </a:r>
           </a:p>
         </p:txBody>
@@ -7425,7 +7425,7 @@
                 <a:latin typeface="맑은 고딕"/>
                 <a:ea typeface="맑은 고딕"/>
               </a:rPr>
-              <a:t>디저트 팝업 E</a:t>
+              <a:t>레트로 게임 팝업 C</a:t>
             </a:r>
           </a:p>
         </p:txBody>
@@ -7468,7 +7468,7 @@
                 <a:latin typeface="맑은 고딕"/>
                 <a:ea typeface="맑은 고딕"/>
               </a:rPr>
-              <a:t>성수 · 8,000원</a:t>
+              <a:t>홍대 · 무료</a:t>
             </a:r>
           </a:p>
         </p:txBody>
@@ -7526,7 +7526,7 @@
         <p:spPr>
           <a:xfrm>
             <a:off x="3931920" y="4507992"/>
-            <a:ext cx="548640" cy="109728"/>
+            <a:ext cx="562356" cy="109728"/>
           </a:xfrm>
           <a:prstGeom prst="rect">
             <a:avLst/>
@@ -7599,7 +7599,7 @@
                 <a:latin typeface="맑은 고딕"/>
                 <a:ea typeface="맑은 고딕"/>
               </a:rPr>
-              <a:t>0.40</a:t>
+              <a:t>0.41</a:t>
             </a:r>
           </a:p>
         </p:txBody>
@@ -8893,7 +8893,7 @@
                 <a:latin typeface="맑은 고딕"/>
                 <a:ea typeface="맑은 고딕"/>
               </a:rPr>
-              <a:t>복잡한 팝업 안내문, ChatGPT로 깔끔하게</a:t>
+              <a:t>실제 팝업 안내문, AI가 데이터로 착착</a:t>
             </a:r>
           </a:p>
         </p:txBody>
@@ -9066,24 +9066,26 @@
                 <a:latin typeface="맑은 고딕"/>
                 <a:ea typeface="맑은 고딕"/>
               </a:rPr>
-              <a:t>ChatGPT에 입력한 프롬프트</a:t>
-            </a:r>
-          </a:p>
-        </p:txBody>
-      </p:sp>
-      <p:sp>
-        <p:nvSpPr>
-          <p:cNvPr id="8" name="Rectangle 7"/>
+              <a:t>입력  ·  실제 팝업 안내문</a:t>
+            </a:r>
+          </a:p>
+        </p:txBody>
+      </p:sp>
+      <p:sp>
+        <p:nvSpPr>
+          <p:cNvPr id="8" name="Rounded Rectangle 7"/>
           <p:cNvSpPr/>
           <p:nvPr/>
         </p:nvSpPr>
         <p:spPr>
           <a:xfrm>
             <a:off x="640080" y="2148840"/>
-            <a:ext cx="5303520" cy="2743200"/>
-          </a:xfrm>
-          <a:prstGeom prst="rect">
-            <a:avLst/>
+            <a:ext cx="5303520" cy="2514600"/>
+          </a:xfrm>
+          <a:prstGeom prst="roundRect">
+            <a:avLst>
+              <a:gd name="adj" fmla="val 8000"/>
+            </a:avLst>
           </a:prstGeom>
           <a:solidFill>
             <a:srgbClr val="FFFFFF"/>
@@ -9126,7 +9128,7 @@
         <p:spPr>
           <a:xfrm>
             <a:off x="822960" y="2286000"/>
-            <a:ext cx="5029200" cy="2560320"/>
+            <a:ext cx="5029200" cy="2286000"/>
           </a:xfrm>
           <a:prstGeom prst="rect">
             <a:avLst/>
@@ -9148,19 +9150,18 @@
               </a:spcAft>
             </a:pPr>
             <a:r>
-              <a:rPr sz="1300" b="0" lang="ko-KR" altLang="en-US">
+              <a:rPr sz="1200" b="0" lang="ko-KR" altLang="en-US">
                 <a:solidFill>
                   <a:srgbClr val="1B2422"/>
                 </a:solidFill>
                 <a:latin typeface="맑은 고딕"/>
                 <a:ea typeface="맑은 고딕"/>
               </a:rPr>
-              <a:t>아래 팝업 안내 문구에서 정보를 뽑아 JSON으로만 답해.
-없는 정보는 null로 둬.
-{"name": "", "region": "", "start": "YYYY-MM-DD",
- "end": "YYYY-MM-DD", "price": 0, "desc": "한두 문장 소개"}
-안내 문구:
-(실제 팝업 공식 안내 문구 붙여넣기)</a:t>
+              <a:t>짱구는 못말려 전시 - 놀자! 시공간 대모험
+📅 2026.10.17(토) ~ 2027.01.24(일) / 매일 11:00~20:00
+📍 성동구 연무장5길 9-29
+짱구와 함께 시공간을 넘나드는 몰입형 캐릭터 전시가 열려요.
+인터랙티브 공간에서 뛰놀고 짱구·친구들과 포토도 남겨보세요.</a:t>
             </a:r>
           </a:p>
         </p:txBody>
@@ -9173,51 +9174,8 @@
         </p:nvSpPr>
         <p:spPr>
           <a:xfrm>
-            <a:off x="640080" y="5074920"/>
-            <a:ext cx="5303520" cy="1097280"/>
-          </a:xfrm>
-          <a:prstGeom prst="rect">
-            <a:avLst/>
-          </a:prstGeom>
-          <a:noFill/>
-        </p:spPr>
-        <p:txBody>
-          <a:bodyPr wrap="square" anchor="t" lIns="45720" rIns="45720">
-            <a:spAutoFit/>
-          </a:bodyPr>
-          <a:lstStyle/>
-          <a:p>
-            <a:pPr algn="l">
-              <a:lnSpc>
-                <a:spcPct val="135000"/>
-              </a:lnSpc>
-              <a:spcAft>
-                <a:spcPts val="600"/>
-              </a:spcAft>
-            </a:pPr>
-            <a:r>
-              <a:rPr sz="1300" b="0" lang="ko-KR" altLang="en-US">
-                <a:solidFill>
-                  <a:srgbClr val="1B2422"/>
-                </a:solidFill>
-                <a:latin typeface="맑은 고딕"/>
-                <a:ea typeface="맑은 고딕"/>
-              </a:rPr>
-              <a:t>팝업 정보는 받아올 공식 API가 없음. 대신 공식 안내문을 붙여넣으면 ChatGPT가 정리하고, 그 결과를 장소 목록에 추가. 크롤링이 없으니 약관 걱정도 없음</a:t>
-            </a:r>
-          </a:p>
-        </p:txBody>
-      </p:sp>
-      <p:sp>
-        <p:nvSpPr>
-          <p:cNvPr id="11" name="TextBox 10"/>
-          <p:cNvSpPr txBox="1"/>
-          <p:nvPr/>
-        </p:nvSpPr>
-        <p:spPr>
-          <a:xfrm>
-            <a:off x="6309360" y="1783080"/>
-            <a:ext cx="5212080" cy="365760"/>
+            <a:off x="640080" y="4709160"/>
+            <a:ext cx="5303520" cy="548640"/>
           </a:xfrm>
           <a:prstGeom prst="rect">
             <a:avLst/>
@@ -9239,86 +9197,41 @@
               </a:spcAft>
             </a:pPr>
             <a:r>
-              <a:rPr sz="1300" b="1" lang="ko-KR" altLang="en-US">
-                <a:solidFill>
-                  <a:srgbClr val="0D6B5F"/>
+              <a:rPr sz="1000" b="0" lang="ko-KR" altLang="en-US">
+                <a:solidFill>
+                  <a:srgbClr val="5C6865"/>
                 </a:solidFill>
                 <a:latin typeface="맑은 고딕"/>
                 <a:ea typeface="맑은 고딕"/>
               </a:rPr>
-              <a:t>실행 결과</a:t>
-            </a:r>
-          </a:p>
-        </p:txBody>
-      </p:sp>
-      <p:sp>
-        <p:nvSpPr>
-          <p:cNvPr id="12" name="Rectangle 11"/>
-          <p:cNvSpPr/>
-          <p:nvPr/>
-        </p:nvSpPr>
-        <p:spPr>
-          <a:xfrm>
-            <a:off x="6309360" y="2148840"/>
-            <a:ext cx="5212080" cy="3931920"/>
+              <a:t>출처: 팝가(popga.co.kr) 「2026년 10월 성수 팝업스토어 총정리」</a:t>
+            </a:r>
+          </a:p>
+        </p:txBody>
+      </p:sp>
+      <p:sp>
+        <p:nvSpPr>
+          <p:cNvPr id="11" name="TextBox 10"/>
+          <p:cNvSpPr txBox="1"/>
+          <p:nvPr/>
+        </p:nvSpPr>
+        <p:spPr>
+          <a:xfrm>
+            <a:off x="640080" y="5029200"/>
+            <a:ext cx="5303520" cy="548640"/>
           </a:xfrm>
           <a:prstGeom prst="rect">
             <a:avLst/>
           </a:prstGeom>
           <a:noFill/>
-          <a:ln w="12700">
-            <a:solidFill>
-              <a:srgbClr val="5C6865"/>
-            </a:solidFill>
-            <a:prstDash val="dash"/>
-          </a:ln>
-          <a:effectLst/>
-        </p:spPr>
-        <p:style>
-          <a:lnRef idx="1">
-            <a:schemeClr val="accent1"/>
-          </a:lnRef>
-          <a:fillRef idx="3">
-            <a:schemeClr val="accent1"/>
-          </a:fillRef>
-          <a:effectRef idx="2">
-            <a:schemeClr val="accent1"/>
-          </a:effectRef>
-          <a:fontRef idx="minor">
-            <a:schemeClr val="lt1"/>
-          </a:fontRef>
-        </p:style>
-        <p:txBody>
-          <a:bodyPr rtlCol="0" anchor="ctr"/>
-          <a:lstStyle/>
-          <a:p>
-            <a:pPr algn="ctr"/>
-          </a:p>
-        </p:txBody>
-      </p:sp>
-      <p:sp>
-        <p:nvSpPr>
-          <p:cNvPr id="13" name="TextBox 12"/>
-          <p:cNvSpPr txBox="1"/>
-          <p:nvPr/>
-        </p:nvSpPr>
-        <p:spPr>
-          <a:xfrm>
-            <a:off x="6309360" y="2148840"/>
-            <a:ext cx="5212080" cy="3931920"/>
-          </a:xfrm>
-          <a:prstGeom prst="rect">
-            <a:avLst/>
-          </a:prstGeom>
-          <a:noFill/>
-        </p:spPr>
-        <p:txBody>
-          <a:bodyPr wrap="square" anchor="ctr" lIns="45720" rIns="45720">
+        </p:spPr>
+        <p:txBody>
+          <a:bodyPr wrap="square" anchor="t" lIns="45720" rIns="45720">
             <a:spAutoFit/>
           </a:bodyPr>
           <a:lstStyle/>
           <a:p>
-            <a:pPr algn="ctr">
+            <a:pPr algn="l">
               <a:lnSpc>
                 <a:spcPct val="120000"/>
               </a:lnSpc>
@@ -9327,14 +9240,245 @@
               </a:spcAft>
             </a:pPr>
             <a:r>
-              <a:rPr sz="1400" b="0" lang="ko-KR" altLang="en-US">
+              <a:rPr sz="1200" b="0" lang="ko-KR" altLang="en-US">
                 <a:solidFill>
                   <a:srgbClr val="5C6865"/>
                 </a:solidFill>
                 <a:latin typeface="맑은 고딕"/>
                 <a:ea typeface="맑은 고딕"/>
               </a:rPr>
-              <a:t>ChatGPT 실행 화면 캡처를 여기에 넣기</a:t>
+              <a:t>요청: “이 안내문에서 이름·지역·기간·가격·소개를 JSON으로 정리. 없는 정보는 null”</a:t>
+            </a:r>
+          </a:p>
+        </p:txBody>
+      </p:sp>
+      <p:sp>
+        <p:nvSpPr>
+          <p:cNvPr id="12" name="TextBox 11"/>
+          <p:cNvSpPr txBox="1"/>
+          <p:nvPr/>
+        </p:nvSpPr>
+        <p:spPr>
+          <a:xfrm>
+            <a:off x="6309360" y="1783080"/>
+            <a:ext cx="5212080" cy="365760"/>
+          </a:xfrm>
+          <a:prstGeom prst="rect">
+            <a:avLst/>
+          </a:prstGeom>
+          <a:noFill/>
+        </p:spPr>
+        <p:txBody>
+          <a:bodyPr wrap="square" anchor="t" lIns="45720" rIns="45720">
+            <a:spAutoFit/>
+          </a:bodyPr>
+          <a:lstStyle/>
+          <a:p>
+            <a:pPr algn="l">
+              <a:lnSpc>
+                <a:spcPct val="120000"/>
+              </a:lnSpc>
+              <a:spcAft>
+                <a:spcPts val="600"/>
+              </a:spcAft>
+            </a:pPr>
+            <a:r>
+              <a:rPr sz="1300" b="1" lang="ko-KR" altLang="en-US">
+                <a:solidFill>
+                  <a:srgbClr val="0D6B5F"/>
+                </a:solidFill>
+                <a:latin typeface="맑은 고딕"/>
+                <a:ea typeface="맑은 고딕"/>
+              </a:rPr>
+              <a:t>출력  ·  생성형 AI(Claude)가 정리한 데이터</a:t>
+            </a:r>
+          </a:p>
+        </p:txBody>
+      </p:sp>
+      <p:sp>
+        <p:nvSpPr>
+          <p:cNvPr id="13" name="Rounded Rectangle 12"/>
+          <p:cNvSpPr/>
+          <p:nvPr/>
+        </p:nvSpPr>
+        <p:spPr>
+          <a:xfrm>
+            <a:off x="6309360" y="2148840"/>
+            <a:ext cx="5212080" cy="3108960"/>
+          </a:xfrm>
+          <a:prstGeom prst="roundRect">
+            <a:avLst>
+              <a:gd name="adj" fmla="val 8000"/>
+            </a:avLst>
+          </a:prstGeom>
+          <a:solidFill>
+            <a:srgbClr val="DCEFEB"/>
+          </a:solidFill>
+          <a:ln>
+            <a:noFill/>
+          </a:ln>
+          <a:effectLst/>
+        </p:spPr>
+        <p:style>
+          <a:lnRef idx="1">
+            <a:schemeClr val="accent1"/>
+          </a:lnRef>
+          <a:fillRef idx="3">
+            <a:schemeClr val="accent1"/>
+          </a:fillRef>
+          <a:effectRef idx="2">
+            <a:schemeClr val="accent1"/>
+          </a:effectRef>
+          <a:fontRef idx="minor">
+            <a:schemeClr val="lt1"/>
+          </a:fontRef>
+        </p:style>
+        <p:txBody>
+          <a:bodyPr rtlCol="0" anchor="ctr"/>
+          <a:lstStyle/>
+          <a:p>
+            <a:pPr algn="ctr"/>
+          </a:p>
+        </p:txBody>
+      </p:sp>
+      <p:sp>
+        <p:nvSpPr>
+          <p:cNvPr id="14" name="TextBox 13"/>
+          <p:cNvSpPr txBox="1"/>
+          <p:nvPr/>
+        </p:nvSpPr>
+        <p:spPr>
+          <a:xfrm>
+            <a:off x="6492240" y="2240280"/>
+            <a:ext cx="4937760" cy="2926080"/>
+          </a:xfrm>
+          <a:prstGeom prst="rect">
+            <a:avLst/>
+          </a:prstGeom>
+          <a:noFill/>
+        </p:spPr>
+        <p:txBody>
+          <a:bodyPr wrap="square" anchor="t" lIns="45720" rIns="45720">
+            <a:spAutoFit/>
+          </a:bodyPr>
+          <a:lstStyle/>
+          <a:p>
+            <a:pPr algn="l">
+              <a:lnSpc>
+                <a:spcPct val="105000"/>
+              </a:lnSpc>
+              <a:spcAft>
+                <a:spcPts val="600"/>
+              </a:spcAft>
+            </a:pPr>
+            <a:r>
+              <a:rPr sz="1100" b="0" lang="ko-KR" altLang="en-US">
+                <a:solidFill>
+                  <a:srgbClr val="1B2422"/>
+                </a:solidFill>
+                <a:latin typeface="맑은 고딕"/>
+                <a:ea typeface="맑은 고딕"/>
+              </a:rPr>
+              <a:t>{
+  "name": "짱구는 못말려 전시 - 놀자! 시공간 대모험",
+  "type": "전시",
+  "region": "성수",
+  "start": "2026-10-17",
+  "end": "2027-01-24",
+  "price": null,
+  "desc": "짱구와 함께 시공간을 넘나드는 몰입형
+           캐릭터 전시. 인터랙티브 공간에서 뛰놀고
+           짱구와 친구들과 사진도 남길 수 있다"
+}</a:t>
+            </a:r>
+          </a:p>
+        </p:txBody>
+      </p:sp>
+      <p:sp>
+        <p:nvSpPr>
+          <p:cNvPr id="15" name="Rounded Rectangle 14"/>
+          <p:cNvSpPr/>
+          <p:nvPr/>
+        </p:nvSpPr>
+        <p:spPr>
+          <a:xfrm>
+            <a:off x="640080" y="5532120"/>
+            <a:ext cx="10881360" cy="594360"/>
+          </a:xfrm>
+          <a:prstGeom prst="roundRect">
+            <a:avLst>
+              <a:gd name="adj" fmla="val 8000"/>
+            </a:avLst>
+          </a:prstGeom>
+          <a:solidFill>
+            <a:srgbClr val="0D6B5F"/>
+          </a:solidFill>
+          <a:ln>
+            <a:noFill/>
+          </a:ln>
+          <a:effectLst/>
+        </p:spPr>
+        <p:style>
+          <a:lnRef idx="1">
+            <a:schemeClr val="accent1"/>
+          </a:lnRef>
+          <a:fillRef idx="3">
+            <a:schemeClr val="accent1"/>
+          </a:fillRef>
+          <a:effectRef idx="2">
+            <a:schemeClr val="accent1"/>
+          </a:effectRef>
+          <a:fontRef idx="minor">
+            <a:schemeClr val="lt1"/>
+          </a:fontRef>
+        </p:style>
+        <p:txBody>
+          <a:bodyPr rtlCol="0" anchor="ctr"/>
+          <a:lstStyle/>
+          <a:p>
+            <a:pPr algn="ctr"/>
+          </a:p>
+        </p:txBody>
+      </p:sp>
+      <p:sp>
+        <p:nvSpPr>
+          <p:cNvPr id="16" name="TextBox 15"/>
+          <p:cNvSpPr txBox="1"/>
+          <p:nvPr/>
+        </p:nvSpPr>
+        <p:spPr>
+          <a:xfrm>
+            <a:off x="868680" y="5532120"/>
+            <a:ext cx="10424160" cy="594360"/>
+          </a:xfrm>
+          <a:prstGeom prst="rect">
+            <a:avLst/>
+          </a:prstGeom>
+          <a:noFill/>
+        </p:spPr>
+        <p:txBody>
+          <a:bodyPr wrap="square" anchor="ctr" lIns="45720" rIns="45720">
+            <a:spAutoFit/>
+          </a:bodyPr>
+          <a:lstStyle/>
+          <a:p>
+            <a:pPr algn="l">
+              <a:lnSpc>
+                <a:spcPct val="120000"/>
+              </a:lnSpc>
+              <a:spcAft>
+                <a:spcPts val="600"/>
+              </a:spcAft>
+            </a:pPr>
+            <a:r>
+              <a:rPr sz="1400" b="1" lang="ko-KR" altLang="en-US">
+                <a:solidFill>
+                  <a:srgbClr val="FFFFFF"/>
+                </a:solidFill>
+                <a:latin typeface="맑은 고딕"/>
+                <a:ea typeface="맑은 고딕"/>
+              </a:rPr>
+              <a:t>이 데이터를 추천 목록에 넣고 돌려 보니  →  사용자 A(“귀여운 거 보면서 사진 찍고 싶어”)에게 2위로 추천</a:t>
             </a:r>
           </a:p>
         </p:txBody>
@@ -9877,7 +10021,7 @@
                           <a:latin typeface="맑은 고딕"/>
                           <a:ea typeface="맑은 고딕"/>
                         </a:rPr>
-                        <a:t>무료 임베딩 모델 + ChatGPT 무료 버전</a:t>
+                        <a:t>무료 임베딩 모델 + 생성형 AI로 데이터 정리</a:t>
                       </a:r>
                     </a:p>
                   </a:txBody>
@@ -10450,7 +10594,7 @@
                           <a:latin typeface="맑은 고딕"/>
                           <a:ea typeface="맑은 고딕"/>
                         </a:rPr>
-                        <a:t>실제 팝업·전시·카페 20곳 정리 (공식 안내문 + ChatGPT)</a:t>
+                        <a:t>실제 팝업·전시·카페 20곳 정리 (공식 안내문 + AI 정리)</a:t>
                       </a:r>
                     </a:p>
                   </a:txBody>

--- a/docs/MoodMatch_중간발표.pptx
+++ b/docs/MoodMatch_중간발표.pptx
@@ -3462,8 +3462,8 @@
         </p:nvSpPr>
         <p:spPr>
           <a:xfrm>
-            <a:off x="822960" y="5120640"/>
-            <a:ext cx="10058400" cy="457200"/>
+            <a:off x="822960" y="4983480"/>
+            <a:ext cx="7315200" cy="822960"/>
           </a:xfrm>
           <a:prstGeom prst="rect">
             <a:avLst/>
@@ -3478,7 +3478,27 @@
           <a:p>
             <a:pPr algn="l">
               <a:lnSpc>
-                <a:spcPct val="120000"/>
+                <a:spcPct val="110000"/>
+              </a:lnSpc>
+              <a:spcAft>
+                <a:spcPts val="200"/>
+              </a:spcAft>
+            </a:pPr>
+            <a:r>
+              <a:rPr sz="1300" b="0" lang="ko-KR" altLang="en-US">
+                <a:solidFill>
+                  <a:srgbClr val="DCEFEB"/>
+                </a:solidFill>
+                <a:latin typeface="맑은 고딕"/>
+                <a:ea typeface="맑은 고딕"/>
+              </a:rPr>
+              <a:t>개인 프로젝트</a:t>
+            </a:r>
+          </a:p>
+          <a:p>
+            <a:pPr algn="l">
+              <a:lnSpc>
+                <a:spcPct val="110000"/>
               </a:lnSpc>
               <a:spcAft>
                 <a:spcPts val="600"/>
@@ -3487,12 +3507,12 @@
             <a:r>
               <a:rPr sz="1600" b="0" lang="ko-KR" altLang="en-US">
                 <a:solidFill>
-                  <a:srgbClr val="DCEFEB"/>
+                  <a:srgbClr val="FFFFFF"/>
                 </a:solidFill>
                 <a:latin typeface="맑은 고딕"/>
                 <a:ea typeface="맑은 고딕"/>
               </a:rPr>
-              <a:t>팀원: (이름 입력)</a:t>
+              <a:t>컴퓨터소프트웨어공학과 4학년  20212143  김준우</a:t>
             </a:r>
           </a:p>
         </p:txBody>
